--- a/Earned Income Tax Credit.pptx
+++ b/Earned Income Tax Credit.pptx
@@ -1,49 +1,49 @@
 
 <file path=ppt/presentation.xml><?xml version="1.0" encoding="utf-8"?>
-<p:presentation xmlns:a="http://schemas.openxmlformats.org/drawingml/2006/main" xmlns:r="http://schemas.openxmlformats.org/officeDocument/2006/relationships" xmlns:mc="http://schemas.openxmlformats.org/markup-compatibility/2006" xmlns:mv="urn:schemas-microsoft-com:mac:vml" xmlns:p="http://schemas.openxmlformats.org/presentationml/2006/main" xmlns:c="http://schemas.openxmlformats.org/drawingml/2006/chart" xmlns:dgm="http://schemas.openxmlformats.org/drawingml/2006/diagram" xmlns:o="urn:schemas-microsoft-com:office:office" xmlns:v="urn:schemas-microsoft-com:vml" xmlns:pvml="urn:schemas-microsoft-com:office:powerpoint" xmlns:com="http://schemas.openxmlformats.org/drawingml/2006/compatibility" xmlns:p14="http://schemas.microsoft.com/office/powerpoint/2010/main" xmlns:p15="http://schemas.microsoft.com/office/powerpoint/2012/main" xmlns:ahyp="http://schemas.microsoft.com/office/drawing/2018/hyperlinkcolor" autoCompressPictures="0" embedTrueTypeFonts="1" strictFirstAndLastChars="0" saveSubsetFonts="1">
+<p:presentation xmlns:a="http://schemas.openxmlformats.org/drawingml/2006/main" xmlns:r="http://schemas.openxmlformats.org/officeDocument/2006/relationships" xmlns:p="http://schemas.openxmlformats.org/presentationml/2006/main" strictFirstAndLastChars="0" embedTrueTypeFonts="1" saveSubsetFonts="1" autoCompressPictures="0">
   <p:sldMasterIdLst>
-    <p:sldMasterId id="2147483659" r:id="rId4"/>
+    <p:sldMasterId id="2147483659" r:id="rId1"/>
   </p:sldMasterIdLst>
   <p:notesMasterIdLst>
-    <p:notesMasterId r:id="rId5"/>
+    <p:notesMasterId r:id="rId13"/>
   </p:notesMasterIdLst>
   <p:sldIdLst>
-    <p:sldId id="256" r:id="rId6"/>
-    <p:sldId id="257" r:id="rId7"/>
-    <p:sldId id="258" r:id="rId8"/>
-    <p:sldId id="259" r:id="rId9"/>
-    <p:sldId id="260" r:id="rId10"/>
-    <p:sldId id="261" r:id="rId11"/>
-    <p:sldId id="262" r:id="rId12"/>
-    <p:sldId id="263" r:id="rId13"/>
-    <p:sldId id="264" r:id="rId14"/>
-    <p:sldId id="265" r:id="rId15"/>
-    <p:sldId id="266" r:id="rId16"/>
+    <p:sldId id="256" r:id="rId2"/>
+    <p:sldId id="257" r:id="rId3"/>
+    <p:sldId id="258" r:id="rId4"/>
+    <p:sldId id="259" r:id="rId5"/>
+    <p:sldId id="260" r:id="rId6"/>
+    <p:sldId id="261" r:id="rId7"/>
+    <p:sldId id="262" r:id="rId8"/>
+    <p:sldId id="263" r:id="rId9"/>
+    <p:sldId id="264" r:id="rId10"/>
+    <p:sldId id="265" r:id="rId11"/>
+    <p:sldId id="266" r:id="rId12"/>
   </p:sldIdLst>
-  <p:sldSz cy="5143500" cx="9144000"/>
+  <p:sldSz cx="9144000" cy="5143500" type="screen16x9"/>
   <p:notesSz cx="6858000" cy="9144000"/>
   <p:embeddedFontLst>
     <p:embeddedFont>
-      <p:font typeface="Economica"/>
-      <p:regular r:id="rId17"/>
-      <p:bold r:id="rId18"/>
-      <p:italic r:id="rId19"/>
-      <p:boldItalic r:id="rId20"/>
+      <p:font typeface="Average" panose="020B0604020202020204" charset="0"/>
+      <p:regular r:id="rId14"/>
     </p:embeddedFont>
     <p:embeddedFont>
-      <p:font typeface="Average"/>
-      <p:regular r:id="rId21"/>
+      <p:font typeface="Economica" panose="020B0604020202020204" charset="0"/>
+      <p:regular r:id="rId15"/>
+      <p:bold r:id="rId16"/>
+      <p:italic r:id="rId17"/>
+      <p:boldItalic r:id="rId18"/>
     </p:embeddedFont>
     <p:embeddedFont>
-      <p:font typeface="Open Sans"/>
-      <p:regular r:id="rId22"/>
-      <p:bold r:id="rId23"/>
-      <p:italic r:id="rId24"/>
-      <p:boldItalic r:id="rId25"/>
+      <p:font typeface="Open Sans" panose="020B0606030504020204" pitchFamily="34" charset="0"/>
+      <p:regular r:id="rId19"/>
+      <p:bold r:id="rId20"/>
+      <p:italic r:id="rId21"/>
+      <p:boldItalic r:id="rId22"/>
     </p:embeddedFont>
   </p:embeddedFontLst>
   <p:defaultTextStyle>
-    <a:defPPr lvl="0" marR="0" rtl="0" algn="l">
+    <a:defPPr marR="0" lvl="0" algn="l" rtl="0">
       <a:lnSpc>
         <a:spcPct val="100000"/>
       </a:lnSpc>
@@ -54,7 +54,7 @@
         <a:spcPts val="0"/>
       </a:spcAft>
     </a:defPPr>
-    <a:lvl1pPr lvl="0" marR="0" rtl="0" algn="l">
+    <a:lvl1pPr marR="0" lvl="0" algn="l" rtl="0">
       <a:lnSpc>
         <a:spcPct val="100000"/>
       </a:lnSpc>
@@ -68,7 +68,7 @@
         <a:srgbClr val="000000"/>
       </a:buClr>
       <a:buFont typeface="Arial"/>
-      <a:defRPr b="0" i="0" sz="1400" u="none" cap="none" strike="noStrike">
+      <a:defRPr sz="1400" b="0" i="0" u="none" strike="noStrike" cap="none">
         <a:solidFill>
           <a:srgbClr val="000000"/>
         </a:solidFill>
@@ -78,7 +78,7 @@
         <a:sym typeface="Arial"/>
       </a:defRPr>
     </a:lvl1pPr>
-    <a:lvl2pPr lvl="1" marR="0" rtl="0" algn="l">
+    <a:lvl2pPr marR="0" lvl="1" algn="l" rtl="0">
       <a:lnSpc>
         <a:spcPct val="100000"/>
       </a:lnSpc>
@@ -92,7 +92,7 @@
         <a:srgbClr val="000000"/>
       </a:buClr>
       <a:buFont typeface="Arial"/>
-      <a:defRPr b="0" i="0" sz="1400" u="none" cap="none" strike="noStrike">
+      <a:defRPr sz="1400" b="0" i="0" u="none" strike="noStrike" cap="none">
         <a:solidFill>
           <a:srgbClr val="000000"/>
         </a:solidFill>
@@ -102,7 +102,7 @@
         <a:sym typeface="Arial"/>
       </a:defRPr>
     </a:lvl2pPr>
-    <a:lvl3pPr lvl="2" marR="0" rtl="0" algn="l">
+    <a:lvl3pPr marR="0" lvl="2" algn="l" rtl="0">
       <a:lnSpc>
         <a:spcPct val="100000"/>
       </a:lnSpc>
@@ -116,7 +116,7 @@
         <a:srgbClr val="000000"/>
       </a:buClr>
       <a:buFont typeface="Arial"/>
-      <a:defRPr b="0" i="0" sz="1400" u="none" cap="none" strike="noStrike">
+      <a:defRPr sz="1400" b="0" i="0" u="none" strike="noStrike" cap="none">
         <a:solidFill>
           <a:srgbClr val="000000"/>
         </a:solidFill>
@@ -126,7 +126,7 @@
         <a:sym typeface="Arial"/>
       </a:defRPr>
     </a:lvl3pPr>
-    <a:lvl4pPr lvl="3" marR="0" rtl="0" algn="l">
+    <a:lvl4pPr marR="0" lvl="3" algn="l" rtl="0">
       <a:lnSpc>
         <a:spcPct val="100000"/>
       </a:lnSpc>
@@ -140,7 +140,7 @@
         <a:srgbClr val="000000"/>
       </a:buClr>
       <a:buFont typeface="Arial"/>
-      <a:defRPr b="0" i="0" sz="1400" u="none" cap="none" strike="noStrike">
+      <a:defRPr sz="1400" b="0" i="0" u="none" strike="noStrike" cap="none">
         <a:solidFill>
           <a:srgbClr val="000000"/>
         </a:solidFill>
@@ -150,7 +150,7 @@
         <a:sym typeface="Arial"/>
       </a:defRPr>
     </a:lvl4pPr>
-    <a:lvl5pPr lvl="4" marR="0" rtl="0" algn="l">
+    <a:lvl5pPr marR="0" lvl="4" algn="l" rtl="0">
       <a:lnSpc>
         <a:spcPct val="100000"/>
       </a:lnSpc>
@@ -164,7 +164,7 @@
         <a:srgbClr val="000000"/>
       </a:buClr>
       <a:buFont typeface="Arial"/>
-      <a:defRPr b="0" i="0" sz="1400" u="none" cap="none" strike="noStrike">
+      <a:defRPr sz="1400" b="0" i="0" u="none" strike="noStrike" cap="none">
         <a:solidFill>
           <a:srgbClr val="000000"/>
         </a:solidFill>
@@ -174,7 +174,7 @@
         <a:sym typeface="Arial"/>
       </a:defRPr>
     </a:lvl5pPr>
-    <a:lvl6pPr lvl="5" marR="0" rtl="0" algn="l">
+    <a:lvl6pPr marR="0" lvl="5" algn="l" rtl="0">
       <a:lnSpc>
         <a:spcPct val="100000"/>
       </a:lnSpc>
@@ -188,7 +188,7 @@
         <a:srgbClr val="000000"/>
       </a:buClr>
       <a:buFont typeface="Arial"/>
-      <a:defRPr b="0" i="0" sz="1400" u="none" cap="none" strike="noStrike">
+      <a:defRPr sz="1400" b="0" i="0" u="none" strike="noStrike" cap="none">
         <a:solidFill>
           <a:srgbClr val="000000"/>
         </a:solidFill>
@@ -198,7 +198,7 @@
         <a:sym typeface="Arial"/>
       </a:defRPr>
     </a:lvl6pPr>
-    <a:lvl7pPr lvl="6" marR="0" rtl="0" algn="l">
+    <a:lvl7pPr marR="0" lvl="6" algn="l" rtl="0">
       <a:lnSpc>
         <a:spcPct val="100000"/>
       </a:lnSpc>
@@ -212,7 +212,7 @@
         <a:srgbClr val="000000"/>
       </a:buClr>
       <a:buFont typeface="Arial"/>
-      <a:defRPr b="0" i="0" sz="1400" u="none" cap="none" strike="noStrike">
+      <a:defRPr sz="1400" b="0" i="0" u="none" strike="noStrike" cap="none">
         <a:solidFill>
           <a:srgbClr val="000000"/>
         </a:solidFill>
@@ -222,7 +222,7 @@
         <a:sym typeface="Arial"/>
       </a:defRPr>
     </a:lvl7pPr>
-    <a:lvl8pPr lvl="7" marR="0" rtl="0" algn="l">
+    <a:lvl8pPr marR="0" lvl="7" algn="l" rtl="0">
       <a:lnSpc>
         <a:spcPct val="100000"/>
       </a:lnSpc>
@@ -236,7 +236,7 @@
         <a:srgbClr val="000000"/>
       </a:buClr>
       <a:buFont typeface="Arial"/>
-      <a:defRPr b="0" i="0" sz="1400" u="none" cap="none" strike="noStrike">
+      <a:defRPr sz="1400" b="0" i="0" u="none" strike="noStrike" cap="none">
         <a:solidFill>
           <a:srgbClr val="000000"/>
         </a:solidFill>
@@ -246,7 +246,7 @@
         <a:sym typeface="Arial"/>
       </a:defRPr>
     </a:lvl8pPr>
-    <a:lvl9pPr lvl="8" marR="0" rtl="0" algn="l">
+    <a:lvl9pPr marR="0" lvl="8" algn="l" rtl="0">
       <a:lnSpc>
         <a:spcPct val="100000"/>
       </a:lnSpc>
@@ -260,7 +260,7 @@
         <a:srgbClr val="000000"/>
       </a:buClr>
       <a:buFont typeface="Arial"/>
-      <a:defRPr b="0" i="0" sz="1400" u="none" cap="none" strike="noStrike">
+      <a:defRPr sz="1400" b="0" i="0" u="none" strike="noStrike" cap="none">
         <a:solidFill>
           <a:srgbClr val="000000"/>
         </a:solidFill>
@@ -273,7 +273,7 @@
   </p:defaultTextStyle>
   <p:extLst>
     <p:ext uri="{EFAFB233-063F-42B5-8137-9DF3F51BA10A}">
-      <p15:sldGuideLst>
+      <p15:sldGuideLst xmlns:p15="http://schemas.microsoft.com/office/powerpoint/2012/main">
         <p15:guide id="1" orient="horz" pos="1620">
           <p15:clr>
             <a:srgbClr val="747775"/>
@@ -291,11 +291,16 @@
 </file>
 
 <file path=ppt/notesMasters/notesMaster1.xml><?xml version="1.0" encoding="utf-8"?>
-<p:notesMaster xmlns:a="http://schemas.openxmlformats.org/drawingml/2006/main" xmlns:r="http://schemas.openxmlformats.org/officeDocument/2006/relationships" xmlns:mc="http://schemas.openxmlformats.org/markup-compatibility/2006" xmlns:mv="urn:schemas-microsoft-com:mac:vml" xmlns:p="http://schemas.openxmlformats.org/presentationml/2006/main" xmlns:c="http://schemas.openxmlformats.org/drawingml/2006/chart" xmlns:dgm="http://schemas.openxmlformats.org/drawingml/2006/diagram" xmlns:o="urn:schemas-microsoft-com:office:office" xmlns:v="urn:schemas-microsoft-com:vml" xmlns:pvml="urn:schemas-microsoft-com:office:powerpoint" xmlns:com="http://schemas.openxmlformats.org/drawingml/2006/compatibility" xmlns:p14="http://schemas.microsoft.com/office/powerpoint/2010/main" xmlns:p15="http://schemas.microsoft.com/office/powerpoint/2012/main" xmlns:ahyp="http://schemas.microsoft.com/office/drawing/2018/hyperlinkcolor">
+<p:notesMaster xmlns:a="http://schemas.openxmlformats.org/drawingml/2006/main" xmlns:r="http://schemas.openxmlformats.org/officeDocument/2006/relationships" xmlns:p="http://schemas.openxmlformats.org/presentationml/2006/main">
   <p:cSld>
+    <p:bg>
+      <p:bgRef idx="1001">
+        <a:schemeClr val="bg1"/>
+      </p:bgRef>
+    </p:bg>
     <p:spTree>
       <p:nvGrpSpPr>
-        <p:cNvPr id="2" name="Shape 2"/>
+        <p:cNvPr id="1" name="Shape 2"/>
         <p:cNvGrpSpPr/>
         <p:nvPr/>
       </p:nvGrpSpPr>
@@ -310,9 +315,11 @@
       <p:sp>
         <p:nvSpPr>
           <p:cNvPr id="3" name="Google Shape;3;n"/>
-          <p:cNvSpPr/>
+          <p:cNvSpPr>
+            <a:spLocks noGrp="1" noRot="1" noChangeAspect="1"/>
+          </p:cNvSpPr>
           <p:nvPr>
-            <p:ph idx="2" type="sldImg"/>
+            <p:ph type="sldImg" idx="2"/>
           </p:nvPr>
         </p:nvSpPr>
         <p:spPr>
@@ -321,9 +328,13 @@
             <a:ext cx="6096075" cy="3429000"/>
           </a:xfrm>
           <a:custGeom>
-            <a:rect b="b" l="l" r="r" t="t"/>
+            <a:avLst/>
+            <a:gdLst/>
+            <a:ahLst/>
+            <a:cxnLst/>
+            <a:rect l="l" t="t" r="r" b="b"/>
             <a:pathLst>
-              <a:path extrusionOk="0" h="120000" w="120000">
+              <a:path w="120000" h="120000" extrusionOk="0">
                 <a:moveTo>
                   <a:pt x="0" y="0"/>
                 </a:moveTo>
@@ -341,23 +352,25 @@
             </a:pathLst>
           </a:custGeom>
           <a:noFill/>
-          <a:ln cap="flat" cmpd="sng" w="9525">
+          <a:ln w="9525" cap="flat" cmpd="sng">
             <a:solidFill>
               <a:srgbClr val="000000"/>
             </a:solidFill>
             <a:prstDash val="solid"/>
             <a:round/>
-            <a:headEnd len="sm" w="sm" type="none"/>
-            <a:tailEnd len="sm" w="sm" type="none"/>
+            <a:headEnd type="none" w="sm" len="sm"/>
+            <a:tailEnd type="none" w="sm" len="sm"/>
           </a:ln>
         </p:spPr>
       </p:sp>
       <p:sp>
         <p:nvSpPr>
           <p:cNvPr id="4" name="Google Shape;4;n"/>
-          <p:cNvSpPr txBox="1"/>
+          <p:cNvSpPr txBox="1">
+            <a:spLocks noGrp="1"/>
+          </p:cNvSpPr>
           <p:nvPr>
-            <p:ph idx="1" type="body"/>
+            <p:ph type="body" idx="1"/>
           </p:nvPr>
         </p:nvSpPr>
         <p:spPr>
@@ -374,11 +387,11 @@
           </a:ln>
         </p:spPr>
         <p:txBody>
-          <a:bodyPr anchorCtr="0" anchor="t" bIns="91425" lIns="91425" spcFirstLastPara="1" rIns="91425" wrap="square" tIns="91425">
+          <a:bodyPr spcFirstLastPara="1" wrap="square" lIns="91425" tIns="91425" rIns="91425" bIns="91425" anchor="t" anchorCtr="0">
             <a:noAutofit/>
           </a:bodyPr>
           <a:lstStyle>
-            <a:lvl1pPr indent="-298450" lvl="0" marL="457200">
+            <a:lvl1pPr marL="457200" lvl="0" indent="-298450">
               <a:spcBef>
                 <a:spcPts val="0"/>
               </a:spcBef>
@@ -389,7 +402,7 @@
               <a:buChar char="●"/>
               <a:defRPr sz="1100"/>
             </a:lvl1pPr>
-            <a:lvl2pPr indent="-298450" lvl="1" marL="914400">
+            <a:lvl2pPr marL="914400" lvl="1" indent="-298450">
               <a:spcBef>
                 <a:spcPts val="0"/>
               </a:spcBef>
@@ -400,7 +413,7 @@
               <a:buChar char="○"/>
               <a:defRPr sz="1100"/>
             </a:lvl2pPr>
-            <a:lvl3pPr indent="-298450" lvl="2" marL="1371600">
+            <a:lvl3pPr marL="1371600" lvl="2" indent="-298450">
               <a:spcBef>
                 <a:spcPts val="0"/>
               </a:spcBef>
@@ -411,7 +424,7 @@
               <a:buChar char="■"/>
               <a:defRPr sz="1100"/>
             </a:lvl3pPr>
-            <a:lvl4pPr indent="-298450" lvl="3" marL="1828800">
+            <a:lvl4pPr marL="1828800" lvl="3" indent="-298450">
               <a:spcBef>
                 <a:spcPts val="0"/>
               </a:spcBef>
@@ -422,7 +435,7 @@
               <a:buChar char="●"/>
               <a:defRPr sz="1100"/>
             </a:lvl4pPr>
-            <a:lvl5pPr indent="-298450" lvl="4" marL="2286000">
+            <a:lvl5pPr marL="2286000" lvl="4" indent="-298450">
               <a:spcBef>
                 <a:spcPts val="0"/>
               </a:spcBef>
@@ -433,7 +446,7 @@
               <a:buChar char="○"/>
               <a:defRPr sz="1100"/>
             </a:lvl5pPr>
-            <a:lvl6pPr indent="-298450" lvl="5" marL="2743200">
+            <a:lvl6pPr marL="2743200" lvl="5" indent="-298450">
               <a:spcBef>
                 <a:spcPts val="0"/>
               </a:spcBef>
@@ -444,7 +457,7 @@
               <a:buChar char="■"/>
               <a:defRPr sz="1100"/>
             </a:lvl6pPr>
-            <a:lvl7pPr indent="-298450" lvl="6" marL="3200400">
+            <a:lvl7pPr marL="3200400" lvl="6" indent="-298450">
               <a:spcBef>
                 <a:spcPts val="0"/>
               </a:spcBef>
@@ -455,7 +468,7 @@
               <a:buChar char="●"/>
               <a:defRPr sz="1100"/>
             </a:lvl7pPr>
-            <a:lvl8pPr indent="-298450" lvl="7" marL="3657600">
+            <a:lvl8pPr marL="3657600" lvl="7" indent="-298450">
               <a:spcBef>
                 <a:spcPts val="0"/>
               </a:spcBef>
@@ -466,7 +479,7 @@
               <a:buChar char="○"/>
               <a:defRPr sz="1100"/>
             </a:lvl8pPr>
-            <a:lvl9pPr indent="-298450" lvl="8" marL="4114800">
+            <a:lvl9pPr marL="4114800" lvl="8" indent="-298450">
               <a:spcBef>
                 <a:spcPts val="0"/>
               </a:spcBef>
@@ -478,14 +491,16 @@
               <a:defRPr sz="1100"/>
             </a:lvl9pPr>
           </a:lstStyle>
-          <a:p/>
+          <a:p>
+            <a:endParaRPr/>
+          </a:p>
         </p:txBody>
       </p:sp>
     </p:spTree>
   </p:cSld>
-  <p:clrMap accent1="accent1" accent2="accent2" accent3="accent3" accent4="accent4" accent5="accent5" accent6="accent6" bg1="lt1" bg2="dk2" tx1="dk1" tx2="lt2" folHlink="folHlink" hlink="hlink"/>
+  <p:clrMap bg1="lt1" tx1="dk1" bg2="dk2" tx2="lt2" accent1="accent1" accent2="accent2" accent3="accent3" accent4="accent4" accent5="accent5" accent6="accent6" hlink="hlink" folHlink="folHlink"/>
   <p:notesStyle>
-    <a:defPPr lvl="0" marR="0" rtl="0" algn="l">
+    <a:defPPr marR="0" lvl="0" algn="l" rtl="0">
       <a:lnSpc>
         <a:spcPct val="100000"/>
       </a:lnSpc>
@@ -496,7 +511,7 @@
         <a:spcPts val="0"/>
       </a:spcAft>
     </a:defPPr>
-    <a:lvl1pPr lvl="0" marR="0" rtl="0" algn="l">
+    <a:lvl1pPr marR="0" lvl="0" algn="l" rtl="0">
       <a:lnSpc>
         <a:spcPct val="100000"/>
       </a:lnSpc>
@@ -510,7 +525,7 @@
         <a:srgbClr val="000000"/>
       </a:buClr>
       <a:buFont typeface="Arial"/>
-      <a:defRPr b="0" i="0" sz="1400" u="none" cap="none" strike="noStrike">
+      <a:defRPr sz="1400" b="0" i="0" u="none" strike="noStrike" cap="none">
         <a:solidFill>
           <a:srgbClr val="000000"/>
         </a:solidFill>
@@ -520,7 +535,7 @@
         <a:sym typeface="Arial"/>
       </a:defRPr>
     </a:lvl1pPr>
-    <a:lvl2pPr lvl="1" marR="0" rtl="0" algn="l">
+    <a:lvl2pPr marR="0" lvl="1" algn="l" rtl="0">
       <a:lnSpc>
         <a:spcPct val="100000"/>
       </a:lnSpc>
@@ -534,7 +549,7 @@
         <a:srgbClr val="000000"/>
       </a:buClr>
       <a:buFont typeface="Arial"/>
-      <a:defRPr b="0" i="0" sz="1400" u="none" cap="none" strike="noStrike">
+      <a:defRPr sz="1400" b="0" i="0" u="none" strike="noStrike" cap="none">
         <a:solidFill>
           <a:srgbClr val="000000"/>
         </a:solidFill>
@@ -544,7 +559,7 @@
         <a:sym typeface="Arial"/>
       </a:defRPr>
     </a:lvl2pPr>
-    <a:lvl3pPr lvl="2" marR="0" rtl="0" algn="l">
+    <a:lvl3pPr marR="0" lvl="2" algn="l" rtl="0">
       <a:lnSpc>
         <a:spcPct val="100000"/>
       </a:lnSpc>
@@ -558,7 +573,7 @@
         <a:srgbClr val="000000"/>
       </a:buClr>
       <a:buFont typeface="Arial"/>
-      <a:defRPr b="0" i="0" sz="1400" u="none" cap="none" strike="noStrike">
+      <a:defRPr sz="1400" b="0" i="0" u="none" strike="noStrike" cap="none">
         <a:solidFill>
           <a:srgbClr val="000000"/>
         </a:solidFill>
@@ -568,7 +583,7 @@
         <a:sym typeface="Arial"/>
       </a:defRPr>
     </a:lvl3pPr>
-    <a:lvl4pPr lvl="3" marR="0" rtl="0" algn="l">
+    <a:lvl4pPr marR="0" lvl="3" algn="l" rtl="0">
       <a:lnSpc>
         <a:spcPct val="100000"/>
       </a:lnSpc>
@@ -582,7 +597,7 @@
         <a:srgbClr val="000000"/>
       </a:buClr>
       <a:buFont typeface="Arial"/>
-      <a:defRPr b="0" i="0" sz="1400" u="none" cap="none" strike="noStrike">
+      <a:defRPr sz="1400" b="0" i="0" u="none" strike="noStrike" cap="none">
         <a:solidFill>
           <a:srgbClr val="000000"/>
         </a:solidFill>
@@ -592,7 +607,7 @@
         <a:sym typeface="Arial"/>
       </a:defRPr>
     </a:lvl4pPr>
-    <a:lvl5pPr lvl="4" marR="0" rtl="0" algn="l">
+    <a:lvl5pPr marR="0" lvl="4" algn="l" rtl="0">
       <a:lnSpc>
         <a:spcPct val="100000"/>
       </a:lnSpc>
@@ -606,7 +621,7 @@
         <a:srgbClr val="000000"/>
       </a:buClr>
       <a:buFont typeface="Arial"/>
-      <a:defRPr b="0" i="0" sz="1400" u="none" cap="none" strike="noStrike">
+      <a:defRPr sz="1400" b="0" i="0" u="none" strike="noStrike" cap="none">
         <a:solidFill>
           <a:srgbClr val="000000"/>
         </a:solidFill>
@@ -616,7 +631,7 @@
         <a:sym typeface="Arial"/>
       </a:defRPr>
     </a:lvl5pPr>
-    <a:lvl6pPr lvl="5" marR="0" rtl="0" algn="l">
+    <a:lvl6pPr marR="0" lvl="5" algn="l" rtl="0">
       <a:lnSpc>
         <a:spcPct val="100000"/>
       </a:lnSpc>
@@ -630,7 +645,7 @@
         <a:srgbClr val="000000"/>
       </a:buClr>
       <a:buFont typeface="Arial"/>
-      <a:defRPr b="0" i="0" sz="1400" u="none" cap="none" strike="noStrike">
+      <a:defRPr sz="1400" b="0" i="0" u="none" strike="noStrike" cap="none">
         <a:solidFill>
           <a:srgbClr val="000000"/>
         </a:solidFill>
@@ -640,7 +655,7 @@
         <a:sym typeface="Arial"/>
       </a:defRPr>
     </a:lvl6pPr>
-    <a:lvl7pPr lvl="6" marR="0" rtl="0" algn="l">
+    <a:lvl7pPr marR="0" lvl="6" algn="l" rtl="0">
       <a:lnSpc>
         <a:spcPct val="100000"/>
       </a:lnSpc>
@@ -654,7 +669,7 @@
         <a:srgbClr val="000000"/>
       </a:buClr>
       <a:buFont typeface="Arial"/>
-      <a:defRPr b="0" i="0" sz="1400" u="none" cap="none" strike="noStrike">
+      <a:defRPr sz="1400" b="0" i="0" u="none" strike="noStrike" cap="none">
         <a:solidFill>
           <a:srgbClr val="000000"/>
         </a:solidFill>
@@ -664,7 +679,7 @@
         <a:sym typeface="Arial"/>
       </a:defRPr>
     </a:lvl7pPr>
-    <a:lvl8pPr lvl="7" marR="0" rtl="0" algn="l">
+    <a:lvl8pPr marR="0" lvl="7" algn="l" rtl="0">
       <a:lnSpc>
         <a:spcPct val="100000"/>
       </a:lnSpc>
@@ -678,7 +693,7 @@
         <a:srgbClr val="000000"/>
       </a:buClr>
       <a:buFont typeface="Arial"/>
-      <a:defRPr b="0" i="0" sz="1400" u="none" cap="none" strike="noStrike">
+      <a:defRPr sz="1400" b="0" i="0" u="none" strike="noStrike" cap="none">
         <a:solidFill>
           <a:srgbClr val="000000"/>
         </a:solidFill>
@@ -688,7 +703,7 @@
         <a:sym typeface="Arial"/>
       </a:defRPr>
     </a:lvl8pPr>
-    <a:lvl9pPr lvl="8" marR="0" rtl="0" algn="l">
+    <a:lvl9pPr marR="0" lvl="8" algn="l" rtl="0">
       <a:lnSpc>
         <a:spcPct val="100000"/>
       </a:lnSpc>
@@ -702,7 +717,7 @@
         <a:srgbClr val="000000"/>
       </a:buClr>
       <a:buFont typeface="Arial"/>
-      <a:defRPr b="0" i="0" sz="1400" u="none" cap="none" strike="noStrike">
+      <a:defRPr sz="1400" b="0" i="0" u="none" strike="noStrike" cap="none">
         <a:solidFill>
           <a:srgbClr val="000000"/>
         </a:solidFill>
@@ -717,11 +732,11 @@
 </file>
 
 <file path=ppt/notesSlides/notesSlide1.xml><?xml version="1.0" encoding="utf-8"?>
-<p:notes xmlns:a="http://schemas.openxmlformats.org/drawingml/2006/main" xmlns:r="http://schemas.openxmlformats.org/officeDocument/2006/relationships" xmlns:mc="http://schemas.openxmlformats.org/markup-compatibility/2006" xmlns:mv="urn:schemas-microsoft-com:mac:vml" xmlns:p="http://schemas.openxmlformats.org/presentationml/2006/main" xmlns:c="http://schemas.openxmlformats.org/drawingml/2006/chart" xmlns:dgm="http://schemas.openxmlformats.org/drawingml/2006/diagram" xmlns:o="urn:schemas-microsoft-com:office:office" xmlns:v="urn:schemas-microsoft-com:vml" xmlns:pvml="urn:schemas-microsoft-com:office:powerpoint" xmlns:com="http://schemas.openxmlformats.org/drawingml/2006/compatibility" xmlns:p14="http://schemas.microsoft.com/office/powerpoint/2010/main" xmlns:p15="http://schemas.microsoft.com/office/powerpoint/2012/main" xmlns:ahyp="http://schemas.microsoft.com/office/drawing/2018/hyperlinkcolor" showMasterPhAnim="0" showMasterSp="0">
+<p:notes xmlns:a="http://schemas.openxmlformats.org/drawingml/2006/main" xmlns:r="http://schemas.openxmlformats.org/officeDocument/2006/relationships" xmlns:p="http://schemas.openxmlformats.org/presentationml/2006/main" showMasterSp="0" showMasterPhAnim="0">
   <p:cSld>
     <p:spTree>
       <p:nvGrpSpPr>
-        <p:cNvPr id="58" name="Shape 58"/>
+        <p:cNvPr id="1" name="Shape 58"/>
         <p:cNvGrpSpPr/>
         <p:nvPr/>
       </p:nvGrpSpPr>
@@ -736,9 +751,11 @@
       <p:sp>
         <p:nvSpPr>
           <p:cNvPr id="59" name="Google Shape;59;p:notes"/>
-          <p:cNvSpPr/>
+          <p:cNvSpPr>
+            <a:spLocks noGrp="1" noRot="1" noChangeAspect="1"/>
+          </p:cNvSpPr>
           <p:nvPr>
-            <p:ph idx="2" type="sldImg"/>
+            <p:ph type="sldImg" idx="2"/>
           </p:nvPr>
         </p:nvSpPr>
         <p:spPr>
@@ -747,9 +764,13 @@
             <a:ext cx="6096075" cy="3429000"/>
           </a:xfrm>
           <a:custGeom>
-            <a:rect b="b" l="l" r="r" t="t"/>
+            <a:avLst/>
+            <a:gdLst/>
+            <a:ahLst/>
+            <a:cxnLst/>
+            <a:rect l="l" t="t" r="r" b="b"/>
             <a:pathLst>
-              <a:path extrusionOk="0" h="120000" w="120000">
+              <a:path w="120000" h="120000" extrusionOk="0">
                 <a:moveTo>
                   <a:pt x="0" y="0"/>
                 </a:moveTo>
@@ -771,9 +792,11 @@
       <p:sp>
         <p:nvSpPr>
           <p:cNvPr id="60" name="Google Shape;60;p:notes"/>
-          <p:cNvSpPr txBox="1"/>
+          <p:cNvSpPr txBox="1">
+            <a:spLocks noGrp="1"/>
+          </p:cNvSpPr>
           <p:nvPr>
-            <p:ph idx="1" type="body"/>
+            <p:ph type="body" idx="1"/>
           </p:nvPr>
         </p:nvSpPr>
         <p:spPr>
@@ -786,12 +809,12 @@
           </a:prstGeom>
         </p:spPr>
         <p:txBody>
-          <a:bodyPr anchorCtr="0" anchor="t" bIns="91425" lIns="91425" spcFirstLastPara="1" rIns="91425" wrap="square" tIns="91425">
+          <a:bodyPr spcFirstLastPara="1" wrap="square" lIns="91425" tIns="91425" rIns="91425" bIns="91425" anchor="t" anchorCtr="0">
             <a:noAutofit/>
           </a:bodyPr>
           <a:lstStyle/>
           <a:p>
-            <a:pPr indent="0" lvl="0" marL="0" rtl="0" algn="l">
+            <a:pPr marL="0" lvl="0" indent="0" algn="l" rtl="0">
               <a:spcBef>
                 <a:spcPts val="0"/>
               </a:spcBef>
@@ -800,9 +823,6 @@
               </a:spcAft>
               <a:buNone/>
             </a:pPr>
-            <a:r>
-              <a:t/>
-            </a:r>
             <a:endParaRPr/>
           </a:p>
         </p:txBody>
@@ -816,11 +836,11 @@
 </file>
 
 <file path=ppt/notesSlides/notesSlide10.xml><?xml version="1.0" encoding="utf-8"?>
-<p:notes xmlns:a="http://schemas.openxmlformats.org/drawingml/2006/main" xmlns:r="http://schemas.openxmlformats.org/officeDocument/2006/relationships" xmlns:mc="http://schemas.openxmlformats.org/markup-compatibility/2006" xmlns:mv="urn:schemas-microsoft-com:mac:vml" xmlns:p="http://schemas.openxmlformats.org/presentationml/2006/main" xmlns:c="http://schemas.openxmlformats.org/drawingml/2006/chart" xmlns:dgm="http://schemas.openxmlformats.org/drawingml/2006/diagram" xmlns:o="urn:schemas-microsoft-com:office:office" xmlns:v="urn:schemas-microsoft-com:vml" xmlns:pvml="urn:schemas-microsoft-com:office:powerpoint" xmlns:com="http://schemas.openxmlformats.org/drawingml/2006/compatibility" xmlns:p14="http://schemas.microsoft.com/office/powerpoint/2010/main" xmlns:p15="http://schemas.microsoft.com/office/powerpoint/2012/main" xmlns:ahyp="http://schemas.microsoft.com/office/drawing/2018/hyperlinkcolor" showMasterPhAnim="0" showMasterSp="0">
+<p:notes xmlns:a="http://schemas.openxmlformats.org/drawingml/2006/main" xmlns:r="http://schemas.openxmlformats.org/officeDocument/2006/relationships" xmlns:p="http://schemas.openxmlformats.org/presentationml/2006/main" showMasterSp="0" showMasterPhAnim="0">
   <p:cSld>
     <p:spTree>
       <p:nvGrpSpPr>
-        <p:cNvPr id="116" name="Shape 116"/>
+        <p:cNvPr id="1" name="Shape 116"/>
         <p:cNvGrpSpPr/>
         <p:nvPr/>
       </p:nvGrpSpPr>
@@ -835,20 +855,26 @@
       <p:sp>
         <p:nvSpPr>
           <p:cNvPr id="117" name="Google Shape;117;g3d8eee31bf7_0_167:notes"/>
-          <p:cNvSpPr/>
+          <p:cNvSpPr>
+            <a:spLocks noGrp="1" noRot="1" noChangeAspect="1"/>
+          </p:cNvSpPr>
           <p:nvPr>
-            <p:ph idx="2" type="sldImg"/>
+            <p:ph type="sldImg" idx="2"/>
           </p:nvPr>
         </p:nvSpPr>
         <p:spPr>
           <a:xfrm>
-            <a:off x="381300" y="685800"/>
+            <a:off x="381000" y="685800"/>
             <a:ext cx="6096000" cy="3429000"/>
           </a:xfrm>
           <a:custGeom>
-            <a:rect b="b" l="l" r="r" t="t"/>
+            <a:avLst/>
+            <a:gdLst/>
+            <a:ahLst/>
+            <a:cxnLst/>
+            <a:rect l="l" t="t" r="r" b="b"/>
             <a:pathLst>
-              <a:path extrusionOk="0" h="120000" w="120000">
+              <a:path w="120000" h="120000" extrusionOk="0">
                 <a:moveTo>
                   <a:pt x="0" y="0"/>
                 </a:moveTo>
@@ -870,9 +896,11 @@
       <p:sp>
         <p:nvSpPr>
           <p:cNvPr id="118" name="Google Shape;118;g3d8eee31bf7_0_167:notes"/>
-          <p:cNvSpPr txBox="1"/>
+          <p:cNvSpPr txBox="1">
+            <a:spLocks noGrp="1"/>
+          </p:cNvSpPr>
           <p:nvPr>
-            <p:ph idx="1" type="body"/>
+            <p:ph type="body" idx="1"/>
           </p:nvPr>
         </p:nvSpPr>
         <p:spPr>
@@ -885,12 +913,12 @@
           </a:prstGeom>
         </p:spPr>
         <p:txBody>
-          <a:bodyPr anchorCtr="0" anchor="t" bIns="91425" lIns="91425" spcFirstLastPara="1" rIns="91425" wrap="square" tIns="91425">
+          <a:bodyPr spcFirstLastPara="1" wrap="square" lIns="91425" tIns="91425" rIns="91425" bIns="91425" anchor="t" anchorCtr="0">
             <a:noAutofit/>
           </a:bodyPr>
           <a:lstStyle/>
           <a:p>
-            <a:pPr indent="0" lvl="0" marL="0" rtl="0" algn="l">
+            <a:pPr marL="0" lvl="0" indent="0" algn="l" rtl="0">
               <a:spcBef>
                 <a:spcPts val="0"/>
               </a:spcBef>
@@ -899,9 +927,6 @@
               </a:spcAft>
               <a:buNone/>
             </a:pPr>
-            <a:r>
-              <a:t/>
-            </a:r>
             <a:endParaRPr/>
           </a:p>
         </p:txBody>
@@ -915,11 +940,11 @@
 </file>
 
 <file path=ppt/notesSlides/notesSlide11.xml><?xml version="1.0" encoding="utf-8"?>
-<p:notes xmlns:a="http://schemas.openxmlformats.org/drawingml/2006/main" xmlns:r="http://schemas.openxmlformats.org/officeDocument/2006/relationships" xmlns:mc="http://schemas.openxmlformats.org/markup-compatibility/2006" xmlns:mv="urn:schemas-microsoft-com:mac:vml" xmlns:p="http://schemas.openxmlformats.org/presentationml/2006/main" xmlns:c="http://schemas.openxmlformats.org/drawingml/2006/chart" xmlns:dgm="http://schemas.openxmlformats.org/drawingml/2006/diagram" xmlns:o="urn:schemas-microsoft-com:office:office" xmlns:v="urn:schemas-microsoft-com:vml" xmlns:pvml="urn:schemas-microsoft-com:office:powerpoint" xmlns:com="http://schemas.openxmlformats.org/drawingml/2006/compatibility" xmlns:p14="http://schemas.microsoft.com/office/powerpoint/2010/main" xmlns:p15="http://schemas.microsoft.com/office/powerpoint/2012/main" xmlns:ahyp="http://schemas.microsoft.com/office/drawing/2018/hyperlinkcolor" showMasterPhAnim="0" showMasterSp="0">
+<p:notes xmlns:a="http://schemas.openxmlformats.org/drawingml/2006/main" xmlns:r="http://schemas.openxmlformats.org/officeDocument/2006/relationships" xmlns:p="http://schemas.openxmlformats.org/presentationml/2006/main" showMasterSp="0" showMasterPhAnim="0">
   <p:cSld>
     <p:spTree>
       <p:nvGrpSpPr>
-        <p:cNvPr id="122" name="Shape 122"/>
+        <p:cNvPr id="1" name="Shape 122"/>
         <p:cNvGrpSpPr/>
         <p:nvPr/>
       </p:nvGrpSpPr>
@@ -934,9 +959,11 @@
       <p:sp>
         <p:nvSpPr>
           <p:cNvPr id="123" name="Google Shape;123;g3d8eee31bf7_0_63:notes"/>
-          <p:cNvSpPr/>
+          <p:cNvSpPr>
+            <a:spLocks noGrp="1" noRot="1" noChangeAspect="1"/>
+          </p:cNvSpPr>
           <p:nvPr>
-            <p:ph idx="2" type="sldImg"/>
+            <p:ph type="sldImg" idx="2"/>
           </p:nvPr>
         </p:nvSpPr>
         <p:spPr>
@@ -945,9 +972,13 @@
             <a:ext cx="6096000" cy="3429000"/>
           </a:xfrm>
           <a:custGeom>
-            <a:rect b="b" l="l" r="r" t="t"/>
+            <a:avLst/>
+            <a:gdLst/>
+            <a:ahLst/>
+            <a:cxnLst/>
+            <a:rect l="l" t="t" r="r" b="b"/>
             <a:pathLst>
-              <a:path extrusionOk="0" h="120000" w="120000">
+              <a:path w="120000" h="120000" extrusionOk="0">
                 <a:moveTo>
                   <a:pt x="0" y="0"/>
                 </a:moveTo>
@@ -969,9 +1000,11 @@
       <p:sp>
         <p:nvSpPr>
           <p:cNvPr id="124" name="Google Shape;124;g3d8eee31bf7_0_63:notes"/>
-          <p:cNvSpPr txBox="1"/>
+          <p:cNvSpPr txBox="1">
+            <a:spLocks noGrp="1"/>
+          </p:cNvSpPr>
           <p:nvPr>
-            <p:ph idx="1" type="body"/>
+            <p:ph type="body" idx="1"/>
           </p:nvPr>
         </p:nvSpPr>
         <p:spPr>
@@ -984,12 +1017,12 @@
           </a:prstGeom>
         </p:spPr>
         <p:txBody>
-          <a:bodyPr anchorCtr="0" anchor="t" bIns="91425" lIns="91425" spcFirstLastPara="1" rIns="91425" wrap="square" tIns="91425">
+          <a:bodyPr spcFirstLastPara="1" wrap="square" lIns="91425" tIns="91425" rIns="91425" bIns="91425" anchor="t" anchorCtr="0">
             <a:noAutofit/>
           </a:bodyPr>
           <a:lstStyle/>
           <a:p>
-            <a:pPr indent="0" lvl="0" marL="0" rtl="0" algn="l">
+            <a:pPr marL="0" lvl="0" indent="0" algn="l" rtl="0">
               <a:spcBef>
                 <a:spcPts val="0"/>
               </a:spcBef>
@@ -998,9 +1031,6 @@
               </a:spcAft>
               <a:buNone/>
             </a:pPr>
-            <a:r>
-              <a:t/>
-            </a:r>
             <a:endParaRPr/>
           </a:p>
         </p:txBody>
@@ -1014,11 +1044,11 @@
 </file>
 
 <file path=ppt/notesSlides/notesSlide2.xml><?xml version="1.0" encoding="utf-8"?>
-<p:notes xmlns:a="http://schemas.openxmlformats.org/drawingml/2006/main" xmlns:r="http://schemas.openxmlformats.org/officeDocument/2006/relationships" xmlns:mc="http://schemas.openxmlformats.org/markup-compatibility/2006" xmlns:mv="urn:schemas-microsoft-com:mac:vml" xmlns:p="http://schemas.openxmlformats.org/presentationml/2006/main" xmlns:c="http://schemas.openxmlformats.org/drawingml/2006/chart" xmlns:dgm="http://schemas.openxmlformats.org/drawingml/2006/diagram" xmlns:o="urn:schemas-microsoft-com:office:office" xmlns:v="urn:schemas-microsoft-com:vml" xmlns:pvml="urn:schemas-microsoft-com:office:powerpoint" xmlns:com="http://schemas.openxmlformats.org/drawingml/2006/compatibility" xmlns:p14="http://schemas.microsoft.com/office/powerpoint/2010/main" xmlns:p15="http://schemas.microsoft.com/office/powerpoint/2012/main" xmlns:ahyp="http://schemas.microsoft.com/office/drawing/2018/hyperlinkcolor" showMasterPhAnim="0" showMasterSp="0">
+<p:notes xmlns:a="http://schemas.openxmlformats.org/drawingml/2006/main" xmlns:r="http://schemas.openxmlformats.org/officeDocument/2006/relationships" xmlns:p="http://schemas.openxmlformats.org/presentationml/2006/main" showMasterSp="0" showMasterPhAnim="0">
   <p:cSld>
     <p:spTree>
       <p:nvGrpSpPr>
-        <p:cNvPr id="64" name="Shape 64"/>
+        <p:cNvPr id="1" name="Shape 64"/>
         <p:cNvGrpSpPr/>
         <p:nvPr/>
       </p:nvGrpSpPr>
@@ -1033,20 +1063,26 @@
       <p:sp>
         <p:nvSpPr>
           <p:cNvPr id="65" name="Google Shape;65;g3d8eee31bf7_0_53:notes"/>
-          <p:cNvSpPr/>
+          <p:cNvSpPr>
+            <a:spLocks noGrp="1" noRot="1" noChangeAspect="1"/>
+          </p:cNvSpPr>
           <p:nvPr>
-            <p:ph idx="2" type="sldImg"/>
+            <p:ph type="sldImg" idx="2"/>
           </p:nvPr>
         </p:nvSpPr>
         <p:spPr>
           <a:xfrm>
-            <a:off x="381300" y="685800"/>
+            <a:off x="381000" y="685800"/>
             <a:ext cx="6096000" cy="3429000"/>
           </a:xfrm>
           <a:custGeom>
-            <a:rect b="b" l="l" r="r" t="t"/>
+            <a:avLst/>
+            <a:gdLst/>
+            <a:ahLst/>
+            <a:cxnLst/>
+            <a:rect l="l" t="t" r="r" b="b"/>
             <a:pathLst>
-              <a:path extrusionOk="0" h="120000" w="120000">
+              <a:path w="120000" h="120000" extrusionOk="0">
                 <a:moveTo>
                   <a:pt x="0" y="0"/>
                 </a:moveTo>
@@ -1068,9 +1104,11 @@
       <p:sp>
         <p:nvSpPr>
           <p:cNvPr id="66" name="Google Shape;66;g3d8eee31bf7_0_53:notes"/>
-          <p:cNvSpPr txBox="1"/>
+          <p:cNvSpPr txBox="1">
+            <a:spLocks noGrp="1"/>
+          </p:cNvSpPr>
           <p:nvPr>
-            <p:ph idx="1" type="body"/>
+            <p:ph type="body" idx="1"/>
           </p:nvPr>
         </p:nvSpPr>
         <p:spPr>
@@ -1083,12 +1121,12 @@
           </a:prstGeom>
         </p:spPr>
         <p:txBody>
-          <a:bodyPr anchorCtr="0" anchor="t" bIns="91425" lIns="91425" spcFirstLastPara="1" rIns="91425" wrap="square" tIns="91425">
+          <a:bodyPr spcFirstLastPara="1" wrap="square" lIns="91425" tIns="91425" rIns="91425" bIns="91425" anchor="t" anchorCtr="0">
             <a:noAutofit/>
           </a:bodyPr>
           <a:lstStyle/>
           <a:p>
-            <a:pPr indent="0" lvl="0" marL="0" rtl="0" algn="l">
+            <a:pPr marL="0" lvl="0" indent="0" algn="l" rtl="0">
               <a:spcBef>
                 <a:spcPts val="0"/>
               </a:spcBef>
@@ -1097,9 +1135,6 @@
               </a:spcAft>
               <a:buNone/>
             </a:pPr>
-            <a:r>
-              <a:t/>
-            </a:r>
             <a:endParaRPr/>
           </a:p>
         </p:txBody>
@@ -1113,11 +1148,11 @@
 </file>
 
 <file path=ppt/notesSlides/notesSlide3.xml><?xml version="1.0" encoding="utf-8"?>
-<p:notes xmlns:a="http://schemas.openxmlformats.org/drawingml/2006/main" xmlns:r="http://schemas.openxmlformats.org/officeDocument/2006/relationships" xmlns:mc="http://schemas.openxmlformats.org/markup-compatibility/2006" xmlns:mv="urn:schemas-microsoft-com:mac:vml" xmlns:p="http://schemas.openxmlformats.org/presentationml/2006/main" xmlns:c="http://schemas.openxmlformats.org/drawingml/2006/chart" xmlns:dgm="http://schemas.openxmlformats.org/drawingml/2006/diagram" xmlns:o="urn:schemas-microsoft-com:office:office" xmlns:v="urn:schemas-microsoft-com:vml" xmlns:pvml="urn:schemas-microsoft-com:office:powerpoint" xmlns:com="http://schemas.openxmlformats.org/drawingml/2006/compatibility" xmlns:p14="http://schemas.microsoft.com/office/powerpoint/2010/main" xmlns:p15="http://schemas.microsoft.com/office/powerpoint/2012/main" xmlns:ahyp="http://schemas.microsoft.com/office/drawing/2018/hyperlinkcolor" showMasterPhAnim="0" showMasterSp="0">
+<p:notes xmlns:a="http://schemas.openxmlformats.org/drawingml/2006/main" xmlns:r="http://schemas.openxmlformats.org/officeDocument/2006/relationships" xmlns:p="http://schemas.openxmlformats.org/presentationml/2006/main" showMasterSp="0" showMasterPhAnim="0">
   <p:cSld>
     <p:spTree>
       <p:nvGrpSpPr>
-        <p:cNvPr id="70" name="Shape 70"/>
+        <p:cNvPr id="1" name="Shape 70"/>
         <p:cNvGrpSpPr/>
         <p:nvPr/>
       </p:nvGrpSpPr>
@@ -1132,9 +1167,11 @@
       <p:sp>
         <p:nvSpPr>
           <p:cNvPr id="71" name="Google Shape;71;g3d8eee31bf7_0_58:notes"/>
-          <p:cNvSpPr/>
+          <p:cNvSpPr>
+            <a:spLocks noGrp="1" noRot="1" noChangeAspect="1"/>
+          </p:cNvSpPr>
           <p:nvPr>
-            <p:ph idx="2" type="sldImg"/>
+            <p:ph type="sldImg" idx="2"/>
           </p:nvPr>
         </p:nvSpPr>
         <p:spPr>
@@ -1143,9 +1180,13 @@
             <a:ext cx="6096000" cy="3429000"/>
           </a:xfrm>
           <a:custGeom>
-            <a:rect b="b" l="l" r="r" t="t"/>
+            <a:avLst/>
+            <a:gdLst/>
+            <a:ahLst/>
+            <a:cxnLst/>
+            <a:rect l="l" t="t" r="r" b="b"/>
             <a:pathLst>
-              <a:path extrusionOk="0" h="120000" w="120000">
+              <a:path w="120000" h="120000" extrusionOk="0">
                 <a:moveTo>
                   <a:pt x="0" y="0"/>
                 </a:moveTo>
@@ -1167,9 +1208,11 @@
       <p:sp>
         <p:nvSpPr>
           <p:cNvPr id="72" name="Google Shape;72;g3d8eee31bf7_0_58:notes"/>
-          <p:cNvSpPr txBox="1"/>
+          <p:cNvSpPr txBox="1">
+            <a:spLocks noGrp="1"/>
+          </p:cNvSpPr>
           <p:nvPr>
-            <p:ph idx="1" type="body"/>
+            <p:ph type="body" idx="1"/>
           </p:nvPr>
         </p:nvSpPr>
         <p:spPr>
@@ -1182,12 +1225,12 @@
           </a:prstGeom>
         </p:spPr>
         <p:txBody>
-          <a:bodyPr anchorCtr="0" anchor="t" bIns="91425" lIns="91425" spcFirstLastPara="1" rIns="91425" wrap="square" tIns="91425">
+          <a:bodyPr spcFirstLastPara="1" wrap="square" lIns="91425" tIns="91425" rIns="91425" bIns="91425" anchor="t" anchorCtr="0">
             <a:noAutofit/>
           </a:bodyPr>
           <a:lstStyle/>
           <a:p>
-            <a:pPr indent="0" lvl="0" marL="0" rtl="0" algn="l">
+            <a:pPr marL="0" lvl="0" indent="0" algn="l" rtl="0">
               <a:spcBef>
                 <a:spcPts val="0"/>
               </a:spcBef>
@@ -1196,9 +1239,6 @@
               </a:spcAft>
               <a:buNone/>
             </a:pPr>
-            <a:r>
-              <a:t/>
-            </a:r>
             <a:endParaRPr/>
           </a:p>
         </p:txBody>
@@ -1212,11 +1252,11 @@
 </file>
 
 <file path=ppt/notesSlides/notesSlide4.xml><?xml version="1.0" encoding="utf-8"?>
-<p:notes xmlns:a="http://schemas.openxmlformats.org/drawingml/2006/main" xmlns:r="http://schemas.openxmlformats.org/officeDocument/2006/relationships" xmlns:mc="http://schemas.openxmlformats.org/markup-compatibility/2006" xmlns:mv="urn:schemas-microsoft-com:mac:vml" xmlns:p="http://schemas.openxmlformats.org/presentationml/2006/main" xmlns:c="http://schemas.openxmlformats.org/drawingml/2006/chart" xmlns:dgm="http://schemas.openxmlformats.org/drawingml/2006/diagram" xmlns:o="urn:schemas-microsoft-com:office:office" xmlns:v="urn:schemas-microsoft-com:vml" xmlns:pvml="urn:schemas-microsoft-com:office:powerpoint" xmlns:com="http://schemas.openxmlformats.org/drawingml/2006/compatibility" xmlns:p14="http://schemas.microsoft.com/office/powerpoint/2010/main" xmlns:p15="http://schemas.microsoft.com/office/powerpoint/2012/main" xmlns:ahyp="http://schemas.microsoft.com/office/drawing/2018/hyperlinkcolor" showMasterPhAnim="0" showMasterSp="0">
+<p:notes xmlns:a="http://schemas.openxmlformats.org/drawingml/2006/main" xmlns:r="http://schemas.openxmlformats.org/officeDocument/2006/relationships" xmlns:p="http://schemas.openxmlformats.org/presentationml/2006/main" showMasterSp="0" showMasterPhAnim="0">
   <p:cSld>
     <p:spTree>
       <p:nvGrpSpPr>
-        <p:cNvPr id="76" name="Shape 76"/>
+        <p:cNvPr id="1" name="Shape 76"/>
         <p:cNvGrpSpPr/>
         <p:nvPr/>
       </p:nvGrpSpPr>
@@ -1231,20 +1271,26 @@
       <p:sp>
         <p:nvSpPr>
           <p:cNvPr id="77" name="Google Shape;77;g3d8eee31bf7_0_88:notes"/>
-          <p:cNvSpPr/>
+          <p:cNvSpPr>
+            <a:spLocks noGrp="1" noRot="1" noChangeAspect="1"/>
+          </p:cNvSpPr>
           <p:nvPr>
-            <p:ph idx="2" type="sldImg"/>
+            <p:ph type="sldImg" idx="2"/>
           </p:nvPr>
         </p:nvSpPr>
         <p:spPr>
           <a:xfrm>
-            <a:off x="381300" y="685800"/>
+            <a:off x="381000" y="685800"/>
             <a:ext cx="6096000" cy="3429000"/>
           </a:xfrm>
           <a:custGeom>
-            <a:rect b="b" l="l" r="r" t="t"/>
+            <a:avLst/>
+            <a:gdLst/>
+            <a:ahLst/>
+            <a:cxnLst/>
+            <a:rect l="l" t="t" r="r" b="b"/>
             <a:pathLst>
-              <a:path extrusionOk="0" h="120000" w="120000">
+              <a:path w="120000" h="120000" extrusionOk="0">
                 <a:moveTo>
                   <a:pt x="0" y="0"/>
                 </a:moveTo>
@@ -1266,9 +1312,11 @@
       <p:sp>
         <p:nvSpPr>
           <p:cNvPr id="78" name="Google Shape;78;g3d8eee31bf7_0_88:notes"/>
-          <p:cNvSpPr txBox="1"/>
+          <p:cNvSpPr txBox="1">
+            <a:spLocks noGrp="1"/>
+          </p:cNvSpPr>
           <p:nvPr>
-            <p:ph idx="1" type="body"/>
+            <p:ph type="body" idx="1"/>
           </p:nvPr>
         </p:nvSpPr>
         <p:spPr>
@@ -1281,12 +1329,12 @@
           </a:prstGeom>
         </p:spPr>
         <p:txBody>
-          <a:bodyPr anchorCtr="0" anchor="t" bIns="91425" lIns="91425" spcFirstLastPara="1" rIns="91425" wrap="square" tIns="91425">
+          <a:bodyPr spcFirstLastPara="1" wrap="square" lIns="91425" tIns="91425" rIns="91425" bIns="91425" anchor="t" anchorCtr="0">
             <a:noAutofit/>
           </a:bodyPr>
           <a:lstStyle/>
           <a:p>
-            <a:pPr indent="0" lvl="0" marL="0" rtl="0" algn="l">
+            <a:pPr marL="0" lvl="0" indent="0" algn="l" rtl="0">
               <a:spcBef>
                 <a:spcPts val="0"/>
               </a:spcBef>
@@ -1295,9 +1343,6 @@
               </a:spcAft>
               <a:buNone/>
             </a:pPr>
-            <a:r>
-              <a:t/>
-            </a:r>
             <a:endParaRPr/>
           </a:p>
         </p:txBody>
@@ -1311,11 +1356,11 @@
 </file>
 
 <file path=ppt/notesSlides/notesSlide5.xml><?xml version="1.0" encoding="utf-8"?>
-<p:notes xmlns:a="http://schemas.openxmlformats.org/drawingml/2006/main" xmlns:r="http://schemas.openxmlformats.org/officeDocument/2006/relationships" xmlns:mc="http://schemas.openxmlformats.org/markup-compatibility/2006" xmlns:mv="urn:schemas-microsoft-com:mac:vml" xmlns:p="http://schemas.openxmlformats.org/presentationml/2006/main" xmlns:c="http://schemas.openxmlformats.org/drawingml/2006/chart" xmlns:dgm="http://schemas.openxmlformats.org/drawingml/2006/diagram" xmlns:o="urn:schemas-microsoft-com:office:office" xmlns:v="urn:schemas-microsoft-com:vml" xmlns:pvml="urn:schemas-microsoft-com:office:powerpoint" xmlns:com="http://schemas.openxmlformats.org/drawingml/2006/compatibility" xmlns:p14="http://schemas.microsoft.com/office/powerpoint/2010/main" xmlns:p15="http://schemas.microsoft.com/office/powerpoint/2012/main" xmlns:ahyp="http://schemas.microsoft.com/office/drawing/2018/hyperlinkcolor" showMasterPhAnim="0" showMasterSp="0">
+<p:notes xmlns:a="http://schemas.openxmlformats.org/drawingml/2006/main" xmlns:r="http://schemas.openxmlformats.org/officeDocument/2006/relationships" xmlns:p="http://schemas.openxmlformats.org/presentationml/2006/main" showMasterSp="0" showMasterPhAnim="0">
   <p:cSld>
     <p:spTree>
       <p:nvGrpSpPr>
-        <p:cNvPr id="83" name="Shape 83"/>
+        <p:cNvPr id="1" name="Shape 83"/>
         <p:cNvGrpSpPr/>
         <p:nvPr/>
       </p:nvGrpSpPr>
@@ -1330,20 +1375,26 @@
       <p:sp>
         <p:nvSpPr>
           <p:cNvPr id="84" name="Google Shape;84;g3d8eee31bf7_0_68:notes"/>
-          <p:cNvSpPr/>
+          <p:cNvSpPr>
+            <a:spLocks noGrp="1" noRot="1" noChangeAspect="1"/>
+          </p:cNvSpPr>
           <p:nvPr>
-            <p:ph idx="2" type="sldImg"/>
+            <p:ph type="sldImg" idx="2"/>
           </p:nvPr>
         </p:nvSpPr>
         <p:spPr>
           <a:xfrm>
-            <a:off x="381300" y="685800"/>
+            <a:off x="381000" y="685800"/>
             <a:ext cx="6096000" cy="3429000"/>
           </a:xfrm>
           <a:custGeom>
-            <a:rect b="b" l="l" r="r" t="t"/>
+            <a:avLst/>
+            <a:gdLst/>
+            <a:ahLst/>
+            <a:cxnLst/>
+            <a:rect l="l" t="t" r="r" b="b"/>
             <a:pathLst>
-              <a:path extrusionOk="0" h="120000" w="120000">
+              <a:path w="120000" h="120000" extrusionOk="0">
                 <a:moveTo>
                   <a:pt x="0" y="0"/>
                 </a:moveTo>
@@ -1365,9 +1416,11 @@
       <p:sp>
         <p:nvSpPr>
           <p:cNvPr id="85" name="Google Shape;85;g3d8eee31bf7_0_68:notes"/>
-          <p:cNvSpPr txBox="1"/>
+          <p:cNvSpPr txBox="1">
+            <a:spLocks noGrp="1"/>
+          </p:cNvSpPr>
           <p:nvPr>
-            <p:ph idx="1" type="body"/>
+            <p:ph type="body" idx="1"/>
           </p:nvPr>
         </p:nvSpPr>
         <p:spPr>
@@ -1380,12 +1433,12 @@
           </a:prstGeom>
         </p:spPr>
         <p:txBody>
-          <a:bodyPr anchorCtr="0" anchor="t" bIns="91425" lIns="91425" spcFirstLastPara="1" rIns="91425" wrap="square" tIns="91425">
+          <a:bodyPr spcFirstLastPara="1" wrap="square" lIns="91425" tIns="91425" rIns="91425" bIns="91425" anchor="t" anchorCtr="0">
             <a:noAutofit/>
           </a:bodyPr>
           <a:lstStyle/>
           <a:p>
-            <a:pPr indent="0" lvl="0" marL="0" rtl="0" algn="l">
+            <a:pPr marL="0" lvl="0" indent="0" algn="l" rtl="0">
               <a:spcBef>
                 <a:spcPts val="0"/>
               </a:spcBef>
@@ -1394,9 +1447,6 @@
               </a:spcAft>
               <a:buNone/>
             </a:pPr>
-            <a:r>
-              <a:t/>
-            </a:r>
             <a:endParaRPr/>
           </a:p>
         </p:txBody>
@@ -1410,11 +1460,11 @@
 </file>
 
 <file path=ppt/notesSlides/notesSlide6.xml><?xml version="1.0" encoding="utf-8"?>
-<p:notes xmlns:a="http://schemas.openxmlformats.org/drawingml/2006/main" xmlns:r="http://schemas.openxmlformats.org/officeDocument/2006/relationships" xmlns:mc="http://schemas.openxmlformats.org/markup-compatibility/2006" xmlns:mv="urn:schemas-microsoft-com:mac:vml" xmlns:p="http://schemas.openxmlformats.org/presentationml/2006/main" xmlns:c="http://schemas.openxmlformats.org/drawingml/2006/chart" xmlns:dgm="http://schemas.openxmlformats.org/drawingml/2006/diagram" xmlns:o="urn:schemas-microsoft-com:office:office" xmlns:v="urn:schemas-microsoft-com:vml" xmlns:pvml="urn:schemas-microsoft-com:office:powerpoint" xmlns:com="http://schemas.openxmlformats.org/drawingml/2006/compatibility" xmlns:p14="http://schemas.microsoft.com/office/powerpoint/2010/main" xmlns:p15="http://schemas.microsoft.com/office/powerpoint/2012/main" xmlns:ahyp="http://schemas.microsoft.com/office/drawing/2018/hyperlinkcolor" showMasterPhAnim="0" showMasterSp="0">
+<p:notes xmlns:a="http://schemas.openxmlformats.org/drawingml/2006/main" xmlns:r="http://schemas.openxmlformats.org/officeDocument/2006/relationships" xmlns:p="http://schemas.openxmlformats.org/presentationml/2006/main" showMasterSp="0" showMasterPhAnim="0">
   <p:cSld>
     <p:spTree>
       <p:nvGrpSpPr>
-        <p:cNvPr id="89" name="Shape 89"/>
+        <p:cNvPr id="1" name="Shape 89"/>
         <p:cNvGrpSpPr/>
         <p:nvPr/>
       </p:nvGrpSpPr>
@@ -1429,20 +1479,26 @@
       <p:sp>
         <p:nvSpPr>
           <p:cNvPr id="90" name="Google Shape;90;g3d8eee31bf7_0_78:notes"/>
-          <p:cNvSpPr/>
+          <p:cNvSpPr>
+            <a:spLocks noGrp="1" noRot="1" noChangeAspect="1"/>
+          </p:cNvSpPr>
           <p:nvPr>
-            <p:ph idx="2" type="sldImg"/>
+            <p:ph type="sldImg" idx="2"/>
           </p:nvPr>
         </p:nvSpPr>
         <p:spPr>
           <a:xfrm>
-            <a:off x="381300" y="685800"/>
+            <a:off x="381000" y="685800"/>
             <a:ext cx="6096000" cy="3429000"/>
           </a:xfrm>
           <a:custGeom>
-            <a:rect b="b" l="l" r="r" t="t"/>
+            <a:avLst/>
+            <a:gdLst/>
+            <a:ahLst/>
+            <a:cxnLst/>
+            <a:rect l="l" t="t" r="r" b="b"/>
             <a:pathLst>
-              <a:path extrusionOk="0" h="120000" w="120000">
+              <a:path w="120000" h="120000" extrusionOk="0">
                 <a:moveTo>
                   <a:pt x="0" y="0"/>
                 </a:moveTo>
@@ -1464,9 +1520,11 @@
       <p:sp>
         <p:nvSpPr>
           <p:cNvPr id="91" name="Google Shape;91;g3d8eee31bf7_0_78:notes"/>
-          <p:cNvSpPr txBox="1"/>
+          <p:cNvSpPr txBox="1">
+            <a:spLocks noGrp="1"/>
+          </p:cNvSpPr>
           <p:nvPr>
-            <p:ph idx="1" type="body"/>
+            <p:ph type="body" idx="1"/>
           </p:nvPr>
         </p:nvSpPr>
         <p:spPr>
@@ -1479,12 +1537,12 @@
           </a:prstGeom>
         </p:spPr>
         <p:txBody>
-          <a:bodyPr anchorCtr="0" anchor="t" bIns="91425" lIns="91425" spcFirstLastPara="1" rIns="91425" wrap="square" tIns="91425">
+          <a:bodyPr spcFirstLastPara="1" wrap="square" lIns="91425" tIns="91425" rIns="91425" bIns="91425" anchor="t" anchorCtr="0">
             <a:noAutofit/>
           </a:bodyPr>
           <a:lstStyle/>
           <a:p>
-            <a:pPr indent="0" lvl="0" marL="0" rtl="0" algn="l">
+            <a:pPr marL="0" lvl="0" indent="0" algn="l" rtl="0">
               <a:spcBef>
                 <a:spcPts val="0"/>
               </a:spcBef>
@@ -1493,9 +1551,6 @@
               </a:spcAft>
               <a:buNone/>
             </a:pPr>
-            <a:r>
-              <a:t/>
-            </a:r>
             <a:endParaRPr/>
           </a:p>
         </p:txBody>
@@ -1509,11 +1564,11 @@
 </file>
 
 <file path=ppt/notesSlides/notesSlide7.xml><?xml version="1.0" encoding="utf-8"?>
-<p:notes xmlns:a="http://schemas.openxmlformats.org/drawingml/2006/main" xmlns:r="http://schemas.openxmlformats.org/officeDocument/2006/relationships" xmlns:mc="http://schemas.openxmlformats.org/markup-compatibility/2006" xmlns:mv="urn:schemas-microsoft-com:mac:vml" xmlns:p="http://schemas.openxmlformats.org/presentationml/2006/main" xmlns:c="http://schemas.openxmlformats.org/drawingml/2006/chart" xmlns:dgm="http://schemas.openxmlformats.org/drawingml/2006/diagram" xmlns:o="urn:schemas-microsoft-com:office:office" xmlns:v="urn:schemas-microsoft-com:vml" xmlns:pvml="urn:schemas-microsoft-com:office:powerpoint" xmlns:com="http://schemas.openxmlformats.org/drawingml/2006/compatibility" xmlns:p14="http://schemas.microsoft.com/office/powerpoint/2010/main" xmlns:p15="http://schemas.microsoft.com/office/powerpoint/2012/main" xmlns:ahyp="http://schemas.microsoft.com/office/drawing/2018/hyperlinkcolor" showMasterPhAnim="0" showMasterSp="0">
+<p:notes xmlns:a="http://schemas.openxmlformats.org/drawingml/2006/main" xmlns:r="http://schemas.openxmlformats.org/officeDocument/2006/relationships" xmlns:p="http://schemas.openxmlformats.org/presentationml/2006/main" showMasterSp="0" showMasterPhAnim="0">
   <p:cSld>
     <p:spTree>
       <p:nvGrpSpPr>
-        <p:cNvPr id="95" name="Shape 95"/>
+        <p:cNvPr id="1" name="Shape 95"/>
         <p:cNvGrpSpPr/>
         <p:nvPr/>
       </p:nvGrpSpPr>
@@ -1528,20 +1583,26 @@
       <p:sp>
         <p:nvSpPr>
           <p:cNvPr id="96" name="Google Shape;96;g3d8eee31bf7_0_83:notes"/>
-          <p:cNvSpPr/>
+          <p:cNvSpPr>
+            <a:spLocks noGrp="1" noRot="1" noChangeAspect="1"/>
+          </p:cNvSpPr>
           <p:nvPr>
-            <p:ph idx="2" type="sldImg"/>
+            <p:ph type="sldImg" idx="2"/>
           </p:nvPr>
         </p:nvSpPr>
         <p:spPr>
           <a:xfrm>
-            <a:off x="381300" y="685800"/>
+            <a:off x="381000" y="685800"/>
             <a:ext cx="6096000" cy="3429000"/>
           </a:xfrm>
           <a:custGeom>
-            <a:rect b="b" l="l" r="r" t="t"/>
+            <a:avLst/>
+            <a:gdLst/>
+            <a:ahLst/>
+            <a:cxnLst/>
+            <a:rect l="l" t="t" r="r" b="b"/>
             <a:pathLst>
-              <a:path extrusionOk="0" h="120000" w="120000">
+              <a:path w="120000" h="120000" extrusionOk="0">
                 <a:moveTo>
                   <a:pt x="0" y="0"/>
                 </a:moveTo>
@@ -1563,9 +1624,11 @@
       <p:sp>
         <p:nvSpPr>
           <p:cNvPr id="97" name="Google Shape;97;g3d8eee31bf7_0_83:notes"/>
-          <p:cNvSpPr txBox="1"/>
+          <p:cNvSpPr txBox="1">
+            <a:spLocks noGrp="1"/>
+          </p:cNvSpPr>
           <p:nvPr>
-            <p:ph idx="1" type="body"/>
+            <p:ph type="body" idx="1"/>
           </p:nvPr>
         </p:nvSpPr>
         <p:spPr>
@@ -1578,12 +1641,12 @@
           </a:prstGeom>
         </p:spPr>
         <p:txBody>
-          <a:bodyPr anchorCtr="0" anchor="t" bIns="91425" lIns="91425" spcFirstLastPara="1" rIns="91425" wrap="square" tIns="91425">
+          <a:bodyPr spcFirstLastPara="1" wrap="square" lIns="91425" tIns="91425" rIns="91425" bIns="91425" anchor="t" anchorCtr="0">
             <a:noAutofit/>
           </a:bodyPr>
           <a:lstStyle/>
           <a:p>
-            <a:pPr indent="0" lvl="0" marL="0" rtl="0" algn="l">
+            <a:pPr marL="0" lvl="0" indent="0" algn="l" rtl="0">
               <a:spcBef>
                 <a:spcPts val="0"/>
               </a:spcBef>
@@ -1592,9 +1655,6 @@
               </a:spcAft>
               <a:buNone/>
             </a:pPr>
-            <a:r>
-              <a:t/>
-            </a:r>
             <a:endParaRPr/>
           </a:p>
         </p:txBody>
@@ -1608,11 +1668,11 @@
 </file>
 
 <file path=ppt/notesSlides/notesSlide8.xml><?xml version="1.0" encoding="utf-8"?>
-<p:notes xmlns:a="http://schemas.openxmlformats.org/drawingml/2006/main" xmlns:r="http://schemas.openxmlformats.org/officeDocument/2006/relationships" xmlns:mc="http://schemas.openxmlformats.org/markup-compatibility/2006" xmlns:mv="urn:schemas-microsoft-com:mac:vml" xmlns:p="http://schemas.openxmlformats.org/presentationml/2006/main" xmlns:c="http://schemas.openxmlformats.org/drawingml/2006/chart" xmlns:dgm="http://schemas.openxmlformats.org/drawingml/2006/diagram" xmlns:o="urn:schemas-microsoft-com:office:office" xmlns:v="urn:schemas-microsoft-com:vml" xmlns:pvml="urn:schemas-microsoft-com:office:powerpoint" xmlns:com="http://schemas.openxmlformats.org/drawingml/2006/compatibility" xmlns:p14="http://schemas.microsoft.com/office/powerpoint/2010/main" xmlns:p15="http://schemas.microsoft.com/office/powerpoint/2012/main" xmlns:ahyp="http://schemas.microsoft.com/office/drawing/2018/hyperlinkcolor" showMasterPhAnim="0" showMasterSp="0">
+<p:notes xmlns:a="http://schemas.openxmlformats.org/drawingml/2006/main" xmlns:r="http://schemas.openxmlformats.org/officeDocument/2006/relationships" xmlns:p="http://schemas.openxmlformats.org/presentationml/2006/main" showMasterSp="0" showMasterPhAnim="0">
   <p:cSld>
     <p:spTree>
       <p:nvGrpSpPr>
-        <p:cNvPr id="102" name="Shape 102"/>
+        <p:cNvPr id="1" name="Shape 102"/>
         <p:cNvGrpSpPr/>
         <p:nvPr/>
       </p:nvGrpSpPr>
@@ -1627,20 +1687,26 @@
       <p:sp>
         <p:nvSpPr>
           <p:cNvPr id="103" name="Google Shape;103;g3d8eee31bf7_0_144:notes"/>
-          <p:cNvSpPr/>
+          <p:cNvSpPr>
+            <a:spLocks noGrp="1" noRot="1" noChangeAspect="1"/>
+          </p:cNvSpPr>
           <p:nvPr>
-            <p:ph idx="2" type="sldImg"/>
+            <p:ph type="sldImg" idx="2"/>
           </p:nvPr>
         </p:nvSpPr>
         <p:spPr>
           <a:xfrm>
-            <a:off x="381300" y="685800"/>
+            <a:off x="381000" y="685800"/>
             <a:ext cx="6096000" cy="3429000"/>
           </a:xfrm>
           <a:custGeom>
-            <a:rect b="b" l="l" r="r" t="t"/>
+            <a:avLst/>
+            <a:gdLst/>
+            <a:ahLst/>
+            <a:cxnLst/>
+            <a:rect l="l" t="t" r="r" b="b"/>
             <a:pathLst>
-              <a:path extrusionOk="0" h="120000" w="120000">
+              <a:path w="120000" h="120000" extrusionOk="0">
                 <a:moveTo>
                   <a:pt x="0" y="0"/>
                 </a:moveTo>
@@ -1662,9 +1728,11 @@
       <p:sp>
         <p:nvSpPr>
           <p:cNvPr id="104" name="Google Shape;104;g3d8eee31bf7_0_144:notes"/>
-          <p:cNvSpPr txBox="1"/>
+          <p:cNvSpPr txBox="1">
+            <a:spLocks noGrp="1"/>
+          </p:cNvSpPr>
           <p:nvPr>
-            <p:ph idx="1" type="body"/>
+            <p:ph type="body" idx="1"/>
           </p:nvPr>
         </p:nvSpPr>
         <p:spPr>
@@ -1677,12 +1745,12 @@
           </a:prstGeom>
         </p:spPr>
         <p:txBody>
-          <a:bodyPr anchorCtr="0" anchor="t" bIns="91425" lIns="91425" spcFirstLastPara="1" rIns="91425" wrap="square" tIns="91425">
+          <a:bodyPr spcFirstLastPara="1" wrap="square" lIns="91425" tIns="91425" rIns="91425" bIns="91425" anchor="t" anchorCtr="0">
             <a:noAutofit/>
           </a:bodyPr>
           <a:lstStyle/>
           <a:p>
-            <a:pPr indent="0" lvl="0" marL="0" rtl="0" algn="l">
+            <a:pPr marL="0" lvl="0" indent="0" algn="l" rtl="0">
               <a:spcBef>
                 <a:spcPts val="0"/>
               </a:spcBef>
@@ -1691,9 +1759,6 @@
               </a:spcAft>
               <a:buNone/>
             </a:pPr>
-            <a:r>
-              <a:t/>
-            </a:r>
             <a:endParaRPr/>
           </a:p>
         </p:txBody>
@@ -1707,11 +1772,11 @@
 </file>
 
 <file path=ppt/notesSlides/notesSlide9.xml><?xml version="1.0" encoding="utf-8"?>
-<p:notes xmlns:a="http://schemas.openxmlformats.org/drawingml/2006/main" xmlns:r="http://schemas.openxmlformats.org/officeDocument/2006/relationships" xmlns:mc="http://schemas.openxmlformats.org/markup-compatibility/2006" xmlns:mv="urn:schemas-microsoft-com:mac:vml" xmlns:p="http://schemas.openxmlformats.org/presentationml/2006/main" xmlns:c="http://schemas.openxmlformats.org/drawingml/2006/chart" xmlns:dgm="http://schemas.openxmlformats.org/drawingml/2006/diagram" xmlns:o="urn:schemas-microsoft-com:office:office" xmlns:v="urn:schemas-microsoft-com:vml" xmlns:pvml="urn:schemas-microsoft-com:office:powerpoint" xmlns:com="http://schemas.openxmlformats.org/drawingml/2006/compatibility" xmlns:p14="http://schemas.microsoft.com/office/powerpoint/2010/main" xmlns:p15="http://schemas.microsoft.com/office/powerpoint/2012/main" xmlns:ahyp="http://schemas.microsoft.com/office/drawing/2018/hyperlinkcolor" showMasterPhAnim="0" showMasterSp="0">
+<p:notes xmlns:a="http://schemas.openxmlformats.org/drawingml/2006/main" xmlns:r="http://schemas.openxmlformats.org/officeDocument/2006/relationships" xmlns:p="http://schemas.openxmlformats.org/presentationml/2006/main" showMasterSp="0" showMasterPhAnim="0">
   <p:cSld>
     <p:spTree>
       <p:nvGrpSpPr>
-        <p:cNvPr id="109" name="Shape 109"/>
+        <p:cNvPr id="1" name="Shape 109"/>
         <p:cNvGrpSpPr/>
         <p:nvPr/>
       </p:nvGrpSpPr>
@@ -1726,20 +1791,26 @@
       <p:sp>
         <p:nvSpPr>
           <p:cNvPr id="110" name="Google Shape;110;g3d8eee31bf7_0_149:notes"/>
-          <p:cNvSpPr/>
+          <p:cNvSpPr>
+            <a:spLocks noGrp="1" noRot="1" noChangeAspect="1"/>
+          </p:cNvSpPr>
           <p:nvPr>
-            <p:ph idx="2" type="sldImg"/>
+            <p:ph type="sldImg" idx="2"/>
           </p:nvPr>
         </p:nvSpPr>
         <p:spPr>
           <a:xfrm>
-            <a:off x="381300" y="685800"/>
+            <a:off x="381000" y="685800"/>
             <a:ext cx="6096000" cy="3429000"/>
           </a:xfrm>
           <a:custGeom>
-            <a:rect b="b" l="l" r="r" t="t"/>
+            <a:avLst/>
+            <a:gdLst/>
+            <a:ahLst/>
+            <a:cxnLst/>
+            <a:rect l="l" t="t" r="r" b="b"/>
             <a:pathLst>
-              <a:path extrusionOk="0" h="120000" w="120000">
+              <a:path w="120000" h="120000" extrusionOk="0">
                 <a:moveTo>
                   <a:pt x="0" y="0"/>
                 </a:moveTo>
@@ -1761,9 +1832,11 @@
       <p:sp>
         <p:nvSpPr>
           <p:cNvPr id="111" name="Google Shape;111;g3d8eee31bf7_0_149:notes"/>
-          <p:cNvSpPr txBox="1"/>
+          <p:cNvSpPr txBox="1">
+            <a:spLocks noGrp="1"/>
+          </p:cNvSpPr>
           <p:nvPr>
-            <p:ph idx="1" type="body"/>
+            <p:ph type="body" idx="1"/>
           </p:nvPr>
         </p:nvSpPr>
         <p:spPr>
@@ -1776,12 +1849,12 @@
           </a:prstGeom>
         </p:spPr>
         <p:txBody>
-          <a:bodyPr anchorCtr="0" anchor="t" bIns="91425" lIns="91425" spcFirstLastPara="1" rIns="91425" wrap="square" tIns="91425">
+          <a:bodyPr spcFirstLastPara="1" wrap="square" lIns="91425" tIns="91425" rIns="91425" bIns="91425" anchor="t" anchorCtr="0">
             <a:noAutofit/>
           </a:bodyPr>
           <a:lstStyle/>
           <a:p>
-            <a:pPr indent="0" lvl="0" marL="0" rtl="0" algn="l">
+            <a:pPr marL="0" lvl="0" indent="0" algn="l" rtl="0">
               <a:spcBef>
                 <a:spcPts val="0"/>
               </a:spcBef>
@@ -1790,9 +1863,6 @@
               </a:spcAft>
               <a:buNone/>
             </a:pPr>
-            <a:r>
-              <a:t/>
-            </a:r>
             <a:endParaRPr/>
           </a:p>
         </p:txBody>
@@ -1806,11 +1876,11 @@
 </file>
 
 <file path=ppt/slideLayouts/slideLayout1.xml><?xml version="1.0" encoding="utf-8"?>
-<p:sldLayout xmlns:a="http://schemas.openxmlformats.org/drawingml/2006/main" xmlns:r="http://schemas.openxmlformats.org/officeDocument/2006/relationships" xmlns:mc="http://schemas.openxmlformats.org/markup-compatibility/2006" xmlns:mv="urn:schemas-microsoft-com:mac:vml" xmlns:p="http://schemas.openxmlformats.org/presentationml/2006/main" xmlns:c="http://schemas.openxmlformats.org/drawingml/2006/chart" xmlns:dgm="http://schemas.openxmlformats.org/drawingml/2006/diagram" xmlns:o="urn:schemas-microsoft-com:office:office" xmlns:v="urn:schemas-microsoft-com:vml" xmlns:pvml="urn:schemas-microsoft-com:office:powerpoint" xmlns:com="http://schemas.openxmlformats.org/drawingml/2006/compatibility" xmlns:p14="http://schemas.microsoft.com/office/powerpoint/2010/main" xmlns:p15="http://schemas.microsoft.com/office/powerpoint/2012/main" xmlns:ahyp="http://schemas.microsoft.com/office/drawing/2018/hyperlinkcolor" matchingName="Title slide" type="title">
+<p:sldLayout xmlns:a="http://schemas.openxmlformats.org/drawingml/2006/main" xmlns:r="http://schemas.openxmlformats.org/officeDocument/2006/relationships" xmlns:p="http://schemas.openxmlformats.org/presentationml/2006/main" matchingName="Title slide" type="title">
   <p:cSld name="TITLE">
     <p:spTree>
       <p:nvGrpSpPr>
-        <p:cNvPr id="9" name="Shape 9"/>
+        <p:cNvPr id="1" name="Shape 9"/>
         <p:cNvGrpSpPr/>
         <p:nvPr/>
       </p:nvGrpSpPr>
@@ -1834,9 +1904,13 @@
             <a:ext cx="1081625" cy="1124950"/>
           </a:xfrm>
           <a:custGeom>
-            <a:rect b="b" l="l" r="r" t="t"/>
+            <a:avLst/>
+            <a:gdLst/>
+            <a:ahLst/>
+            <a:cxnLst/>
+            <a:rect l="l" t="t" r="r" b="b"/>
             <a:pathLst>
-              <a:path extrusionOk="0" h="44998" w="43265">
+              <a:path w="43265" h="44998" extrusionOk="0">
                 <a:moveTo>
                   <a:pt x="0" y="44998"/>
                 </a:moveTo>
@@ -1850,16 +1924,23 @@
             </a:pathLst>
           </a:custGeom>
           <a:noFill/>
-          <a:ln cap="flat" cmpd="sng" w="28575">
+          <a:ln w="28575" cap="flat" cmpd="sng">
             <a:solidFill>
               <a:schemeClr val="lt2"/>
             </a:solidFill>
             <a:prstDash val="solid"/>
             <a:miter lim="8000"/>
-            <a:headEnd len="sm" w="sm" type="none"/>
-            <a:tailEnd len="sm" w="sm" type="none"/>
+            <a:headEnd type="none" w="sm" len="sm"/>
+            <a:tailEnd type="none" w="sm" len="sm"/>
           </a:ln>
         </p:spPr>
+        <p:txBody>
+          <a:bodyPr/>
+          <a:lstStyle/>
+          <a:p>
+            <a:endParaRPr lang="en-US"/>
+          </a:p>
+        </p:txBody>
       </p:sp>
       <p:sp>
         <p:nvSpPr>
@@ -1873,9 +1954,13 @@
             <a:ext cx="1081625" cy="1124950"/>
           </a:xfrm>
           <a:custGeom>
-            <a:rect b="b" l="l" r="r" t="t"/>
+            <a:avLst/>
+            <a:gdLst/>
+            <a:ahLst/>
+            <a:cxnLst/>
+            <a:rect l="l" t="t" r="r" b="b"/>
             <a:pathLst>
-              <a:path extrusionOk="0" h="44998" w="43265">
+              <a:path w="43265" h="44998" extrusionOk="0">
                 <a:moveTo>
                   <a:pt x="0" y="44998"/>
                 </a:moveTo>
@@ -1889,21 +1974,30 @@
             </a:pathLst>
           </a:custGeom>
           <a:noFill/>
-          <a:ln cap="flat" cmpd="sng" w="28575">
+          <a:ln w="28575" cap="flat" cmpd="sng">
             <a:solidFill>
               <a:schemeClr val="lt2"/>
             </a:solidFill>
             <a:prstDash val="solid"/>
             <a:miter lim="8000"/>
-            <a:headEnd len="sm" w="sm" type="none"/>
-            <a:tailEnd len="sm" w="sm" type="none"/>
+            <a:headEnd type="none" w="sm" len="sm"/>
+            <a:tailEnd type="none" w="sm" len="sm"/>
           </a:ln>
         </p:spPr>
+        <p:txBody>
+          <a:bodyPr/>
+          <a:lstStyle/>
+          <a:p>
+            <a:endParaRPr lang="en-US"/>
+          </a:p>
+        </p:txBody>
       </p:sp>
       <p:sp>
         <p:nvSpPr>
           <p:cNvPr id="12" name="Google Shape;12;p2"/>
-          <p:cNvSpPr txBox="1"/>
+          <p:cNvSpPr txBox="1">
+            <a:spLocks noGrp="1"/>
+          </p:cNvSpPr>
           <p:nvPr>
             <p:ph type="ctrTitle"/>
           </p:nvPr>
@@ -1918,7 +2012,7 @@
           </a:prstGeom>
         </p:spPr>
         <p:txBody>
-          <a:bodyPr anchorCtr="0" anchor="b" bIns="91425" lIns="91425" spcFirstLastPara="1" rIns="91425" wrap="square" tIns="91425">
+          <a:bodyPr spcFirstLastPara="1" wrap="square" lIns="91425" tIns="91425" rIns="91425" bIns="91425" anchor="b" anchorCtr="0">
             <a:normAutofit/>
           </a:bodyPr>
           <a:lstStyle>
@@ -2022,15 +2116,19 @@
               <a:defRPr/>
             </a:lvl9pPr>
           </a:lstStyle>
-          <a:p/>
+          <a:p>
+            <a:endParaRPr/>
+          </a:p>
         </p:txBody>
       </p:sp>
       <p:sp>
         <p:nvSpPr>
           <p:cNvPr id="13" name="Google Shape;13;p2"/>
-          <p:cNvSpPr txBox="1"/>
+          <p:cNvSpPr txBox="1">
+            <a:spLocks noGrp="1"/>
+          </p:cNvSpPr>
           <p:nvPr>
-            <p:ph idx="1" type="subTitle"/>
+            <p:ph type="subTitle" idx="1"/>
           </p:nvPr>
         </p:nvSpPr>
         <p:spPr>
@@ -2043,7 +2141,7 @@
           </a:prstGeom>
         </p:spPr>
         <p:txBody>
-          <a:bodyPr anchorCtr="0" anchor="t" bIns="91425" lIns="91425" spcFirstLastPara="1" rIns="91425" wrap="square" tIns="91425">
+          <a:bodyPr spcFirstLastPara="1" wrap="square" lIns="91425" tIns="91425" rIns="91425" bIns="91425" anchor="t" anchorCtr="0">
             <a:normAutofit/>
           </a:bodyPr>
           <a:lstStyle>
@@ -2228,15 +2326,19 @@
               </a:defRPr>
             </a:lvl9pPr>
           </a:lstStyle>
-          <a:p/>
+          <a:p>
+            <a:endParaRPr/>
+          </a:p>
         </p:txBody>
       </p:sp>
       <p:sp>
         <p:nvSpPr>
           <p:cNvPr id="14" name="Google Shape;14;p2"/>
-          <p:cNvSpPr txBox="1"/>
+          <p:cNvSpPr txBox="1">
+            <a:spLocks noGrp="1"/>
+          </p:cNvSpPr>
           <p:nvPr>
-            <p:ph idx="12" type="sldNum"/>
+            <p:ph type="sldNum" idx="12"/>
           </p:nvPr>
         </p:nvSpPr>
         <p:spPr>
@@ -2249,7 +2351,7 @@
           </a:prstGeom>
         </p:spPr>
         <p:txBody>
-          <a:bodyPr anchorCtr="0" anchor="ctr" bIns="91425" lIns="91425" spcFirstLastPara="1" rIns="91425" wrap="square" tIns="91425">
+          <a:bodyPr spcFirstLastPara="1" wrap="square" lIns="91425" tIns="91425" rIns="91425" bIns="91425" anchor="ctr" anchorCtr="0">
             <a:normAutofit/>
           </a:bodyPr>
           <a:lstStyle>
@@ -2291,7 +2393,7 @@
             </a:lvl9pPr>
           </a:lstStyle>
           <a:p>
-            <a:pPr indent="0" lvl="0" marL="0" rtl="0" algn="r">
+            <a:pPr marL="0" lvl="0" indent="0" algn="r" rtl="0">
               <a:spcBef>
                 <a:spcPts val="0"/>
               </a:spcBef>
@@ -2317,11 +2419,11 @@
 </file>
 
 <file path=ppt/slideLayouts/slideLayout10.xml><?xml version="1.0" encoding="utf-8"?>
-<p:sldLayout xmlns:a="http://schemas.openxmlformats.org/drawingml/2006/main" xmlns:r="http://schemas.openxmlformats.org/officeDocument/2006/relationships" xmlns:mc="http://schemas.openxmlformats.org/markup-compatibility/2006" xmlns:mv="urn:schemas-microsoft-com:mac:vml" xmlns:p="http://schemas.openxmlformats.org/presentationml/2006/main" xmlns:c="http://schemas.openxmlformats.org/drawingml/2006/chart" xmlns:dgm="http://schemas.openxmlformats.org/drawingml/2006/diagram" xmlns:o="urn:schemas-microsoft-com:office:office" xmlns:v="urn:schemas-microsoft-com:vml" xmlns:pvml="urn:schemas-microsoft-com:office:powerpoint" xmlns:com="http://schemas.openxmlformats.org/drawingml/2006/compatibility" xmlns:p14="http://schemas.microsoft.com/office/powerpoint/2010/main" xmlns:p15="http://schemas.microsoft.com/office/powerpoint/2012/main" xmlns:ahyp="http://schemas.microsoft.com/office/drawing/2018/hyperlinkcolor" matchingName="Big number">
+<p:sldLayout xmlns:a="http://schemas.openxmlformats.org/drawingml/2006/main" xmlns:r="http://schemas.openxmlformats.org/officeDocument/2006/relationships" xmlns:p="http://schemas.openxmlformats.org/presentationml/2006/main" matchingName="Big number">
   <p:cSld name="BIG_NUMBER">
     <p:spTree>
       <p:nvGrpSpPr>
-        <p:cNvPr id="51" name="Shape 51"/>
+        <p:cNvPr id="1" name="Shape 51"/>
         <p:cNvGrpSpPr/>
         <p:nvPr/>
       </p:nvGrpSpPr>
@@ -2355,12 +2457,12 @@
           </a:ln>
         </p:spPr>
         <p:txBody>
-          <a:bodyPr anchorCtr="0" anchor="ctr" bIns="91425" lIns="91425" spcFirstLastPara="1" rIns="91425" wrap="square" tIns="91425">
+          <a:bodyPr spcFirstLastPara="1" wrap="square" lIns="91425" tIns="91425" rIns="91425" bIns="91425" anchor="ctr" anchorCtr="0">
             <a:noAutofit/>
           </a:bodyPr>
           <a:lstStyle/>
           <a:p>
-            <a:pPr indent="0" lvl="0" marL="0" rtl="0" algn="l">
+            <a:pPr marL="0" lvl="0" indent="0" algn="l" rtl="0">
               <a:spcBef>
                 <a:spcPts val="0"/>
               </a:spcBef>
@@ -2369,9 +2471,6 @@
               </a:spcAft>
               <a:buNone/>
             </a:pPr>
-            <a:r>
-              <a:t/>
-            </a:r>
             <a:endParaRPr/>
           </a:p>
         </p:txBody>
@@ -2379,9 +2478,11 @@
       <p:sp>
         <p:nvSpPr>
           <p:cNvPr id="53" name="Google Shape;53;p11"/>
-          <p:cNvSpPr txBox="1"/>
+          <p:cNvSpPr txBox="1">
+            <a:spLocks noGrp="1"/>
+          </p:cNvSpPr>
           <p:nvPr>
-            <p:ph hasCustomPrompt="1" type="title"/>
+            <p:ph type="title" hasCustomPrompt="1"/>
           </p:nvPr>
         </p:nvSpPr>
         <p:spPr>
@@ -2394,7 +2495,7 @@
           </a:prstGeom>
         </p:spPr>
         <p:txBody>
-          <a:bodyPr anchorCtr="0" anchor="ctr" bIns="91425" lIns="91425" spcFirstLastPara="1" rIns="91425" wrap="square" tIns="91425">
+          <a:bodyPr spcFirstLastPara="1" wrap="square" lIns="91425" tIns="91425" rIns="91425" bIns="91425" anchor="ctr" anchorCtr="0">
             <a:normAutofit/>
           </a:bodyPr>
           <a:lstStyle>
@@ -2571,9 +2672,11 @@
       <p:sp>
         <p:nvSpPr>
           <p:cNvPr id="54" name="Google Shape;54;p11"/>
-          <p:cNvSpPr txBox="1"/>
+          <p:cNvSpPr txBox="1">
+            <a:spLocks noGrp="1"/>
+          </p:cNvSpPr>
           <p:nvPr>
-            <p:ph idx="1" type="body"/>
+            <p:ph type="body" idx="1"/>
           </p:nvPr>
         </p:nvSpPr>
         <p:spPr>
@@ -2586,11 +2689,11 @@
           </a:prstGeom>
         </p:spPr>
         <p:txBody>
-          <a:bodyPr anchorCtr="0" anchor="t" bIns="91425" lIns="91425" spcFirstLastPara="1" rIns="91425" wrap="square" tIns="91425">
+          <a:bodyPr spcFirstLastPara="1" wrap="square" lIns="91425" tIns="91425" rIns="91425" bIns="91425" anchor="t" anchorCtr="0">
             <a:normAutofit/>
           </a:bodyPr>
           <a:lstStyle>
-            <a:lvl1pPr indent="-342900" lvl="0" marL="457200" algn="ctr">
+            <a:lvl1pPr marL="457200" lvl="0" indent="-342900" algn="ctr">
               <a:spcBef>
                 <a:spcPts val="0"/>
               </a:spcBef>
@@ -2601,7 +2704,7 @@
               <a:buChar char="●"/>
               <a:defRPr/>
             </a:lvl1pPr>
-            <a:lvl2pPr indent="-317500" lvl="1" marL="914400" algn="ctr">
+            <a:lvl2pPr marL="914400" lvl="1" indent="-317500" algn="ctr">
               <a:spcBef>
                 <a:spcPts val="0"/>
               </a:spcBef>
@@ -2612,7 +2715,7 @@
               <a:buChar char="○"/>
               <a:defRPr/>
             </a:lvl2pPr>
-            <a:lvl3pPr indent="-317500" lvl="2" marL="1371600" algn="ctr">
+            <a:lvl3pPr marL="1371600" lvl="2" indent="-317500" algn="ctr">
               <a:spcBef>
                 <a:spcPts val="0"/>
               </a:spcBef>
@@ -2623,7 +2726,7 @@
               <a:buChar char="■"/>
               <a:defRPr/>
             </a:lvl3pPr>
-            <a:lvl4pPr indent="-317500" lvl="3" marL="1828800" algn="ctr">
+            <a:lvl4pPr marL="1828800" lvl="3" indent="-317500" algn="ctr">
               <a:spcBef>
                 <a:spcPts val="0"/>
               </a:spcBef>
@@ -2634,7 +2737,7 @@
               <a:buChar char="●"/>
               <a:defRPr/>
             </a:lvl4pPr>
-            <a:lvl5pPr indent="-317500" lvl="4" marL="2286000" algn="ctr">
+            <a:lvl5pPr marL="2286000" lvl="4" indent="-317500" algn="ctr">
               <a:spcBef>
                 <a:spcPts val="0"/>
               </a:spcBef>
@@ -2645,7 +2748,7 @@
               <a:buChar char="○"/>
               <a:defRPr/>
             </a:lvl5pPr>
-            <a:lvl6pPr indent="-317500" lvl="5" marL="2743200" algn="ctr">
+            <a:lvl6pPr marL="2743200" lvl="5" indent="-317500" algn="ctr">
               <a:spcBef>
                 <a:spcPts val="0"/>
               </a:spcBef>
@@ -2656,7 +2759,7 @@
               <a:buChar char="■"/>
               <a:defRPr/>
             </a:lvl6pPr>
-            <a:lvl7pPr indent="-317500" lvl="6" marL="3200400" algn="ctr">
+            <a:lvl7pPr marL="3200400" lvl="6" indent="-317500" algn="ctr">
               <a:spcBef>
                 <a:spcPts val="0"/>
               </a:spcBef>
@@ -2667,7 +2770,7 @@
               <a:buChar char="●"/>
               <a:defRPr/>
             </a:lvl7pPr>
-            <a:lvl8pPr indent="-317500" lvl="7" marL="3657600" algn="ctr">
+            <a:lvl8pPr marL="3657600" lvl="7" indent="-317500" algn="ctr">
               <a:spcBef>
                 <a:spcPts val="0"/>
               </a:spcBef>
@@ -2678,7 +2781,7 @@
               <a:buChar char="○"/>
               <a:defRPr/>
             </a:lvl8pPr>
-            <a:lvl9pPr indent="-317500" lvl="8" marL="4114800" algn="ctr">
+            <a:lvl9pPr marL="4114800" lvl="8" indent="-317500" algn="ctr">
               <a:spcBef>
                 <a:spcPts val="0"/>
               </a:spcBef>
@@ -2690,15 +2793,19 @@
               <a:defRPr/>
             </a:lvl9pPr>
           </a:lstStyle>
-          <a:p/>
+          <a:p>
+            <a:endParaRPr/>
+          </a:p>
         </p:txBody>
       </p:sp>
       <p:sp>
         <p:nvSpPr>
           <p:cNvPr id="55" name="Google Shape;55;p11"/>
-          <p:cNvSpPr txBox="1"/>
+          <p:cNvSpPr txBox="1">
+            <a:spLocks noGrp="1"/>
+          </p:cNvSpPr>
           <p:nvPr>
-            <p:ph idx="12" type="sldNum"/>
+            <p:ph type="sldNum" idx="12"/>
           </p:nvPr>
         </p:nvSpPr>
         <p:spPr>
@@ -2711,7 +2818,7 @@
           </a:prstGeom>
         </p:spPr>
         <p:txBody>
-          <a:bodyPr anchorCtr="0" anchor="ctr" bIns="91425" lIns="91425" spcFirstLastPara="1" rIns="91425" wrap="square" tIns="91425">
+          <a:bodyPr spcFirstLastPara="1" wrap="square" lIns="91425" tIns="91425" rIns="91425" bIns="91425" anchor="ctr" anchorCtr="0">
             <a:normAutofit/>
           </a:bodyPr>
           <a:lstStyle>
@@ -2753,7 +2860,7 @@
             </a:lvl9pPr>
           </a:lstStyle>
           <a:p>
-            <a:pPr indent="0" lvl="0" marL="0" rtl="0" algn="r">
+            <a:pPr marL="0" lvl="0" indent="0" algn="r" rtl="0">
               <a:spcBef>
                 <a:spcPts val="0"/>
               </a:spcBef>
@@ -2779,11 +2886,11 @@
 </file>
 
 <file path=ppt/slideLayouts/slideLayout11.xml><?xml version="1.0" encoding="utf-8"?>
-<p:sldLayout xmlns:a="http://schemas.openxmlformats.org/drawingml/2006/main" xmlns:r="http://schemas.openxmlformats.org/officeDocument/2006/relationships" xmlns:mc="http://schemas.openxmlformats.org/markup-compatibility/2006" xmlns:mv="urn:schemas-microsoft-com:mac:vml" xmlns:p="http://schemas.openxmlformats.org/presentationml/2006/main" xmlns:c="http://schemas.openxmlformats.org/drawingml/2006/chart" xmlns:dgm="http://schemas.openxmlformats.org/drawingml/2006/diagram" xmlns:o="urn:schemas-microsoft-com:office:office" xmlns:v="urn:schemas-microsoft-com:vml" xmlns:pvml="urn:schemas-microsoft-com:office:powerpoint" xmlns:com="http://schemas.openxmlformats.org/drawingml/2006/compatibility" xmlns:p14="http://schemas.microsoft.com/office/powerpoint/2010/main" xmlns:p15="http://schemas.microsoft.com/office/powerpoint/2012/main" xmlns:ahyp="http://schemas.microsoft.com/office/drawing/2018/hyperlinkcolor" matchingName="Blank" type="blank">
+<p:sldLayout xmlns:a="http://schemas.openxmlformats.org/drawingml/2006/main" xmlns:r="http://schemas.openxmlformats.org/officeDocument/2006/relationships" xmlns:p="http://schemas.openxmlformats.org/presentationml/2006/main" matchingName="Blank" type="blank">
   <p:cSld name="BLANK">
     <p:spTree>
       <p:nvGrpSpPr>
-        <p:cNvPr id="56" name="Shape 56"/>
+        <p:cNvPr id="1" name="Shape 56"/>
         <p:cNvGrpSpPr/>
         <p:nvPr/>
       </p:nvGrpSpPr>
@@ -2798,9 +2905,11 @@
       <p:sp>
         <p:nvSpPr>
           <p:cNvPr id="57" name="Google Shape;57;p12"/>
-          <p:cNvSpPr txBox="1"/>
+          <p:cNvSpPr txBox="1">
+            <a:spLocks noGrp="1"/>
+          </p:cNvSpPr>
           <p:nvPr>
-            <p:ph idx="12" type="sldNum"/>
+            <p:ph type="sldNum" idx="12"/>
           </p:nvPr>
         </p:nvSpPr>
         <p:spPr>
@@ -2813,7 +2922,7 @@
           </a:prstGeom>
         </p:spPr>
         <p:txBody>
-          <a:bodyPr anchorCtr="0" anchor="ctr" bIns="91425" lIns="91425" spcFirstLastPara="1" rIns="91425" wrap="square" tIns="91425">
+          <a:bodyPr spcFirstLastPara="1" wrap="square" lIns="91425" tIns="91425" rIns="91425" bIns="91425" anchor="ctr" anchorCtr="0">
             <a:normAutofit/>
           </a:bodyPr>
           <a:lstStyle>
@@ -2855,7 +2964,7 @@
             </a:lvl9pPr>
           </a:lstStyle>
           <a:p>
-            <a:pPr indent="0" lvl="0" marL="0" rtl="0" algn="r">
+            <a:pPr marL="0" lvl="0" indent="0" algn="r" rtl="0">
               <a:spcBef>
                 <a:spcPts val="0"/>
               </a:spcBef>
@@ -2881,11 +2990,11 @@
 </file>
 
 <file path=ppt/slideLayouts/slideLayout2.xml><?xml version="1.0" encoding="utf-8"?>
-<p:sldLayout xmlns:a="http://schemas.openxmlformats.org/drawingml/2006/main" xmlns:r="http://schemas.openxmlformats.org/officeDocument/2006/relationships" xmlns:mc="http://schemas.openxmlformats.org/markup-compatibility/2006" xmlns:mv="urn:schemas-microsoft-com:mac:vml" xmlns:p="http://schemas.openxmlformats.org/presentationml/2006/main" xmlns:c="http://schemas.openxmlformats.org/drawingml/2006/chart" xmlns:dgm="http://schemas.openxmlformats.org/drawingml/2006/diagram" xmlns:o="urn:schemas-microsoft-com:office:office" xmlns:v="urn:schemas-microsoft-com:vml" xmlns:pvml="urn:schemas-microsoft-com:office:powerpoint" xmlns:com="http://schemas.openxmlformats.org/drawingml/2006/compatibility" xmlns:p14="http://schemas.microsoft.com/office/powerpoint/2010/main" xmlns:p15="http://schemas.microsoft.com/office/powerpoint/2012/main" xmlns:ahyp="http://schemas.microsoft.com/office/drawing/2018/hyperlinkcolor" matchingName="Section header" type="secHead">
+<p:sldLayout xmlns:a="http://schemas.openxmlformats.org/drawingml/2006/main" xmlns:r="http://schemas.openxmlformats.org/officeDocument/2006/relationships" xmlns:p="http://schemas.openxmlformats.org/presentationml/2006/main" matchingName="Section header" type="secHead">
   <p:cSld name="SECTION_HEADER">
     <p:spTree>
       <p:nvGrpSpPr>
-        <p:cNvPr id="15" name="Shape 15"/>
+        <p:cNvPr id="1" name="Shape 15"/>
         <p:cNvGrpSpPr/>
         <p:nvPr/>
       </p:nvGrpSpPr>
@@ -2909,9 +3018,13 @@
             <a:ext cx="1081625" cy="1124950"/>
           </a:xfrm>
           <a:custGeom>
-            <a:rect b="b" l="l" r="r" t="t"/>
+            <a:avLst/>
+            <a:gdLst/>
+            <a:ahLst/>
+            <a:cxnLst/>
+            <a:rect l="l" t="t" r="r" b="b"/>
             <a:pathLst>
-              <a:path extrusionOk="0" h="44998" w="43265">
+              <a:path w="43265" h="44998" extrusionOk="0">
                 <a:moveTo>
                   <a:pt x="0" y="44998"/>
                 </a:moveTo>
@@ -2925,14 +3038,14 @@
             </a:pathLst>
           </a:custGeom>
           <a:noFill/>
-          <a:ln cap="flat" cmpd="sng" w="28575">
+          <a:ln w="28575" cap="flat" cmpd="sng">
             <a:solidFill>
               <a:schemeClr val="lt2"/>
             </a:solidFill>
             <a:prstDash val="solid"/>
             <a:miter lim="8000"/>
-            <a:headEnd len="sm" w="sm" type="none"/>
-            <a:tailEnd len="sm" w="sm" type="none"/>
+            <a:headEnd type="none" w="sm" len="sm"/>
+            <a:tailEnd type="none" w="sm" len="sm"/>
           </a:ln>
         </p:spPr>
       </p:sp>
@@ -2943,14 +3056,18 @@
           <p:nvPr/>
         </p:nvSpPr>
         <p:spPr>
-          <a:xfrm flipH="1" rot="10800000">
+          <a:xfrm rot="10800000" flipH="1">
             <a:off x="466425" y="3558325"/>
             <a:ext cx="1081625" cy="1124950"/>
           </a:xfrm>
           <a:custGeom>
-            <a:rect b="b" l="l" r="r" t="t"/>
+            <a:avLst/>
+            <a:gdLst/>
+            <a:ahLst/>
+            <a:cxnLst/>
+            <a:rect l="l" t="t" r="r" b="b"/>
             <a:pathLst>
-              <a:path extrusionOk="0" h="44998" w="43265">
+              <a:path w="43265" h="44998" extrusionOk="0">
                 <a:moveTo>
                   <a:pt x="0" y="44998"/>
                 </a:moveTo>
@@ -2964,21 +3081,23 @@
             </a:pathLst>
           </a:custGeom>
           <a:noFill/>
-          <a:ln cap="flat" cmpd="sng" w="28575">
+          <a:ln w="28575" cap="flat" cmpd="sng">
             <a:solidFill>
               <a:schemeClr val="lt2"/>
             </a:solidFill>
             <a:prstDash val="solid"/>
             <a:miter lim="8000"/>
-            <a:headEnd len="sm" w="sm" type="none"/>
-            <a:tailEnd len="sm" w="sm" type="none"/>
+            <a:headEnd type="none" w="sm" len="sm"/>
+            <a:tailEnd type="none" w="sm" len="sm"/>
           </a:ln>
         </p:spPr>
       </p:sp>
       <p:sp>
         <p:nvSpPr>
           <p:cNvPr id="18" name="Google Shape;18;p3"/>
-          <p:cNvSpPr txBox="1"/>
+          <p:cNvSpPr txBox="1">
+            <a:spLocks noGrp="1"/>
+          </p:cNvSpPr>
           <p:nvPr>
             <p:ph type="title"/>
           </p:nvPr>
@@ -2993,7 +3112,7 @@
           </a:prstGeom>
         </p:spPr>
         <p:txBody>
-          <a:bodyPr anchorCtr="0" anchor="ctr" bIns="91425" lIns="91425" spcFirstLastPara="1" rIns="91425" wrap="square" tIns="91425">
+          <a:bodyPr spcFirstLastPara="1" wrap="square" lIns="91425" tIns="91425" rIns="91425" bIns="91425" anchor="ctr" anchorCtr="0">
             <a:normAutofit/>
           </a:bodyPr>
           <a:lstStyle>
@@ -3097,15 +3216,19 @@
               <a:defRPr/>
             </a:lvl9pPr>
           </a:lstStyle>
-          <a:p/>
+          <a:p>
+            <a:endParaRPr/>
+          </a:p>
         </p:txBody>
       </p:sp>
       <p:sp>
         <p:nvSpPr>
           <p:cNvPr id="19" name="Google Shape;19;p3"/>
-          <p:cNvSpPr txBox="1"/>
+          <p:cNvSpPr txBox="1">
+            <a:spLocks noGrp="1"/>
+          </p:cNvSpPr>
           <p:nvPr>
-            <p:ph idx="12" type="sldNum"/>
+            <p:ph type="sldNum" idx="12"/>
           </p:nvPr>
         </p:nvSpPr>
         <p:spPr>
@@ -3118,7 +3241,7 @@
           </a:prstGeom>
         </p:spPr>
         <p:txBody>
-          <a:bodyPr anchorCtr="0" anchor="ctr" bIns="91425" lIns="91425" spcFirstLastPara="1" rIns="91425" wrap="square" tIns="91425">
+          <a:bodyPr spcFirstLastPara="1" wrap="square" lIns="91425" tIns="91425" rIns="91425" bIns="91425" anchor="ctr" anchorCtr="0">
             <a:normAutofit/>
           </a:bodyPr>
           <a:lstStyle>
@@ -3160,7 +3283,7 @@
             </a:lvl9pPr>
           </a:lstStyle>
           <a:p>
-            <a:pPr indent="0" lvl="0" marL="0" rtl="0" algn="r">
+            <a:pPr marL="0" lvl="0" indent="0" algn="r" rtl="0">
               <a:spcBef>
                 <a:spcPts val="0"/>
               </a:spcBef>
@@ -3186,11 +3309,11 @@
 </file>
 
 <file path=ppt/slideLayouts/slideLayout3.xml><?xml version="1.0" encoding="utf-8"?>
-<p:sldLayout xmlns:a="http://schemas.openxmlformats.org/drawingml/2006/main" xmlns:r="http://schemas.openxmlformats.org/officeDocument/2006/relationships" xmlns:mc="http://schemas.openxmlformats.org/markup-compatibility/2006" xmlns:mv="urn:schemas-microsoft-com:mac:vml" xmlns:p="http://schemas.openxmlformats.org/presentationml/2006/main" xmlns:c="http://schemas.openxmlformats.org/drawingml/2006/chart" xmlns:dgm="http://schemas.openxmlformats.org/drawingml/2006/diagram" xmlns:o="urn:schemas-microsoft-com:office:office" xmlns:v="urn:schemas-microsoft-com:vml" xmlns:pvml="urn:schemas-microsoft-com:office:powerpoint" xmlns:com="http://schemas.openxmlformats.org/drawingml/2006/compatibility" xmlns:p14="http://schemas.microsoft.com/office/powerpoint/2010/main" xmlns:p15="http://schemas.microsoft.com/office/powerpoint/2012/main" xmlns:ahyp="http://schemas.microsoft.com/office/drawing/2018/hyperlinkcolor" matchingName="Title and body" type="tx">
+<p:sldLayout xmlns:a="http://schemas.openxmlformats.org/drawingml/2006/main" xmlns:r="http://schemas.openxmlformats.org/officeDocument/2006/relationships" xmlns:p="http://schemas.openxmlformats.org/presentationml/2006/main" matchingName="Title and body" type="tx">
   <p:cSld name="TITLE_AND_BODY">
     <p:spTree>
       <p:nvGrpSpPr>
-        <p:cNvPr id="20" name="Shape 20"/>
+        <p:cNvPr id="1" name="Shape 20"/>
         <p:cNvGrpSpPr/>
         <p:nvPr/>
       </p:nvGrpSpPr>
@@ -3224,12 +3347,12 @@
           </a:ln>
         </p:spPr>
         <p:txBody>
-          <a:bodyPr anchorCtr="0" anchor="ctr" bIns="91425" lIns="91425" spcFirstLastPara="1" rIns="91425" wrap="square" tIns="91425">
+          <a:bodyPr spcFirstLastPara="1" wrap="square" lIns="91425" tIns="91425" rIns="91425" bIns="91425" anchor="ctr" anchorCtr="0">
             <a:noAutofit/>
           </a:bodyPr>
           <a:lstStyle/>
           <a:p>
-            <a:pPr indent="0" lvl="0" marL="0" rtl="0" algn="l">
+            <a:pPr marL="0" lvl="0" indent="0" algn="l" rtl="0">
               <a:spcBef>
                 <a:spcPts val="0"/>
               </a:spcBef>
@@ -3238,9 +3361,6 @@
               </a:spcAft>
               <a:buNone/>
             </a:pPr>
-            <a:r>
-              <a:t/>
-            </a:r>
             <a:endParaRPr/>
           </a:p>
         </p:txBody>
@@ -3248,7 +3368,9 @@
       <p:sp>
         <p:nvSpPr>
           <p:cNvPr id="22" name="Google Shape;22;p4"/>
-          <p:cNvSpPr txBox="1"/>
+          <p:cNvSpPr txBox="1">
+            <a:spLocks noGrp="1"/>
+          </p:cNvSpPr>
           <p:nvPr>
             <p:ph type="title"/>
           </p:nvPr>
@@ -3263,7 +3385,7 @@
           </a:prstGeom>
         </p:spPr>
         <p:txBody>
-          <a:bodyPr anchorCtr="0" anchor="b" bIns="91425" lIns="91425" spcFirstLastPara="1" rIns="91425" wrap="square" tIns="91425">
+          <a:bodyPr spcFirstLastPara="1" wrap="square" lIns="91425" tIns="91425" rIns="91425" bIns="91425" anchor="b" anchorCtr="0">
             <a:normAutofit/>
           </a:bodyPr>
           <a:lstStyle>
@@ -3367,15 +3489,19 @@
               <a:defRPr/>
             </a:lvl9pPr>
           </a:lstStyle>
-          <a:p/>
+          <a:p>
+            <a:endParaRPr/>
+          </a:p>
         </p:txBody>
       </p:sp>
       <p:sp>
         <p:nvSpPr>
           <p:cNvPr id="23" name="Google Shape;23;p4"/>
-          <p:cNvSpPr txBox="1"/>
+          <p:cNvSpPr txBox="1">
+            <a:spLocks noGrp="1"/>
+          </p:cNvSpPr>
           <p:nvPr>
-            <p:ph idx="1" type="body"/>
+            <p:ph type="body" idx="1"/>
           </p:nvPr>
         </p:nvSpPr>
         <p:spPr>
@@ -3388,11 +3514,11 @@
           </a:prstGeom>
         </p:spPr>
         <p:txBody>
-          <a:bodyPr anchorCtr="0" anchor="t" bIns="91425" lIns="91425" spcFirstLastPara="1" rIns="91425" wrap="square" tIns="91425">
+          <a:bodyPr spcFirstLastPara="1" wrap="square" lIns="91425" tIns="91425" rIns="91425" bIns="91425" anchor="t" anchorCtr="0">
             <a:normAutofit/>
           </a:bodyPr>
           <a:lstStyle>
-            <a:lvl1pPr indent="-342900" lvl="0" marL="457200">
+            <a:lvl1pPr marL="457200" lvl="0" indent="-342900">
               <a:spcBef>
                 <a:spcPts val="0"/>
               </a:spcBef>
@@ -3403,7 +3529,7 @@
               <a:buChar char="●"/>
               <a:defRPr/>
             </a:lvl1pPr>
-            <a:lvl2pPr indent="-317500" lvl="1" marL="914400">
+            <a:lvl2pPr marL="914400" lvl="1" indent="-317500">
               <a:spcBef>
                 <a:spcPts val="0"/>
               </a:spcBef>
@@ -3414,7 +3540,7 @@
               <a:buChar char="○"/>
               <a:defRPr/>
             </a:lvl2pPr>
-            <a:lvl3pPr indent="-317500" lvl="2" marL="1371600">
+            <a:lvl3pPr marL="1371600" lvl="2" indent="-317500">
               <a:spcBef>
                 <a:spcPts val="0"/>
               </a:spcBef>
@@ -3425,7 +3551,7 @@
               <a:buChar char="■"/>
               <a:defRPr/>
             </a:lvl3pPr>
-            <a:lvl4pPr indent="-317500" lvl="3" marL="1828800">
+            <a:lvl4pPr marL="1828800" lvl="3" indent="-317500">
               <a:spcBef>
                 <a:spcPts val="0"/>
               </a:spcBef>
@@ -3436,7 +3562,7 @@
               <a:buChar char="●"/>
               <a:defRPr/>
             </a:lvl4pPr>
-            <a:lvl5pPr indent="-317500" lvl="4" marL="2286000">
+            <a:lvl5pPr marL="2286000" lvl="4" indent="-317500">
               <a:spcBef>
                 <a:spcPts val="0"/>
               </a:spcBef>
@@ -3447,7 +3573,7 @@
               <a:buChar char="○"/>
               <a:defRPr/>
             </a:lvl5pPr>
-            <a:lvl6pPr indent="-317500" lvl="5" marL="2743200">
+            <a:lvl6pPr marL="2743200" lvl="5" indent="-317500">
               <a:spcBef>
                 <a:spcPts val="0"/>
               </a:spcBef>
@@ -3458,7 +3584,7 @@
               <a:buChar char="■"/>
               <a:defRPr/>
             </a:lvl6pPr>
-            <a:lvl7pPr indent="-317500" lvl="6" marL="3200400">
+            <a:lvl7pPr marL="3200400" lvl="6" indent="-317500">
               <a:spcBef>
                 <a:spcPts val="0"/>
               </a:spcBef>
@@ -3469,7 +3595,7 @@
               <a:buChar char="●"/>
               <a:defRPr/>
             </a:lvl7pPr>
-            <a:lvl8pPr indent="-317500" lvl="7" marL="3657600">
+            <a:lvl8pPr marL="3657600" lvl="7" indent="-317500">
               <a:spcBef>
                 <a:spcPts val="0"/>
               </a:spcBef>
@@ -3480,7 +3606,7 @@
               <a:buChar char="○"/>
               <a:defRPr/>
             </a:lvl8pPr>
-            <a:lvl9pPr indent="-317500" lvl="8" marL="4114800">
+            <a:lvl9pPr marL="4114800" lvl="8" indent="-317500">
               <a:spcBef>
                 <a:spcPts val="0"/>
               </a:spcBef>
@@ -3492,15 +3618,19 @@
               <a:defRPr/>
             </a:lvl9pPr>
           </a:lstStyle>
-          <a:p/>
+          <a:p>
+            <a:endParaRPr/>
+          </a:p>
         </p:txBody>
       </p:sp>
       <p:sp>
         <p:nvSpPr>
           <p:cNvPr id="24" name="Google Shape;24;p4"/>
-          <p:cNvSpPr txBox="1"/>
+          <p:cNvSpPr txBox="1">
+            <a:spLocks noGrp="1"/>
+          </p:cNvSpPr>
           <p:nvPr>
-            <p:ph idx="12" type="sldNum"/>
+            <p:ph type="sldNum" idx="12"/>
           </p:nvPr>
         </p:nvSpPr>
         <p:spPr>
@@ -3513,7 +3643,7 @@
           </a:prstGeom>
         </p:spPr>
         <p:txBody>
-          <a:bodyPr anchorCtr="0" anchor="ctr" bIns="91425" lIns="91425" spcFirstLastPara="1" rIns="91425" wrap="square" tIns="91425">
+          <a:bodyPr spcFirstLastPara="1" wrap="square" lIns="91425" tIns="91425" rIns="91425" bIns="91425" anchor="ctr" anchorCtr="0">
             <a:normAutofit/>
           </a:bodyPr>
           <a:lstStyle>
@@ -3555,7 +3685,7 @@
             </a:lvl9pPr>
           </a:lstStyle>
           <a:p>
-            <a:pPr indent="0" lvl="0" marL="0" rtl="0" algn="r">
+            <a:pPr marL="0" lvl="0" indent="0" algn="r" rtl="0">
               <a:spcBef>
                 <a:spcPts val="0"/>
               </a:spcBef>
@@ -3581,11 +3711,11 @@
 </file>
 
 <file path=ppt/slideLayouts/slideLayout4.xml><?xml version="1.0" encoding="utf-8"?>
-<p:sldLayout xmlns:a="http://schemas.openxmlformats.org/drawingml/2006/main" xmlns:r="http://schemas.openxmlformats.org/officeDocument/2006/relationships" xmlns:mc="http://schemas.openxmlformats.org/markup-compatibility/2006" xmlns:mv="urn:schemas-microsoft-com:mac:vml" xmlns:p="http://schemas.openxmlformats.org/presentationml/2006/main" xmlns:c="http://schemas.openxmlformats.org/drawingml/2006/chart" xmlns:dgm="http://schemas.openxmlformats.org/drawingml/2006/diagram" xmlns:o="urn:schemas-microsoft-com:office:office" xmlns:v="urn:schemas-microsoft-com:vml" xmlns:pvml="urn:schemas-microsoft-com:office:powerpoint" xmlns:com="http://schemas.openxmlformats.org/drawingml/2006/compatibility" xmlns:p14="http://schemas.microsoft.com/office/powerpoint/2010/main" xmlns:p15="http://schemas.microsoft.com/office/powerpoint/2012/main" xmlns:ahyp="http://schemas.microsoft.com/office/drawing/2018/hyperlinkcolor" matchingName="Title and two columns" type="twoColTx">
+<p:sldLayout xmlns:a="http://schemas.openxmlformats.org/drawingml/2006/main" xmlns:r="http://schemas.openxmlformats.org/officeDocument/2006/relationships" xmlns:p="http://schemas.openxmlformats.org/presentationml/2006/main" matchingName="Title and two columns" type="twoColTx">
   <p:cSld name="TITLE_AND_TWO_COLUMNS">
     <p:spTree>
       <p:nvGrpSpPr>
-        <p:cNvPr id="25" name="Shape 25"/>
+        <p:cNvPr id="1" name="Shape 25"/>
         <p:cNvGrpSpPr/>
         <p:nvPr/>
       </p:nvGrpSpPr>
@@ -3600,7 +3730,9 @@
       <p:sp>
         <p:nvSpPr>
           <p:cNvPr id="26" name="Google Shape;26;p5"/>
-          <p:cNvSpPr txBox="1"/>
+          <p:cNvSpPr txBox="1">
+            <a:spLocks noGrp="1"/>
+          </p:cNvSpPr>
           <p:nvPr>
             <p:ph type="title"/>
           </p:nvPr>
@@ -3615,7 +3747,7 @@
           </a:prstGeom>
         </p:spPr>
         <p:txBody>
-          <a:bodyPr anchorCtr="0" anchor="b" bIns="91425" lIns="91425" spcFirstLastPara="1" rIns="91425" wrap="square" tIns="91425">
+          <a:bodyPr spcFirstLastPara="1" wrap="square" lIns="91425" tIns="91425" rIns="91425" bIns="91425" anchor="b" anchorCtr="0">
             <a:normAutofit/>
           </a:bodyPr>
           <a:lstStyle>
@@ -3719,15 +3851,19 @@
               <a:defRPr/>
             </a:lvl9pPr>
           </a:lstStyle>
-          <a:p/>
+          <a:p>
+            <a:endParaRPr/>
+          </a:p>
         </p:txBody>
       </p:sp>
       <p:sp>
         <p:nvSpPr>
           <p:cNvPr id="27" name="Google Shape;27;p5"/>
-          <p:cNvSpPr txBox="1"/>
+          <p:cNvSpPr txBox="1">
+            <a:spLocks noGrp="1"/>
+          </p:cNvSpPr>
           <p:nvPr>
-            <p:ph idx="1" type="body"/>
+            <p:ph type="body" idx="1"/>
           </p:nvPr>
         </p:nvSpPr>
         <p:spPr>
@@ -3740,11 +3876,11 @@
           </a:prstGeom>
         </p:spPr>
         <p:txBody>
-          <a:bodyPr anchorCtr="0" anchor="t" bIns="91425" lIns="91425" spcFirstLastPara="1" rIns="91425" wrap="square" tIns="91425">
+          <a:bodyPr spcFirstLastPara="1" wrap="square" lIns="91425" tIns="91425" rIns="91425" bIns="91425" anchor="t" anchorCtr="0">
             <a:normAutofit/>
           </a:bodyPr>
           <a:lstStyle>
-            <a:lvl1pPr indent="-317500" lvl="0" marL="457200">
+            <a:lvl1pPr marL="457200" lvl="0" indent="-317500">
               <a:spcBef>
                 <a:spcPts val="0"/>
               </a:spcBef>
@@ -3755,7 +3891,7 @@
               <a:buChar char="●"/>
               <a:defRPr sz="1400"/>
             </a:lvl1pPr>
-            <a:lvl2pPr indent="-304800" lvl="1" marL="914400">
+            <a:lvl2pPr marL="914400" lvl="1" indent="-304800">
               <a:spcBef>
                 <a:spcPts val="0"/>
               </a:spcBef>
@@ -3766,7 +3902,7 @@
               <a:buChar char="○"/>
               <a:defRPr sz="1200"/>
             </a:lvl2pPr>
-            <a:lvl3pPr indent="-304800" lvl="2" marL="1371600">
+            <a:lvl3pPr marL="1371600" lvl="2" indent="-304800">
               <a:spcBef>
                 <a:spcPts val="0"/>
               </a:spcBef>
@@ -3777,7 +3913,7 @@
               <a:buChar char="■"/>
               <a:defRPr sz="1200"/>
             </a:lvl3pPr>
-            <a:lvl4pPr indent="-304800" lvl="3" marL="1828800">
+            <a:lvl4pPr marL="1828800" lvl="3" indent="-304800">
               <a:spcBef>
                 <a:spcPts val="0"/>
               </a:spcBef>
@@ -3788,7 +3924,7 @@
               <a:buChar char="●"/>
               <a:defRPr sz="1200"/>
             </a:lvl4pPr>
-            <a:lvl5pPr indent="-304800" lvl="4" marL="2286000">
+            <a:lvl5pPr marL="2286000" lvl="4" indent="-304800">
               <a:spcBef>
                 <a:spcPts val="0"/>
               </a:spcBef>
@@ -3799,7 +3935,7 @@
               <a:buChar char="○"/>
               <a:defRPr sz="1200"/>
             </a:lvl5pPr>
-            <a:lvl6pPr indent="-304800" lvl="5" marL="2743200">
+            <a:lvl6pPr marL="2743200" lvl="5" indent="-304800">
               <a:spcBef>
                 <a:spcPts val="0"/>
               </a:spcBef>
@@ -3810,7 +3946,7 @@
               <a:buChar char="■"/>
               <a:defRPr sz="1200"/>
             </a:lvl6pPr>
-            <a:lvl7pPr indent="-304800" lvl="6" marL="3200400">
+            <a:lvl7pPr marL="3200400" lvl="6" indent="-304800">
               <a:spcBef>
                 <a:spcPts val="0"/>
               </a:spcBef>
@@ -3821,7 +3957,7 @@
               <a:buChar char="●"/>
               <a:defRPr sz="1200"/>
             </a:lvl7pPr>
-            <a:lvl8pPr indent="-304800" lvl="7" marL="3657600">
+            <a:lvl8pPr marL="3657600" lvl="7" indent="-304800">
               <a:spcBef>
                 <a:spcPts val="0"/>
               </a:spcBef>
@@ -3832,7 +3968,7 @@
               <a:buChar char="○"/>
               <a:defRPr sz="1200"/>
             </a:lvl8pPr>
-            <a:lvl9pPr indent="-304800" lvl="8" marL="4114800">
+            <a:lvl9pPr marL="4114800" lvl="8" indent="-304800">
               <a:spcBef>
                 <a:spcPts val="0"/>
               </a:spcBef>
@@ -3844,15 +3980,19 @@
               <a:defRPr sz="1200"/>
             </a:lvl9pPr>
           </a:lstStyle>
-          <a:p/>
+          <a:p>
+            <a:endParaRPr/>
+          </a:p>
         </p:txBody>
       </p:sp>
       <p:sp>
         <p:nvSpPr>
           <p:cNvPr id="28" name="Google Shape;28;p5"/>
-          <p:cNvSpPr txBox="1"/>
+          <p:cNvSpPr txBox="1">
+            <a:spLocks noGrp="1"/>
+          </p:cNvSpPr>
           <p:nvPr>
-            <p:ph idx="2" type="body"/>
+            <p:ph type="body" idx="2"/>
           </p:nvPr>
         </p:nvSpPr>
         <p:spPr>
@@ -3865,11 +4005,11 @@
           </a:prstGeom>
         </p:spPr>
         <p:txBody>
-          <a:bodyPr anchorCtr="0" anchor="t" bIns="91425" lIns="91425" spcFirstLastPara="1" rIns="91425" wrap="square" tIns="91425">
+          <a:bodyPr spcFirstLastPara="1" wrap="square" lIns="91425" tIns="91425" rIns="91425" bIns="91425" anchor="t" anchorCtr="0">
             <a:normAutofit/>
           </a:bodyPr>
           <a:lstStyle>
-            <a:lvl1pPr indent="-317500" lvl="0" marL="457200">
+            <a:lvl1pPr marL="457200" lvl="0" indent="-317500">
               <a:spcBef>
                 <a:spcPts val="0"/>
               </a:spcBef>
@@ -3880,7 +4020,7 @@
               <a:buChar char="●"/>
               <a:defRPr sz="1400"/>
             </a:lvl1pPr>
-            <a:lvl2pPr indent="-304800" lvl="1" marL="914400">
+            <a:lvl2pPr marL="914400" lvl="1" indent="-304800">
               <a:spcBef>
                 <a:spcPts val="0"/>
               </a:spcBef>
@@ -3891,7 +4031,7 @@
               <a:buChar char="○"/>
               <a:defRPr sz="1200"/>
             </a:lvl2pPr>
-            <a:lvl3pPr indent="-304800" lvl="2" marL="1371600">
+            <a:lvl3pPr marL="1371600" lvl="2" indent="-304800">
               <a:spcBef>
                 <a:spcPts val="0"/>
               </a:spcBef>
@@ -3902,7 +4042,7 @@
               <a:buChar char="■"/>
               <a:defRPr sz="1200"/>
             </a:lvl3pPr>
-            <a:lvl4pPr indent="-304800" lvl="3" marL="1828800">
+            <a:lvl4pPr marL="1828800" lvl="3" indent="-304800">
               <a:spcBef>
                 <a:spcPts val="0"/>
               </a:spcBef>
@@ -3913,7 +4053,7 @@
               <a:buChar char="●"/>
               <a:defRPr sz="1200"/>
             </a:lvl4pPr>
-            <a:lvl5pPr indent="-304800" lvl="4" marL="2286000">
+            <a:lvl5pPr marL="2286000" lvl="4" indent="-304800">
               <a:spcBef>
                 <a:spcPts val="0"/>
               </a:spcBef>
@@ -3924,7 +4064,7 @@
               <a:buChar char="○"/>
               <a:defRPr sz="1200"/>
             </a:lvl5pPr>
-            <a:lvl6pPr indent="-304800" lvl="5" marL="2743200">
+            <a:lvl6pPr marL="2743200" lvl="5" indent="-304800">
               <a:spcBef>
                 <a:spcPts val="0"/>
               </a:spcBef>
@@ -3935,7 +4075,7 @@
               <a:buChar char="■"/>
               <a:defRPr sz="1200"/>
             </a:lvl6pPr>
-            <a:lvl7pPr indent="-304800" lvl="6" marL="3200400">
+            <a:lvl7pPr marL="3200400" lvl="6" indent="-304800">
               <a:spcBef>
                 <a:spcPts val="0"/>
               </a:spcBef>
@@ -3946,7 +4086,7 @@
               <a:buChar char="●"/>
               <a:defRPr sz="1200"/>
             </a:lvl7pPr>
-            <a:lvl8pPr indent="-304800" lvl="7" marL="3657600">
+            <a:lvl8pPr marL="3657600" lvl="7" indent="-304800">
               <a:spcBef>
                 <a:spcPts val="0"/>
               </a:spcBef>
@@ -3957,7 +4097,7 @@
               <a:buChar char="○"/>
               <a:defRPr sz="1200"/>
             </a:lvl8pPr>
-            <a:lvl9pPr indent="-304800" lvl="8" marL="4114800">
+            <a:lvl9pPr marL="4114800" lvl="8" indent="-304800">
               <a:spcBef>
                 <a:spcPts val="0"/>
               </a:spcBef>
@@ -3969,15 +4109,19 @@
               <a:defRPr sz="1200"/>
             </a:lvl9pPr>
           </a:lstStyle>
-          <a:p/>
+          <a:p>
+            <a:endParaRPr/>
+          </a:p>
         </p:txBody>
       </p:sp>
       <p:sp>
         <p:nvSpPr>
           <p:cNvPr id="29" name="Google Shape;29;p5"/>
-          <p:cNvSpPr txBox="1"/>
+          <p:cNvSpPr txBox="1">
+            <a:spLocks noGrp="1"/>
+          </p:cNvSpPr>
           <p:nvPr>
-            <p:ph idx="12" type="sldNum"/>
+            <p:ph type="sldNum" idx="12"/>
           </p:nvPr>
         </p:nvSpPr>
         <p:spPr>
@@ -3990,7 +4134,7 @@
           </a:prstGeom>
         </p:spPr>
         <p:txBody>
-          <a:bodyPr anchorCtr="0" anchor="ctr" bIns="91425" lIns="91425" spcFirstLastPara="1" rIns="91425" wrap="square" tIns="91425">
+          <a:bodyPr spcFirstLastPara="1" wrap="square" lIns="91425" tIns="91425" rIns="91425" bIns="91425" anchor="ctr" anchorCtr="0">
             <a:normAutofit/>
           </a:bodyPr>
           <a:lstStyle>
@@ -4032,7 +4176,7 @@
             </a:lvl9pPr>
           </a:lstStyle>
           <a:p>
-            <a:pPr indent="0" lvl="0" marL="0" rtl="0" algn="r">
+            <a:pPr marL="0" lvl="0" indent="0" algn="r" rtl="0">
               <a:spcBef>
                 <a:spcPts val="0"/>
               </a:spcBef>
@@ -4058,11 +4202,11 @@
 </file>
 
 <file path=ppt/slideLayouts/slideLayout5.xml><?xml version="1.0" encoding="utf-8"?>
-<p:sldLayout xmlns:a="http://schemas.openxmlformats.org/drawingml/2006/main" xmlns:r="http://schemas.openxmlformats.org/officeDocument/2006/relationships" xmlns:mc="http://schemas.openxmlformats.org/markup-compatibility/2006" xmlns:mv="urn:schemas-microsoft-com:mac:vml" xmlns:p="http://schemas.openxmlformats.org/presentationml/2006/main" xmlns:c="http://schemas.openxmlformats.org/drawingml/2006/chart" xmlns:dgm="http://schemas.openxmlformats.org/drawingml/2006/diagram" xmlns:o="urn:schemas-microsoft-com:office:office" xmlns:v="urn:schemas-microsoft-com:vml" xmlns:pvml="urn:schemas-microsoft-com:office:powerpoint" xmlns:com="http://schemas.openxmlformats.org/drawingml/2006/compatibility" xmlns:p14="http://schemas.microsoft.com/office/powerpoint/2010/main" xmlns:p15="http://schemas.microsoft.com/office/powerpoint/2012/main" xmlns:ahyp="http://schemas.microsoft.com/office/drawing/2018/hyperlinkcolor" matchingName="Title only" type="titleOnly">
+<p:sldLayout xmlns:a="http://schemas.openxmlformats.org/drawingml/2006/main" xmlns:r="http://schemas.openxmlformats.org/officeDocument/2006/relationships" xmlns:p="http://schemas.openxmlformats.org/presentationml/2006/main" matchingName="Title only" type="titleOnly">
   <p:cSld name="TITLE_ONLY">
     <p:spTree>
       <p:nvGrpSpPr>
-        <p:cNvPr id="30" name="Shape 30"/>
+        <p:cNvPr id="1" name="Shape 30"/>
         <p:cNvGrpSpPr/>
         <p:nvPr/>
       </p:nvGrpSpPr>
@@ -4077,7 +4221,9 @@
       <p:sp>
         <p:nvSpPr>
           <p:cNvPr id="31" name="Google Shape;31;p6"/>
-          <p:cNvSpPr txBox="1"/>
+          <p:cNvSpPr txBox="1">
+            <a:spLocks noGrp="1"/>
+          </p:cNvSpPr>
           <p:nvPr>
             <p:ph type="title"/>
           </p:nvPr>
@@ -4092,7 +4238,7 @@
           </a:prstGeom>
         </p:spPr>
         <p:txBody>
-          <a:bodyPr anchorCtr="0" anchor="b" bIns="91425" lIns="91425" spcFirstLastPara="1" rIns="91425" wrap="square" tIns="91425">
+          <a:bodyPr spcFirstLastPara="1" wrap="square" lIns="91425" tIns="91425" rIns="91425" bIns="91425" anchor="b" anchorCtr="0">
             <a:normAutofit/>
           </a:bodyPr>
           <a:lstStyle>
@@ -4196,15 +4342,19 @@
               <a:defRPr/>
             </a:lvl9pPr>
           </a:lstStyle>
-          <a:p/>
+          <a:p>
+            <a:endParaRPr/>
+          </a:p>
         </p:txBody>
       </p:sp>
       <p:sp>
         <p:nvSpPr>
           <p:cNvPr id="32" name="Google Shape;32;p6"/>
-          <p:cNvSpPr txBox="1"/>
+          <p:cNvSpPr txBox="1">
+            <a:spLocks noGrp="1"/>
+          </p:cNvSpPr>
           <p:nvPr>
-            <p:ph idx="12" type="sldNum"/>
+            <p:ph type="sldNum" idx="12"/>
           </p:nvPr>
         </p:nvSpPr>
         <p:spPr>
@@ -4217,7 +4367,7 @@
           </a:prstGeom>
         </p:spPr>
         <p:txBody>
-          <a:bodyPr anchorCtr="0" anchor="ctr" bIns="91425" lIns="91425" spcFirstLastPara="1" rIns="91425" wrap="square" tIns="91425">
+          <a:bodyPr spcFirstLastPara="1" wrap="square" lIns="91425" tIns="91425" rIns="91425" bIns="91425" anchor="ctr" anchorCtr="0">
             <a:normAutofit/>
           </a:bodyPr>
           <a:lstStyle>
@@ -4259,7 +4409,7 @@
             </a:lvl9pPr>
           </a:lstStyle>
           <a:p>
-            <a:pPr indent="0" lvl="0" marL="0" rtl="0" algn="r">
+            <a:pPr marL="0" lvl="0" indent="0" algn="r" rtl="0">
               <a:spcBef>
                 <a:spcPts val="0"/>
               </a:spcBef>
@@ -4285,11 +4435,11 @@
 </file>
 
 <file path=ppt/slideLayouts/slideLayout6.xml><?xml version="1.0" encoding="utf-8"?>
-<p:sldLayout xmlns:a="http://schemas.openxmlformats.org/drawingml/2006/main" xmlns:r="http://schemas.openxmlformats.org/officeDocument/2006/relationships" xmlns:mc="http://schemas.openxmlformats.org/markup-compatibility/2006" xmlns:mv="urn:schemas-microsoft-com:mac:vml" xmlns:p="http://schemas.openxmlformats.org/presentationml/2006/main" xmlns:c="http://schemas.openxmlformats.org/drawingml/2006/chart" xmlns:dgm="http://schemas.openxmlformats.org/drawingml/2006/diagram" xmlns:o="urn:schemas-microsoft-com:office:office" xmlns:v="urn:schemas-microsoft-com:vml" xmlns:pvml="urn:schemas-microsoft-com:office:powerpoint" xmlns:com="http://schemas.openxmlformats.org/drawingml/2006/compatibility" xmlns:p14="http://schemas.microsoft.com/office/powerpoint/2010/main" xmlns:p15="http://schemas.microsoft.com/office/powerpoint/2012/main" xmlns:ahyp="http://schemas.microsoft.com/office/drawing/2018/hyperlinkcolor" matchingName="One column text">
+<p:sldLayout xmlns:a="http://schemas.openxmlformats.org/drawingml/2006/main" xmlns:r="http://schemas.openxmlformats.org/officeDocument/2006/relationships" xmlns:p="http://schemas.openxmlformats.org/presentationml/2006/main" matchingName="One column text">
   <p:cSld name="ONE_COLUMN_TEXT">
     <p:spTree>
       <p:nvGrpSpPr>
-        <p:cNvPr id="33" name="Shape 33"/>
+        <p:cNvPr id="1" name="Shape 33"/>
         <p:cNvGrpSpPr/>
         <p:nvPr/>
       </p:nvGrpSpPr>
@@ -4304,7 +4454,9 @@
       <p:sp>
         <p:nvSpPr>
           <p:cNvPr id="34" name="Google Shape;34;p7"/>
-          <p:cNvSpPr txBox="1"/>
+          <p:cNvSpPr txBox="1">
+            <a:spLocks noGrp="1"/>
+          </p:cNvSpPr>
           <p:nvPr>
             <p:ph type="title"/>
           </p:nvPr>
@@ -4319,7 +4471,7 @@
           </a:prstGeom>
         </p:spPr>
         <p:txBody>
-          <a:bodyPr anchorCtr="0" anchor="b" bIns="91425" lIns="91425" spcFirstLastPara="1" rIns="91425" wrap="square" tIns="91425">
+          <a:bodyPr spcFirstLastPara="1" wrap="square" lIns="91425" tIns="91425" rIns="91425" bIns="91425" anchor="b" anchorCtr="0">
             <a:normAutofit/>
           </a:bodyPr>
           <a:lstStyle>
@@ -4423,15 +4575,19 @@
               <a:defRPr sz="3000"/>
             </a:lvl9pPr>
           </a:lstStyle>
-          <a:p/>
+          <a:p>
+            <a:endParaRPr/>
+          </a:p>
         </p:txBody>
       </p:sp>
       <p:sp>
         <p:nvSpPr>
           <p:cNvPr id="35" name="Google Shape;35;p7"/>
-          <p:cNvSpPr txBox="1"/>
+          <p:cNvSpPr txBox="1">
+            <a:spLocks noGrp="1"/>
+          </p:cNvSpPr>
           <p:nvPr>
-            <p:ph idx="1" type="body"/>
+            <p:ph type="body" idx="1"/>
           </p:nvPr>
         </p:nvSpPr>
         <p:spPr>
@@ -4444,11 +4600,11 @@
           </a:prstGeom>
         </p:spPr>
         <p:txBody>
-          <a:bodyPr anchorCtr="0" anchor="t" bIns="91425" lIns="91425" spcFirstLastPara="1" rIns="91425" wrap="square" tIns="91425">
+          <a:bodyPr spcFirstLastPara="1" wrap="square" lIns="91425" tIns="91425" rIns="91425" bIns="91425" anchor="t" anchorCtr="0">
             <a:normAutofit/>
           </a:bodyPr>
           <a:lstStyle>
-            <a:lvl1pPr indent="-304800" lvl="0" marL="457200">
+            <a:lvl1pPr marL="457200" lvl="0" indent="-304800">
               <a:spcBef>
                 <a:spcPts val="0"/>
               </a:spcBef>
@@ -4459,7 +4615,7 @@
               <a:buChar char="●"/>
               <a:defRPr sz="1200"/>
             </a:lvl1pPr>
-            <a:lvl2pPr indent="-304800" lvl="1" marL="914400">
+            <a:lvl2pPr marL="914400" lvl="1" indent="-304800">
               <a:spcBef>
                 <a:spcPts val="0"/>
               </a:spcBef>
@@ -4470,7 +4626,7 @@
               <a:buChar char="○"/>
               <a:defRPr sz="1200"/>
             </a:lvl2pPr>
-            <a:lvl3pPr indent="-304800" lvl="2" marL="1371600">
+            <a:lvl3pPr marL="1371600" lvl="2" indent="-304800">
               <a:spcBef>
                 <a:spcPts val="0"/>
               </a:spcBef>
@@ -4481,7 +4637,7 @@
               <a:buChar char="■"/>
               <a:defRPr sz="1200"/>
             </a:lvl3pPr>
-            <a:lvl4pPr indent="-304800" lvl="3" marL="1828800">
+            <a:lvl4pPr marL="1828800" lvl="3" indent="-304800">
               <a:spcBef>
                 <a:spcPts val="0"/>
               </a:spcBef>
@@ -4492,7 +4648,7 @@
               <a:buChar char="●"/>
               <a:defRPr sz="1200"/>
             </a:lvl4pPr>
-            <a:lvl5pPr indent="-304800" lvl="4" marL="2286000">
+            <a:lvl5pPr marL="2286000" lvl="4" indent="-304800">
               <a:spcBef>
                 <a:spcPts val="0"/>
               </a:spcBef>
@@ -4503,7 +4659,7 @@
               <a:buChar char="○"/>
               <a:defRPr sz="1200"/>
             </a:lvl5pPr>
-            <a:lvl6pPr indent="-304800" lvl="5" marL="2743200">
+            <a:lvl6pPr marL="2743200" lvl="5" indent="-304800">
               <a:spcBef>
                 <a:spcPts val="0"/>
               </a:spcBef>
@@ -4514,7 +4670,7 @@
               <a:buChar char="■"/>
               <a:defRPr sz="1200"/>
             </a:lvl6pPr>
-            <a:lvl7pPr indent="-304800" lvl="6" marL="3200400">
+            <a:lvl7pPr marL="3200400" lvl="6" indent="-304800">
               <a:spcBef>
                 <a:spcPts val="0"/>
               </a:spcBef>
@@ -4525,7 +4681,7 @@
               <a:buChar char="●"/>
               <a:defRPr sz="1200"/>
             </a:lvl7pPr>
-            <a:lvl8pPr indent="-304800" lvl="7" marL="3657600">
+            <a:lvl8pPr marL="3657600" lvl="7" indent="-304800">
               <a:spcBef>
                 <a:spcPts val="0"/>
               </a:spcBef>
@@ -4536,7 +4692,7 @@
               <a:buChar char="○"/>
               <a:defRPr sz="1200"/>
             </a:lvl8pPr>
-            <a:lvl9pPr indent="-304800" lvl="8" marL="4114800">
+            <a:lvl9pPr marL="4114800" lvl="8" indent="-304800">
               <a:spcBef>
                 <a:spcPts val="0"/>
               </a:spcBef>
@@ -4548,15 +4704,19 @@
               <a:defRPr sz="1200"/>
             </a:lvl9pPr>
           </a:lstStyle>
-          <a:p/>
+          <a:p>
+            <a:endParaRPr/>
+          </a:p>
         </p:txBody>
       </p:sp>
       <p:sp>
         <p:nvSpPr>
           <p:cNvPr id="36" name="Google Shape;36;p7"/>
-          <p:cNvSpPr txBox="1"/>
+          <p:cNvSpPr txBox="1">
+            <a:spLocks noGrp="1"/>
+          </p:cNvSpPr>
           <p:nvPr>
-            <p:ph idx="12" type="sldNum"/>
+            <p:ph type="sldNum" idx="12"/>
           </p:nvPr>
         </p:nvSpPr>
         <p:spPr>
@@ -4569,7 +4729,7 @@
           </a:prstGeom>
         </p:spPr>
         <p:txBody>
-          <a:bodyPr anchorCtr="0" anchor="ctr" bIns="91425" lIns="91425" spcFirstLastPara="1" rIns="91425" wrap="square" tIns="91425">
+          <a:bodyPr spcFirstLastPara="1" wrap="square" lIns="91425" tIns="91425" rIns="91425" bIns="91425" anchor="ctr" anchorCtr="0">
             <a:normAutofit/>
           </a:bodyPr>
           <a:lstStyle>
@@ -4611,7 +4771,7 @@
             </a:lvl9pPr>
           </a:lstStyle>
           <a:p>
-            <a:pPr indent="0" lvl="0" marL="0" rtl="0" algn="r">
+            <a:pPr marL="0" lvl="0" indent="0" algn="r" rtl="0">
               <a:spcBef>
                 <a:spcPts val="0"/>
               </a:spcBef>
@@ -4637,11 +4797,11 @@
 </file>
 
 <file path=ppt/slideLayouts/slideLayout7.xml><?xml version="1.0" encoding="utf-8"?>
-<p:sldLayout xmlns:a="http://schemas.openxmlformats.org/drawingml/2006/main" xmlns:r="http://schemas.openxmlformats.org/officeDocument/2006/relationships" xmlns:mc="http://schemas.openxmlformats.org/markup-compatibility/2006" xmlns:mv="urn:schemas-microsoft-com:mac:vml" xmlns:p="http://schemas.openxmlformats.org/presentationml/2006/main" xmlns:c="http://schemas.openxmlformats.org/drawingml/2006/chart" xmlns:dgm="http://schemas.openxmlformats.org/drawingml/2006/diagram" xmlns:o="urn:schemas-microsoft-com:office:office" xmlns:v="urn:schemas-microsoft-com:vml" xmlns:pvml="urn:schemas-microsoft-com:office:powerpoint" xmlns:com="http://schemas.openxmlformats.org/drawingml/2006/compatibility" xmlns:p14="http://schemas.microsoft.com/office/powerpoint/2010/main" xmlns:p15="http://schemas.microsoft.com/office/powerpoint/2012/main" xmlns:ahyp="http://schemas.microsoft.com/office/drawing/2018/hyperlinkcolor" matchingName="Main point">
+<p:sldLayout xmlns:a="http://schemas.openxmlformats.org/drawingml/2006/main" xmlns:r="http://schemas.openxmlformats.org/officeDocument/2006/relationships" xmlns:p="http://schemas.openxmlformats.org/presentationml/2006/main" matchingName="Main point">
   <p:cSld name="MAIN_POINT">
     <p:spTree>
       <p:nvGrpSpPr>
-        <p:cNvPr id="37" name="Shape 37"/>
+        <p:cNvPr id="1" name="Shape 37"/>
         <p:cNvGrpSpPr/>
         <p:nvPr/>
       </p:nvGrpSpPr>
@@ -4675,12 +4835,12 @@
           </a:ln>
         </p:spPr>
         <p:txBody>
-          <a:bodyPr anchorCtr="0" anchor="ctr" bIns="91425" lIns="91425" spcFirstLastPara="1" rIns="91425" wrap="square" tIns="91425">
+          <a:bodyPr spcFirstLastPara="1" wrap="square" lIns="91425" tIns="91425" rIns="91425" bIns="91425" anchor="ctr" anchorCtr="0">
             <a:noAutofit/>
           </a:bodyPr>
           <a:lstStyle/>
           <a:p>
-            <a:pPr indent="0" lvl="0" marL="0" rtl="0" algn="l">
+            <a:pPr marL="0" lvl="0" indent="0" algn="l" rtl="0">
               <a:spcBef>
                 <a:spcPts val="0"/>
               </a:spcBef>
@@ -4689,9 +4849,6 @@
               </a:spcAft>
               <a:buNone/>
             </a:pPr>
-            <a:r>
-              <a:t/>
-            </a:r>
             <a:endParaRPr/>
           </a:p>
         </p:txBody>
@@ -4699,7 +4856,9 @@
       <p:sp>
         <p:nvSpPr>
           <p:cNvPr id="39" name="Google Shape;39;p8"/>
-          <p:cNvSpPr txBox="1"/>
+          <p:cNvSpPr txBox="1">
+            <a:spLocks noGrp="1"/>
+          </p:cNvSpPr>
           <p:nvPr>
             <p:ph type="title"/>
           </p:nvPr>
@@ -4714,7 +4873,7 @@
           </a:prstGeom>
         </p:spPr>
         <p:txBody>
-          <a:bodyPr anchorCtr="0" anchor="ctr" bIns="91425" lIns="91425" spcFirstLastPara="1" rIns="91425" wrap="square" tIns="91425">
+          <a:bodyPr spcFirstLastPara="1" wrap="square" lIns="91425" tIns="91425" rIns="91425" bIns="91425" anchor="ctr" anchorCtr="0">
             <a:normAutofit/>
           </a:bodyPr>
           <a:lstStyle>
@@ -4818,15 +4977,19 @@
               <a:defRPr sz="4800"/>
             </a:lvl9pPr>
           </a:lstStyle>
-          <a:p/>
+          <a:p>
+            <a:endParaRPr/>
+          </a:p>
         </p:txBody>
       </p:sp>
       <p:sp>
         <p:nvSpPr>
           <p:cNvPr id="40" name="Google Shape;40;p8"/>
-          <p:cNvSpPr txBox="1"/>
+          <p:cNvSpPr txBox="1">
+            <a:spLocks noGrp="1"/>
+          </p:cNvSpPr>
           <p:nvPr>
-            <p:ph idx="12" type="sldNum"/>
+            <p:ph type="sldNum" idx="12"/>
           </p:nvPr>
         </p:nvSpPr>
         <p:spPr>
@@ -4839,7 +5002,7 @@
           </a:prstGeom>
         </p:spPr>
         <p:txBody>
-          <a:bodyPr anchorCtr="0" anchor="ctr" bIns="91425" lIns="91425" spcFirstLastPara="1" rIns="91425" wrap="square" tIns="91425">
+          <a:bodyPr spcFirstLastPara="1" wrap="square" lIns="91425" tIns="91425" rIns="91425" bIns="91425" anchor="ctr" anchorCtr="0">
             <a:normAutofit/>
           </a:bodyPr>
           <a:lstStyle>
@@ -4881,7 +5044,7 @@
             </a:lvl9pPr>
           </a:lstStyle>
           <a:p>
-            <a:pPr indent="0" lvl="0" marL="0" rtl="0" algn="r">
+            <a:pPr marL="0" lvl="0" indent="0" algn="r" rtl="0">
               <a:spcBef>
                 <a:spcPts val="0"/>
               </a:spcBef>
@@ -4907,11 +5070,11 @@
 </file>
 
 <file path=ppt/slideLayouts/slideLayout8.xml><?xml version="1.0" encoding="utf-8"?>
-<p:sldLayout xmlns:a="http://schemas.openxmlformats.org/drawingml/2006/main" xmlns:r="http://schemas.openxmlformats.org/officeDocument/2006/relationships" xmlns:mc="http://schemas.openxmlformats.org/markup-compatibility/2006" xmlns:mv="urn:schemas-microsoft-com:mac:vml" xmlns:p="http://schemas.openxmlformats.org/presentationml/2006/main" xmlns:c="http://schemas.openxmlformats.org/drawingml/2006/chart" xmlns:dgm="http://schemas.openxmlformats.org/drawingml/2006/diagram" xmlns:o="urn:schemas-microsoft-com:office:office" xmlns:v="urn:schemas-microsoft-com:vml" xmlns:pvml="urn:schemas-microsoft-com:office:powerpoint" xmlns:com="http://schemas.openxmlformats.org/drawingml/2006/compatibility" xmlns:p14="http://schemas.microsoft.com/office/powerpoint/2010/main" xmlns:p15="http://schemas.microsoft.com/office/powerpoint/2012/main" xmlns:ahyp="http://schemas.microsoft.com/office/drawing/2018/hyperlinkcolor" matchingName="Section title and description">
+<p:sldLayout xmlns:a="http://schemas.openxmlformats.org/drawingml/2006/main" xmlns:r="http://schemas.openxmlformats.org/officeDocument/2006/relationships" xmlns:p="http://schemas.openxmlformats.org/presentationml/2006/main" matchingName="Section title and description">
   <p:cSld name="SECTION_TITLE_AND_DESCRIPTION">
     <p:spTree>
       <p:nvGrpSpPr>
-        <p:cNvPr id="41" name="Shape 41"/>
+        <p:cNvPr id="1" name="Shape 41"/>
         <p:cNvGrpSpPr/>
         <p:nvPr/>
       </p:nvGrpSpPr>
@@ -4945,12 +5108,12 @@
           </a:ln>
         </p:spPr>
         <p:txBody>
-          <a:bodyPr anchorCtr="0" anchor="ctr" bIns="91425" lIns="91425" spcFirstLastPara="1" rIns="91425" wrap="square" tIns="91425">
+          <a:bodyPr spcFirstLastPara="1" wrap="square" lIns="91425" tIns="91425" rIns="91425" bIns="91425" anchor="ctr" anchorCtr="0">
             <a:noAutofit/>
           </a:bodyPr>
           <a:lstStyle/>
           <a:p>
-            <a:pPr indent="0" lvl="0" marL="0" rtl="0" algn="l">
+            <a:pPr marL="0" lvl="0" indent="0" algn="l" rtl="0">
               <a:spcBef>
                 <a:spcPts val="0"/>
               </a:spcBef>
@@ -4959,9 +5122,6 @@
               </a:spcAft>
               <a:buNone/>
             </a:pPr>
-            <a:r>
-              <a:t/>
-            </a:r>
             <a:endParaRPr/>
           </a:p>
         </p:txBody>
@@ -4981,21 +5141,23 @@
             <a:avLst/>
           </a:prstGeom>
           <a:noFill/>
-          <a:ln cap="flat" cmpd="sng" w="19050">
+          <a:ln w="19050" cap="flat" cmpd="sng">
             <a:solidFill>
               <a:schemeClr val="lt1"/>
             </a:solidFill>
             <a:prstDash val="solid"/>
             <a:round/>
-            <a:headEnd len="sm" w="sm" type="none"/>
-            <a:tailEnd len="sm" w="sm" type="none"/>
+            <a:headEnd type="none" w="sm" len="sm"/>
+            <a:tailEnd type="none" w="sm" len="sm"/>
           </a:ln>
         </p:spPr>
       </p:cxnSp>
       <p:sp>
         <p:nvSpPr>
           <p:cNvPr id="44" name="Google Shape;44;p9"/>
-          <p:cNvSpPr txBox="1"/>
+          <p:cNvSpPr txBox="1">
+            <a:spLocks noGrp="1"/>
+          </p:cNvSpPr>
           <p:nvPr>
             <p:ph type="title"/>
           </p:nvPr>
@@ -5010,7 +5172,7 @@
           </a:prstGeom>
         </p:spPr>
         <p:txBody>
-          <a:bodyPr anchorCtr="0" anchor="b" bIns="91425" lIns="91425" spcFirstLastPara="1" rIns="91425" wrap="square" tIns="91425">
+          <a:bodyPr spcFirstLastPara="1" wrap="square" lIns="91425" tIns="91425" rIns="91425" bIns="91425" anchor="b" anchorCtr="0">
             <a:normAutofit/>
           </a:bodyPr>
           <a:lstStyle>
@@ -5177,15 +5339,19 @@
               </a:defRPr>
             </a:lvl9pPr>
           </a:lstStyle>
-          <a:p/>
+          <a:p>
+            <a:endParaRPr/>
+          </a:p>
         </p:txBody>
       </p:sp>
       <p:sp>
         <p:nvSpPr>
           <p:cNvPr id="45" name="Google Shape;45;p9"/>
-          <p:cNvSpPr txBox="1"/>
+          <p:cNvSpPr txBox="1">
+            <a:spLocks noGrp="1"/>
+          </p:cNvSpPr>
           <p:nvPr>
-            <p:ph idx="1" type="subTitle"/>
+            <p:ph type="subTitle" idx="1"/>
           </p:nvPr>
         </p:nvSpPr>
         <p:spPr>
@@ -5198,7 +5364,7 @@
           </a:prstGeom>
         </p:spPr>
         <p:txBody>
-          <a:bodyPr anchorCtr="0" anchor="t" bIns="91425" lIns="91425" spcFirstLastPara="1" rIns="91425" wrap="square" tIns="91425">
+          <a:bodyPr spcFirstLastPara="1" wrap="square" lIns="91425" tIns="91425" rIns="91425" bIns="91425" anchor="t" anchorCtr="0">
             <a:normAutofit/>
           </a:bodyPr>
           <a:lstStyle>
@@ -5383,15 +5549,19 @@
               </a:defRPr>
             </a:lvl9pPr>
           </a:lstStyle>
-          <a:p/>
+          <a:p>
+            <a:endParaRPr/>
+          </a:p>
         </p:txBody>
       </p:sp>
       <p:sp>
         <p:nvSpPr>
           <p:cNvPr id="46" name="Google Shape;46;p9"/>
-          <p:cNvSpPr txBox="1"/>
+          <p:cNvSpPr txBox="1">
+            <a:spLocks noGrp="1"/>
+          </p:cNvSpPr>
           <p:nvPr>
-            <p:ph idx="2" type="body"/>
+            <p:ph type="body" idx="2"/>
           </p:nvPr>
         </p:nvSpPr>
         <p:spPr>
@@ -5404,11 +5574,11 @@
           </a:prstGeom>
         </p:spPr>
         <p:txBody>
-          <a:bodyPr anchorCtr="0" anchor="ctr" bIns="91425" lIns="91425" spcFirstLastPara="1" rIns="91425" wrap="square" tIns="91425">
+          <a:bodyPr spcFirstLastPara="1" wrap="square" lIns="91425" tIns="91425" rIns="91425" bIns="91425" anchor="ctr" anchorCtr="0">
             <a:normAutofit/>
           </a:bodyPr>
           <a:lstStyle>
-            <a:lvl1pPr indent="-342900" lvl="0" marL="457200">
+            <a:lvl1pPr marL="457200" lvl="0" indent="-342900">
               <a:spcBef>
                 <a:spcPts val="0"/>
               </a:spcBef>
@@ -5426,7 +5596,7 @@
                 </a:solidFill>
               </a:defRPr>
             </a:lvl1pPr>
-            <a:lvl2pPr indent="-317500" lvl="1" marL="914400">
+            <a:lvl2pPr marL="914400" lvl="1" indent="-317500">
               <a:spcBef>
                 <a:spcPts val="0"/>
               </a:spcBef>
@@ -5444,7 +5614,7 @@
                 </a:solidFill>
               </a:defRPr>
             </a:lvl2pPr>
-            <a:lvl3pPr indent="-317500" lvl="2" marL="1371600">
+            <a:lvl3pPr marL="1371600" lvl="2" indent="-317500">
               <a:spcBef>
                 <a:spcPts val="0"/>
               </a:spcBef>
@@ -5462,7 +5632,7 @@
                 </a:solidFill>
               </a:defRPr>
             </a:lvl3pPr>
-            <a:lvl4pPr indent="-317500" lvl="3" marL="1828800">
+            <a:lvl4pPr marL="1828800" lvl="3" indent="-317500">
               <a:spcBef>
                 <a:spcPts val="0"/>
               </a:spcBef>
@@ -5480,7 +5650,7 @@
                 </a:solidFill>
               </a:defRPr>
             </a:lvl4pPr>
-            <a:lvl5pPr indent="-317500" lvl="4" marL="2286000">
+            <a:lvl5pPr marL="2286000" lvl="4" indent="-317500">
               <a:spcBef>
                 <a:spcPts val="0"/>
               </a:spcBef>
@@ -5498,7 +5668,7 @@
                 </a:solidFill>
               </a:defRPr>
             </a:lvl5pPr>
-            <a:lvl6pPr indent="-317500" lvl="5" marL="2743200">
+            <a:lvl6pPr marL="2743200" lvl="5" indent="-317500">
               <a:spcBef>
                 <a:spcPts val="0"/>
               </a:spcBef>
@@ -5516,7 +5686,7 @@
                 </a:solidFill>
               </a:defRPr>
             </a:lvl6pPr>
-            <a:lvl7pPr indent="-317500" lvl="6" marL="3200400">
+            <a:lvl7pPr marL="3200400" lvl="6" indent="-317500">
               <a:spcBef>
                 <a:spcPts val="0"/>
               </a:spcBef>
@@ -5534,7 +5704,7 @@
                 </a:solidFill>
               </a:defRPr>
             </a:lvl7pPr>
-            <a:lvl8pPr indent="-317500" lvl="7" marL="3657600">
+            <a:lvl8pPr marL="3657600" lvl="7" indent="-317500">
               <a:spcBef>
                 <a:spcPts val="0"/>
               </a:spcBef>
@@ -5552,7 +5722,7 @@
                 </a:solidFill>
               </a:defRPr>
             </a:lvl8pPr>
-            <a:lvl9pPr indent="-317500" lvl="8" marL="4114800">
+            <a:lvl9pPr marL="4114800" lvl="8" indent="-317500">
               <a:spcBef>
                 <a:spcPts val="0"/>
               </a:spcBef>
@@ -5571,15 +5741,19 @@
               </a:defRPr>
             </a:lvl9pPr>
           </a:lstStyle>
-          <a:p/>
+          <a:p>
+            <a:endParaRPr/>
+          </a:p>
         </p:txBody>
       </p:sp>
       <p:sp>
         <p:nvSpPr>
           <p:cNvPr id="47" name="Google Shape;47;p9"/>
-          <p:cNvSpPr txBox="1"/>
+          <p:cNvSpPr txBox="1">
+            <a:spLocks noGrp="1"/>
+          </p:cNvSpPr>
           <p:nvPr>
-            <p:ph idx="12" type="sldNum"/>
+            <p:ph type="sldNum" idx="12"/>
           </p:nvPr>
         </p:nvSpPr>
         <p:spPr>
@@ -5592,7 +5766,7 @@
           </a:prstGeom>
         </p:spPr>
         <p:txBody>
-          <a:bodyPr anchorCtr="0" anchor="ctr" bIns="91425" lIns="91425" spcFirstLastPara="1" rIns="91425" wrap="square" tIns="91425">
+          <a:bodyPr spcFirstLastPara="1" wrap="square" lIns="91425" tIns="91425" rIns="91425" bIns="91425" anchor="ctr" anchorCtr="0">
             <a:normAutofit/>
           </a:bodyPr>
           <a:lstStyle>
@@ -5670,7 +5844,7 @@
             </a:lvl9pPr>
           </a:lstStyle>
           <a:p>
-            <a:pPr indent="0" lvl="0" marL="0" rtl="0" algn="r">
+            <a:pPr marL="0" lvl="0" indent="0" algn="r" rtl="0">
               <a:spcBef>
                 <a:spcPts val="0"/>
               </a:spcBef>
@@ -5696,11 +5870,11 @@
 </file>
 
 <file path=ppt/slideLayouts/slideLayout9.xml><?xml version="1.0" encoding="utf-8"?>
-<p:sldLayout xmlns:a="http://schemas.openxmlformats.org/drawingml/2006/main" xmlns:r="http://schemas.openxmlformats.org/officeDocument/2006/relationships" xmlns:mc="http://schemas.openxmlformats.org/markup-compatibility/2006" xmlns:mv="urn:schemas-microsoft-com:mac:vml" xmlns:p="http://schemas.openxmlformats.org/presentationml/2006/main" xmlns:c="http://schemas.openxmlformats.org/drawingml/2006/chart" xmlns:dgm="http://schemas.openxmlformats.org/drawingml/2006/diagram" xmlns:o="urn:schemas-microsoft-com:office:office" xmlns:v="urn:schemas-microsoft-com:vml" xmlns:pvml="urn:schemas-microsoft-com:office:powerpoint" xmlns:com="http://schemas.openxmlformats.org/drawingml/2006/compatibility" xmlns:p14="http://schemas.microsoft.com/office/powerpoint/2010/main" xmlns:p15="http://schemas.microsoft.com/office/powerpoint/2012/main" xmlns:ahyp="http://schemas.microsoft.com/office/drawing/2018/hyperlinkcolor" matchingName="Caption">
+<p:sldLayout xmlns:a="http://schemas.openxmlformats.org/drawingml/2006/main" xmlns:r="http://schemas.openxmlformats.org/officeDocument/2006/relationships" xmlns:p="http://schemas.openxmlformats.org/presentationml/2006/main" matchingName="Caption">
   <p:cSld name="CAPTION_ONLY">
     <p:spTree>
       <p:nvGrpSpPr>
-        <p:cNvPr id="48" name="Shape 48"/>
+        <p:cNvPr id="1" name="Shape 48"/>
         <p:cNvGrpSpPr/>
         <p:nvPr/>
       </p:nvGrpSpPr>
@@ -5715,9 +5889,11 @@
       <p:sp>
         <p:nvSpPr>
           <p:cNvPr id="49" name="Google Shape;49;p10"/>
-          <p:cNvSpPr txBox="1"/>
+          <p:cNvSpPr txBox="1">
+            <a:spLocks noGrp="1"/>
+          </p:cNvSpPr>
           <p:nvPr>
-            <p:ph idx="1" type="body"/>
+            <p:ph type="body" idx="1"/>
           </p:nvPr>
         </p:nvSpPr>
         <p:spPr>
@@ -5730,11 +5906,11 @@
           </a:prstGeom>
         </p:spPr>
         <p:txBody>
-          <a:bodyPr anchorCtr="0" anchor="ctr" bIns="91425" lIns="91425" spcFirstLastPara="1" rIns="91425" wrap="square" tIns="91425">
+          <a:bodyPr spcFirstLastPara="1" wrap="square" lIns="91425" tIns="91425" rIns="91425" bIns="91425" anchor="ctr" anchorCtr="0">
             <a:normAutofit/>
           </a:bodyPr>
           <a:lstStyle>
-            <a:lvl1pPr indent="-228600" lvl="0" marL="457200">
+            <a:lvl1pPr marL="457200" lvl="0" indent="-228600">
               <a:lnSpc>
                 <a:spcPct val="100000"/>
               </a:lnSpc>
@@ -5755,15 +5931,19 @@
               </a:defRPr>
             </a:lvl1pPr>
           </a:lstStyle>
-          <a:p/>
+          <a:p>
+            <a:endParaRPr/>
+          </a:p>
         </p:txBody>
       </p:sp>
       <p:sp>
         <p:nvSpPr>
           <p:cNvPr id="50" name="Google Shape;50;p10"/>
-          <p:cNvSpPr txBox="1"/>
+          <p:cNvSpPr txBox="1">
+            <a:spLocks noGrp="1"/>
+          </p:cNvSpPr>
           <p:nvPr>
-            <p:ph idx="12" type="sldNum"/>
+            <p:ph type="sldNum" idx="12"/>
           </p:nvPr>
         </p:nvSpPr>
         <p:spPr>
@@ -5776,7 +5956,7 @@
           </a:prstGeom>
         </p:spPr>
         <p:txBody>
-          <a:bodyPr anchorCtr="0" anchor="ctr" bIns="91425" lIns="91425" spcFirstLastPara="1" rIns="91425" wrap="square" tIns="91425">
+          <a:bodyPr spcFirstLastPara="1" wrap="square" lIns="91425" tIns="91425" rIns="91425" bIns="91425" anchor="ctr" anchorCtr="0">
             <a:normAutofit/>
           </a:bodyPr>
           <a:lstStyle>
@@ -5818,7 +5998,7 @@
             </a:lvl9pPr>
           </a:lstStyle>
           <a:p>
-            <a:pPr indent="0" lvl="0" marL="0" rtl="0" algn="r">
+            <a:pPr marL="0" lvl="0" indent="0" algn="r" rtl="0">
               <a:spcBef>
                 <a:spcPts val="0"/>
               </a:spcBef>
@@ -5844,18 +6024,19 @@
 </file>
 
 <file path=ppt/slideMasters/slideMaster1.xml><?xml version="1.0" encoding="utf-8"?>
-<p:sldMaster xmlns:a="http://schemas.openxmlformats.org/drawingml/2006/main" xmlns:r="http://schemas.openxmlformats.org/officeDocument/2006/relationships" xmlns:mc="http://schemas.openxmlformats.org/markup-compatibility/2006" xmlns:mv="urn:schemas-microsoft-com:mac:vml" xmlns:p="http://schemas.openxmlformats.org/presentationml/2006/main" xmlns:c="http://schemas.openxmlformats.org/drawingml/2006/chart" xmlns:dgm="http://schemas.openxmlformats.org/drawingml/2006/diagram" xmlns:o="urn:schemas-microsoft-com:office:office" xmlns:v="urn:schemas-microsoft-com:vml" xmlns:pvml="urn:schemas-microsoft-com:office:powerpoint" xmlns:com="http://schemas.openxmlformats.org/drawingml/2006/compatibility" xmlns:p14="http://schemas.microsoft.com/office/powerpoint/2010/main" xmlns:p15="http://schemas.microsoft.com/office/powerpoint/2012/main" xmlns:ahyp="http://schemas.microsoft.com/office/drawing/2018/hyperlinkcolor">
+<p:sldMaster xmlns:a="http://schemas.openxmlformats.org/drawingml/2006/main" xmlns:r="http://schemas.openxmlformats.org/officeDocument/2006/relationships" xmlns:p="http://schemas.openxmlformats.org/presentationml/2006/main">
   <p:cSld name="luxe">
     <p:bg>
       <p:bgPr>
         <a:solidFill>
           <a:schemeClr val="lt1"/>
         </a:solidFill>
+        <a:effectLst/>
       </p:bgPr>
     </p:bg>
     <p:spTree>
       <p:nvGrpSpPr>
-        <p:cNvPr id="5" name="Shape 5"/>
+        <p:cNvPr id="1" name="Shape 5"/>
         <p:cNvGrpSpPr/>
         <p:nvPr/>
       </p:nvGrpSpPr>
@@ -5870,7 +6051,9 @@
       <p:sp>
         <p:nvSpPr>
           <p:cNvPr id="6" name="Google Shape;6;p1"/>
-          <p:cNvSpPr txBox="1"/>
+          <p:cNvSpPr txBox="1">
+            <a:spLocks noGrp="1"/>
+          </p:cNvSpPr>
           <p:nvPr>
             <p:ph type="title"/>
           </p:nvPr>
@@ -5889,7 +6072,7 @@
           </a:ln>
         </p:spPr>
         <p:txBody>
-          <a:bodyPr anchorCtr="0" anchor="b" bIns="91425" lIns="91425" spcFirstLastPara="1" rIns="91425" wrap="square" tIns="91425">
+          <a:bodyPr spcFirstLastPara="1" wrap="square" lIns="91425" tIns="91425" rIns="91425" bIns="91425" anchor="b" anchorCtr="0">
             <a:normAutofit/>
           </a:bodyPr>
           <a:lstStyle>
@@ -6101,15 +6284,19 @@
               </a:defRPr>
             </a:lvl9pPr>
           </a:lstStyle>
-          <a:p/>
+          <a:p>
+            <a:endParaRPr/>
+          </a:p>
         </p:txBody>
       </p:sp>
       <p:sp>
         <p:nvSpPr>
           <p:cNvPr id="7" name="Google Shape;7;p1"/>
-          <p:cNvSpPr txBox="1"/>
+          <p:cNvSpPr txBox="1">
+            <a:spLocks noGrp="1"/>
+          </p:cNvSpPr>
           <p:nvPr>
-            <p:ph idx="1" type="body"/>
+            <p:ph type="body" idx="1"/>
           </p:nvPr>
         </p:nvSpPr>
         <p:spPr>
@@ -6126,11 +6313,11 @@
           </a:ln>
         </p:spPr>
         <p:txBody>
-          <a:bodyPr anchorCtr="0" anchor="t" bIns="91425" lIns="91425" spcFirstLastPara="1" rIns="91425" wrap="square" tIns="91425">
+          <a:bodyPr spcFirstLastPara="1" wrap="square" lIns="91425" tIns="91425" rIns="91425" bIns="91425" anchor="t" anchorCtr="0">
             <a:normAutofit/>
           </a:bodyPr>
           <a:lstStyle>
-            <a:lvl1pPr indent="-342900" lvl="0" marL="457200">
+            <a:lvl1pPr marL="457200" lvl="0" indent="-342900">
               <a:lnSpc>
                 <a:spcPct val="115000"/>
               </a:lnSpc>
@@ -6156,7 +6343,7 @@
                 <a:sym typeface="Open Sans"/>
               </a:defRPr>
             </a:lvl1pPr>
-            <a:lvl2pPr indent="-317500" lvl="1" marL="914400">
+            <a:lvl2pPr marL="914400" lvl="1" indent="-317500">
               <a:lnSpc>
                 <a:spcPct val="115000"/>
               </a:lnSpc>
@@ -6182,7 +6369,7 @@
                 <a:sym typeface="Open Sans"/>
               </a:defRPr>
             </a:lvl2pPr>
-            <a:lvl3pPr indent="-317500" lvl="2" marL="1371600">
+            <a:lvl3pPr marL="1371600" lvl="2" indent="-317500">
               <a:lnSpc>
                 <a:spcPct val="115000"/>
               </a:lnSpc>
@@ -6208,7 +6395,7 @@
                 <a:sym typeface="Open Sans"/>
               </a:defRPr>
             </a:lvl3pPr>
-            <a:lvl4pPr indent="-317500" lvl="3" marL="1828800">
+            <a:lvl4pPr marL="1828800" lvl="3" indent="-317500">
               <a:lnSpc>
                 <a:spcPct val="115000"/>
               </a:lnSpc>
@@ -6234,7 +6421,7 @@
                 <a:sym typeface="Open Sans"/>
               </a:defRPr>
             </a:lvl4pPr>
-            <a:lvl5pPr indent="-317500" lvl="4" marL="2286000">
+            <a:lvl5pPr marL="2286000" lvl="4" indent="-317500">
               <a:lnSpc>
                 <a:spcPct val="115000"/>
               </a:lnSpc>
@@ -6260,7 +6447,7 @@
                 <a:sym typeface="Open Sans"/>
               </a:defRPr>
             </a:lvl5pPr>
-            <a:lvl6pPr indent="-317500" lvl="5" marL="2743200">
+            <a:lvl6pPr marL="2743200" lvl="5" indent="-317500">
               <a:lnSpc>
                 <a:spcPct val="115000"/>
               </a:lnSpc>
@@ -6286,7 +6473,7 @@
                 <a:sym typeface="Open Sans"/>
               </a:defRPr>
             </a:lvl6pPr>
-            <a:lvl7pPr indent="-317500" lvl="6" marL="3200400">
+            <a:lvl7pPr marL="3200400" lvl="6" indent="-317500">
               <a:lnSpc>
                 <a:spcPct val="115000"/>
               </a:lnSpc>
@@ -6312,7 +6499,7 @@
                 <a:sym typeface="Open Sans"/>
               </a:defRPr>
             </a:lvl7pPr>
-            <a:lvl8pPr indent="-317500" lvl="7" marL="3657600">
+            <a:lvl8pPr marL="3657600" lvl="7" indent="-317500">
               <a:lnSpc>
                 <a:spcPct val="115000"/>
               </a:lnSpc>
@@ -6338,7 +6525,7 @@
                 <a:sym typeface="Open Sans"/>
               </a:defRPr>
             </a:lvl8pPr>
-            <a:lvl9pPr indent="-317500" lvl="8" marL="4114800">
+            <a:lvl9pPr marL="4114800" lvl="8" indent="-317500">
               <a:lnSpc>
                 <a:spcPct val="115000"/>
               </a:lnSpc>
@@ -6365,15 +6552,19 @@
               </a:defRPr>
             </a:lvl9pPr>
           </a:lstStyle>
-          <a:p/>
+          <a:p>
+            <a:endParaRPr/>
+          </a:p>
         </p:txBody>
       </p:sp>
       <p:sp>
         <p:nvSpPr>
           <p:cNvPr id="8" name="Google Shape;8;p1"/>
-          <p:cNvSpPr txBox="1"/>
+          <p:cNvSpPr txBox="1">
+            <a:spLocks noGrp="1"/>
+          </p:cNvSpPr>
           <p:nvPr>
-            <p:ph idx="12" type="sldNum"/>
+            <p:ph type="sldNum" idx="12"/>
           </p:nvPr>
         </p:nvSpPr>
         <p:spPr>
@@ -6390,7 +6581,7 @@
           </a:ln>
         </p:spPr>
         <p:txBody>
-          <a:bodyPr anchorCtr="0" anchor="ctr" bIns="91425" lIns="91425" spcFirstLastPara="1" rIns="91425" wrap="square" tIns="91425">
+          <a:bodyPr spcFirstLastPara="1" wrap="square" lIns="91425" tIns="91425" rIns="91425" bIns="91425" anchor="ctr" anchorCtr="0">
             <a:normAutofit/>
           </a:bodyPr>
           <a:lstStyle>
@@ -6504,7 +6695,7 @@
             </a:lvl9pPr>
           </a:lstStyle>
           <a:p>
-            <a:pPr indent="0" lvl="0" marL="0" rtl="0" algn="r">
+            <a:pPr marL="0" lvl="0" indent="0" algn="r" rtl="0">
               <a:spcBef>
                 <a:spcPts val="0"/>
               </a:spcBef>
@@ -6523,7 +6714,7 @@
       </p:sp>
     </p:spTree>
   </p:cSld>
-  <p:clrMap accent1="accent1" accent2="accent2" accent3="accent3" accent4="accent4" accent5="accent5" accent6="accent6" bg1="lt1" bg2="dk2" tx1="dk1" tx2="lt2" folHlink="folHlink" hlink="hlink"/>
+  <p:clrMap bg1="lt1" tx1="dk1" bg2="dk2" tx2="lt2" accent1="accent1" accent2="accent2" accent3="accent3" accent4="accent4" accent5="accent5" accent6="accent6" hlink="hlink" folHlink="folHlink"/>
   <p:sldLayoutIdLst>
     <p:sldLayoutId id="2147483648" r:id="rId1"/>
     <p:sldLayoutId id="2147483649" r:id="rId2"/>
@@ -6537,10 +6728,10 @@
     <p:sldLayoutId id="2147483657" r:id="rId10"/>
     <p:sldLayoutId id="2147483658" r:id="rId11"/>
   </p:sldLayoutIdLst>
-  <p:hf dt="0" ftr="0" hdr="0" sldNum="0"/>
+  <p:hf sldNum="0" hdr="0" ftr="0" dt="0"/>
   <p:txStyles>
     <p:titleStyle>
-      <a:defPPr lvl="0" marR="0" rtl="0" algn="l">
+      <a:defPPr marR="0" lvl="0" algn="l" rtl="0">
         <a:lnSpc>
           <a:spcPct val="100000"/>
         </a:lnSpc>
@@ -6551,7 +6742,7 @@
           <a:spcPts val="0"/>
         </a:spcAft>
       </a:defPPr>
-      <a:lvl1pPr lvl="0" marR="0" rtl="0" algn="l">
+      <a:lvl1pPr marR="0" lvl="0" algn="l" rtl="0">
         <a:lnSpc>
           <a:spcPct val="100000"/>
         </a:lnSpc>
@@ -6565,7 +6756,7 @@
           <a:srgbClr val="000000"/>
         </a:buClr>
         <a:buFont typeface="Arial"/>
-        <a:defRPr b="0" i="0" sz="1400" u="none" cap="none" strike="noStrike">
+        <a:defRPr sz="1400" b="0" i="0" u="none" strike="noStrike" cap="none">
           <a:solidFill>
             <a:srgbClr val="000000"/>
           </a:solidFill>
@@ -6575,7 +6766,7 @@
           <a:sym typeface="Arial"/>
         </a:defRPr>
       </a:lvl1pPr>
-      <a:lvl2pPr lvl="1" marR="0" rtl="0" algn="l">
+      <a:lvl2pPr marR="0" lvl="1" algn="l" rtl="0">
         <a:lnSpc>
           <a:spcPct val="100000"/>
         </a:lnSpc>
@@ -6589,7 +6780,7 @@
           <a:srgbClr val="000000"/>
         </a:buClr>
         <a:buFont typeface="Arial"/>
-        <a:defRPr b="0" i="0" sz="1400" u="none" cap="none" strike="noStrike">
+        <a:defRPr sz="1400" b="0" i="0" u="none" strike="noStrike" cap="none">
           <a:solidFill>
             <a:srgbClr val="000000"/>
           </a:solidFill>
@@ -6599,7 +6790,7 @@
           <a:sym typeface="Arial"/>
         </a:defRPr>
       </a:lvl2pPr>
-      <a:lvl3pPr lvl="2" marR="0" rtl="0" algn="l">
+      <a:lvl3pPr marR="0" lvl="2" algn="l" rtl="0">
         <a:lnSpc>
           <a:spcPct val="100000"/>
         </a:lnSpc>
@@ -6613,7 +6804,7 @@
           <a:srgbClr val="000000"/>
         </a:buClr>
         <a:buFont typeface="Arial"/>
-        <a:defRPr b="0" i="0" sz="1400" u="none" cap="none" strike="noStrike">
+        <a:defRPr sz="1400" b="0" i="0" u="none" strike="noStrike" cap="none">
           <a:solidFill>
             <a:srgbClr val="000000"/>
           </a:solidFill>
@@ -6623,7 +6814,7 @@
           <a:sym typeface="Arial"/>
         </a:defRPr>
       </a:lvl3pPr>
-      <a:lvl4pPr lvl="3" marR="0" rtl="0" algn="l">
+      <a:lvl4pPr marR="0" lvl="3" algn="l" rtl="0">
         <a:lnSpc>
           <a:spcPct val="100000"/>
         </a:lnSpc>
@@ -6637,7 +6828,7 @@
           <a:srgbClr val="000000"/>
         </a:buClr>
         <a:buFont typeface="Arial"/>
-        <a:defRPr b="0" i="0" sz="1400" u="none" cap="none" strike="noStrike">
+        <a:defRPr sz="1400" b="0" i="0" u="none" strike="noStrike" cap="none">
           <a:solidFill>
             <a:srgbClr val="000000"/>
           </a:solidFill>
@@ -6647,7 +6838,7 @@
           <a:sym typeface="Arial"/>
         </a:defRPr>
       </a:lvl4pPr>
-      <a:lvl5pPr lvl="4" marR="0" rtl="0" algn="l">
+      <a:lvl5pPr marR="0" lvl="4" algn="l" rtl="0">
         <a:lnSpc>
           <a:spcPct val="100000"/>
         </a:lnSpc>
@@ -6661,7 +6852,7 @@
           <a:srgbClr val="000000"/>
         </a:buClr>
         <a:buFont typeface="Arial"/>
-        <a:defRPr b="0" i="0" sz="1400" u="none" cap="none" strike="noStrike">
+        <a:defRPr sz="1400" b="0" i="0" u="none" strike="noStrike" cap="none">
           <a:solidFill>
             <a:srgbClr val="000000"/>
           </a:solidFill>
@@ -6671,7 +6862,7 @@
           <a:sym typeface="Arial"/>
         </a:defRPr>
       </a:lvl5pPr>
-      <a:lvl6pPr lvl="5" marR="0" rtl="0" algn="l">
+      <a:lvl6pPr marR="0" lvl="5" algn="l" rtl="0">
         <a:lnSpc>
           <a:spcPct val="100000"/>
         </a:lnSpc>
@@ -6685,7 +6876,7 @@
           <a:srgbClr val="000000"/>
         </a:buClr>
         <a:buFont typeface="Arial"/>
-        <a:defRPr b="0" i="0" sz="1400" u="none" cap="none" strike="noStrike">
+        <a:defRPr sz="1400" b="0" i="0" u="none" strike="noStrike" cap="none">
           <a:solidFill>
             <a:srgbClr val="000000"/>
           </a:solidFill>
@@ -6695,7 +6886,7 @@
           <a:sym typeface="Arial"/>
         </a:defRPr>
       </a:lvl6pPr>
-      <a:lvl7pPr lvl="6" marR="0" rtl="0" algn="l">
+      <a:lvl7pPr marR="0" lvl="6" algn="l" rtl="0">
         <a:lnSpc>
           <a:spcPct val="100000"/>
         </a:lnSpc>
@@ -6709,7 +6900,7 @@
           <a:srgbClr val="000000"/>
         </a:buClr>
         <a:buFont typeface="Arial"/>
-        <a:defRPr b="0" i="0" sz="1400" u="none" cap="none" strike="noStrike">
+        <a:defRPr sz="1400" b="0" i="0" u="none" strike="noStrike" cap="none">
           <a:solidFill>
             <a:srgbClr val="000000"/>
           </a:solidFill>
@@ -6719,7 +6910,7 @@
           <a:sym typeface="Arial"/>
         </a:defRPr>
       </a:lvl7pPr>
-      <a:lvl8pPr lvl="7" marR="0" rtl="0" algn="l">
+      <a:lvl8pPr marR="0" lvl="7" algn="l" rtl="0">
         <a:lnSpc>
           <a:spcPct val="100000"/>
         </a:lnSpc>
@@ -6733,7 +6924,7 @@
           <a:srgbClr val="000000"/>
         </a:buClr>
         <a:buFont typeface="Arial"/>
-        <a:defRPr b="0" i="0" sz="1400" u="none" cap="none" strike="noStrike">
+        <a:defRPr sz="1400" b="0" i="0" u="none" strike="noStrike" cap="none">
           <a:solidFill>
             <a:srgbClr val="000000"/>
           </a:solidFill>
@@ -6743,7 +6934,7 @@
           <a:sym typeface="Arial"/>
         </a:defRPr>
       </a:lvl8pPr>
-      <a:lvl9pPr lvl="8" marR="0" rtl="0" algn="l">
+      <a:lvl9pPr marR="0" lvl="8" algn="l" rtl="0">
         <a:lnSpc>
           <a:spcPct val="100000"/>
         </a:lnSpc>
@@ -6757,7 +6948,7 @@
           <a:srgbClr val="000000"/>
         </a:buClr>
         <a:buFont typeface="Arial"/>
-        <a:defRPr b="0" i="0" sz="1400" u="none" cap="none" strike="noStrike">
+        <a:defRPr sz="1400" b="0" i="0" u="none" strike="noStrike" cap="none">
           <a:solidFill>
             <a:srgbClr val="000000"/>
           </a:solidFill>
@@ -6769,7 +6960,7 @@
       </a:lvl9pPr>
     </p:titleStyle>
     <p:bodyStyle>
-      <a:defPPr lvl="0" marR="0" rtl="0" algn="l">
+      <a:defPPr marR="0" lvl="0" algn="l" rtl="0">
         <a:lnSpc>
           <a:spcPct val="100000"/>
         </a:lnSpc>
@@ -6780,7 +6971,7 @@
           <a:spcPts val="0"/>
         </a:spcAft>
       </a:defPPr>
-      <a:lvl1pPr lvl="0" marR="0" rtl="0" algn="l">
+      <a:lvl1pPr marR="0" lvl="0" algn="l" rtl="0">
         <a:lnSpc>
           <a:spcPct val="100000"/>
         </a:lnSpc>
@@ -6794,7 +6985,7 @@
           <a:srgbClr val="000000"/>
         </a:buClr>
         <a:buFont typeface="Arial"/>
-        <a:defRPr b="0" i="0" sz="1400" u="none" cap="none" strike="noStrike">
+        <a:defRPr sz="1400" b="0" i="0" u="none" strike="noStrike" cap="none">
           <a:solidFill>
             <a:srgbClr val="000000"/>
           </a:solidFill>
@@ -6804,7 +6995,7 @@
           <a:sym typeface="Arial"/>
         </a:defRPr>
       </a:lvl1pPr>
-      <a:lvl2pPr lvl="1" marR="0" rtl="0" algn="l">
+      <a:lvl2pPr marR="0" lvl="1" algn="l" rtl="0">
         <a:lnSpc>
           <a:spcPct val="100000"/>
         </a:lnSpc>
@@ -6818,7 +7009,7 @@
           <a:srgbClr val="000000"/>
         </a:buClr>
         <a:buFont typeface="Arial"/>
-        <a:defRPr b="0" i="0" sz="1400" u="none" cap="none" strike="noStrike">
+        <a:defRPr sz="1400" b="0" i="0" u="none" strike="noStrike" cap="none">
           <a:solidFill>
             <a:srgbClr val="000000"/>
           </a:solidFill>
@@ -6828,7 +7019,7 @@
           <a:sym typeface="Arial"/>
         </a:defRPr>
       </a:lvl2pPr>
-      <a:lvl3pPr lvl="2" marR="0" rtl="0" algn="l">
+      <a:lvl3pPr marR="0" lvl="2" algn="l" rtl="0">
         <a:lnSpc>
           <a:spcPct val="100000"/>
         </a:lnSpc>
@@ -6842,7 +7033,7 @@
           <a:srgbClr val="000000"/>
         </a:buClr>
         <a:buFont typeface="Arial"/>
-        <a:defRPr b="0" i="0" sz="1400" u="none" cap="none" strike="noStrike">
+        <a:defRPr sz="1400" b="0" i="0" u="none" strike="noStrike" cap="none">
           <a:solidFill>
             <a:srgbClr val="000000"/>
           </a:solidFill>
@@ -6852,7 +7043,7 @@
           <a:sym typeface="Arial"/>
         </a:defRPr>
       </a:lvl3pPr>
-      <a:lvl4pPr lvl="3" marR="0" rtl="0" algn="l">
+      <a:lvl4pPr marR="0" lvl="3" algn="l" rtl="0">
         <a:lnSpc>
           <a:spcPct val="100000"/>
         </a:lnSpc>
@@ -6866,7 +7057,7 @@
           <a:srgbClr val="000000"/>
         </a:buClr>
         <a:buFont typeface="Arial"/>
-        <a:defRPr b="0" i="0" sz="1400" u="none" cap="none" strike="noStrike">
+        <a:defRPr sz="1400" b="0" i="0" u="none" strike="noStrike" cap="none">
           <a:solidFill>
             <a:srgbClr val="000000"/>
           </a:solidFill>
@@ -6876,7 +7067,7 @@
           <a:sym typeface="Arial"/>
         </a:defRPr>
       </a:lvl4pPr>
-      <a:lvl5pPr lvl="4" marR="0" rtl="0" algn="l">
+      <a:lvl5pPr marR="0" lvl="4" algn="l" rtl="0">
         <a:lnSpc>
           <a:spcPct val="100000"/>
         </a:lnSpc>
@@ -6890,7 +7081,7 @@
           <a:srgbClr val="000000"/>
         </a:buClr>
         <a:buFont typeface="Arial"/>
-        <a:defRPr b="0" i="0" sz="1400" u="none" cap="none" strike="noStrike">
+        <a:defRPr sz="1400" b="0" i="0" u="none" strike="noStrike" cap="none">
           <a:solidFill>
             <a:srgbClr val="000000"/>
           </a:solidFill>
@@ -6900,7 +7091,7 @@
           <a:sym typeface="Arial"/>
         </a:defRPr>
       </a:lvl5pPr>
-      <a:lvl6pPr lvl="5" marR="0" rtl="0" algn="l">
+      <a:lvl6pPr marR="0" lvl="5" algn="l" rtl="0">
         <a:lnSpc>
           <a:spcPct val="100000"/>
         </a:lnSpc>
@@ -6914,7 +7105,7 @@
           <a:srgbClr val="000000"/>
         </a:buClr>
         <a:buFont typeface="Arial"/>
-        <a:defRPr b="0" i="0" sz="1400" u="none" cap="none" strike="noStrike">
+        <a:defRPr sz="1400" b="0" i="0" u="none" strike="noStrike" cap="none">
           <a:solidFill>
             <a:srgbClr val="000000"/>
           </a:solidFill>
@@ -6924,7 +7115,7 @@
           <a:sym typeface="Arial"/>
         </a:defRPr>
       </a:lvl6pPr>
-      <a:lvl7pPr lvl="6" marR="0" rtl="0" algn="l">
+      <a:lvl7pPr marR="0" lvl="6" algn="l" rtl="0">
         <a:lnSpc>
           <a:spcPct val="100000"/>
         </a:lnSpc>
@@ -6938,7 +7129,7 @@
           <a:srgbClr val="000000"/>
         </a:buClr>
         <a:buFont typeface="Arial"/>
-        <a:defRPr b="0" i="0" sz="1400" u="none" cap="none" strike="noStrike">
+        <a:defRPr sz="1400" b="0" i="0" u="none" strike="noStrike" cap="none">
           <a:solidFill>
             <a:srgbClr val="000000"/>
           </a:solidFill>
@@ -6948,7 +7139,7 @@
           <a:sym typeface="Arial"/>
         </a:defRPr>
       </a:lvl7pPr>
-      <a:lvl8pPr lvl="7" marR="0" rtl="0" algn="l">
+      <a:lvl8pPr marR="0" lvl="7" algn="l" rtl="0">
         <a:lnSpc>
           <a:spcPct val="100000"/>
         </a:lnSpc>
@@ -6962,7 +7153,7 @@
           <a:srgbClr val="000000"/>
         </a:buClr>
         <a:buFont typeface="Arial"/>
-        <a:defRPr b="0" i="0" sz="1400" u="none" cap="none" strike="noStrike">
+        <a:defRPr sz="1400" b="0" i="0" u="none" strike="noStrike" cap="none">
           <a:solidFill>
             <a:srgbClr val="000000"/>
           </a:solidFill>
@@ -6972,7 +7163,7 @@
           <a:sym typeface="Arial"/>
         </a:defRPr>
       </a:lvl8pPr>
-      <a:lvl9pPr lvl="8" marR="0" rtl="0" algn="l">
+      <a:lvl9pPr marR="0" lvl="8" algn="l" rtl="0">
         <a:lnSpc>
           <a:spcPct val="100000"/>
         </a:lnSpc>
@@ -6986,7 +7177,7 @@
           <a:srgbClr val="000000"/>
         </a:buClr>
         <a:buFont typeface="Arial"/>
-        <a:defRPr b="0" i="0" sz="1400" u="none" cap="none" strike="noStrike">
+        <a:defRPr sz="1400" b="0" i="0" u="none" strike="noStrike" cap="none">
           <a:solidFill>
             <a:srgbClr val="000000"/>
           </a:solidFill>
@@ -6998,7 +7189,7 @@
       </a:lvl9pPr>
     </p:bodyStyle>
     <p:otherStyle>
-      <a:defPPr lvl="0" marR="0" rtl="0" algn="l">
+      <a:defPPr marR="0" lvl="0" algn="l" rtl="0">
         <a:lnSpc>
           <a:spcPct val="100000"/>
         </a:lnSpc>
@@ -7009,7 +7200,7 @@
           <a:spcPts val="0"/>
         </a:spcAft>
       </a:defPPr>
-      <a:lvl1pPr lvl="0" marR="0" rtl="0" algn="l">
+      <a:lvl1pPr marR="0" lvl="0" algn="l" rtl="0">
         <a:lnSpc>
           <a:spcPct val="100000"/>
         </a:lnSpc>
@@ -7023,7 +7214,7 @@
           <a:srgbClr val="000000"/>
         </a:buClr>
         <a:buFont typeface="Arial"/>
-        <a:defRPr b="0" i="0" sz="1400" u="none" cap="none" strike="noStrike">
+        <a:defRPr sz="1400" b="0" i="0" u="none" strike="noStrike" cap="none">
           <a:solidFill>
             <a:srgbClr val="000000"/>
           </a:solidFill>
@@ -7033,7 +7224,7 @@
           <a:sym typeface="Arial"/>
         </a:defRPr>
       </a:lvl1pPr>
-      <a:lvl2pPr lvl="1" marR="0" rtl="0" algn="l">
+      <a:lvl2pPr marR="0" lvl="1" algn="l" rtl="0">
         <a:lnSpc>
           <a:spcPct val="100000"/>
         </a:lnSpc>
@@ -7047,7 +7238,7 @@
           <a:srgbClr val="000000"/>
         </a:buClr>
         <a:buFont typeface="Arial"/>
-        <a:defRPr b="0" i="0" sz="1400" u="none" cap="none" strike="noStrike">
+        <a:defRPr sz="1400" b="0" i="0" u="none" strike="noStrike" cap="none">
           <a:solidFill>
             <a:srgbClr val="000000"/>
           </a:solidFill>
@@ -7057,7 +7248,7 @@
           <a:sym typeface="Arial"/>
         </a:defRPr>
       </a:lvl2pPr>
-      <a:lvl3pPr lvl="2" marR="0" rtl="0" algn="l">
+      <a:lvl3pPr marR="0" lvl="2" algn="l" rtl="0">
         <a:lnSpc>
           <a:spcPct val="100000"/>
         </a:lnSpc>
@@ -7071,7 +7262,7 @@
           <a:srgbClr val="000000"/>
         </a:buClr>
         <a:buFont typeface="Arial"/>
-        <a:defRPr b="0" i="0" sz="1400" u="none" cap="none" strike="noStrike">
+        <a:defRPr sz="1400" b="0" i="0" u="none" strike="noStrike" cap="none">
           <a:solidFill>
             <a:srgbClr val="000000"/>
           </a:solidFill>
@@ -7081,7 +7272,7 @@
           <a:sym typeface="Arial"/>
         </a:defRPr>
       </a:lvl3pPr>
-      <a:lvl4pPr lvl="3" marR="0" rtl="0" algn="l">
+      <a:lvl4pPr marR="0" lvl="3" algn="l" rtl="0">
         <a:lnSpc>
           <a:spcPct val="100000"/>
         </a:lnSpc>
@@ -7095,7 +7286,7 @@
           <a:srgbClr val="000000"/>
         </a:buClr>
         <a:buFont typeface="Arial"/>
-        <a:defRPr b="0" i="0" sz="1400" u="none" cap="none" strike="noStrike">
+        <a:defRPr sz="1400" b="0" i="0" u="none" strike="noStrike" cap="none">
           <a:solidFill>
             <a:srgbClr val="000000"/>
           </a:solidFill>
@@ -7105,7 +7296,7 @@
           <a:sym typeface="Arial"/>
         </a:defRPr>
       </a:lvl4pPr>
-      <a:lvl5pPr lvl="4" marR="0" rtl="0" algn="l">
+      <a:lvl5pPr marR="0" lvl="4" algn="l" rtl="0">
         <a:lnSpc>
           <a:spcPct val="100000"/>
         </a:lnSpc>
@@ -7119,7 +7310,7 @@
           <a:srgbClr val="000000"/>
         </a:buClr>
         <a:buFont typeface="Arial"/>
-        <a:defRPr b="0" i="0" sz="1400" u="none" cap="none" strike="noStrike">
+        <a:defRPr sz="1400" b="0" i="0" u="none" strike="noStrike" cap="none">
           <a:solidFill>
             <a:srgbClr val="000000"/>
           </a:solidFill>
@@ -7129,7 +7320,7 @@
           <a:sym typeface="Arial"/>
         </a:defRPr>
       </a:lvl5pPr>
-      <a:lvl6pPr lvl="5" marR="0" rtl="0" algn="l">
+      <a:lvl6pPr marR="0" lvl="5" algn="l" rtl="0">
         <a:lnSpc>
           <a:spcPct val="100000"/>
         </a:lnSpc>
@@ -7143,7 +7334,7 @@
           <a:srgbClr val="000000"/>
         </a:buClr>
         <a:buFont typeface="Arial"/>
-        <a:defRPr b="0" i="0" sz="1400" u="none" cap="none" strike="noStrike">
+        <a:defRPr sz="1400" b="0" i="0" u="none" strike="noStrike" cap="none">
           <a:solidFill>
             <a:srgbClr val="000000"/>
           </a:solidFill>
@@ -7153,7 +7344,7 @@
           <a:sym typeface="Arial"/>
         </a:defRPr>
       </a:lvl6pPr>
-      <a:lvl7pPr lvl="6" marR="0" rtl="0" algn="l">
+      <a:lvl7pPr marR="0" lvl="6" algn="l" rtl="0">
         <a:lnSpc>
           <a:spcPct val="100000"/>
         </a:lnSpc>
@@ -7167,7 +7358,7 @@
           <a:srgbClr val="000000"/>
         </a:buClr>
         <a:buFont typeface="Arial"/>
-        <a:defRPr b="0" i="0" sz="1400" u="none" cap="none" strike="noStrike">
+        <a:defRPr sz="1400" b="0" i="0" u="none" strike="noStrike" cap="none">
           <a:solidFill>
             <a:srgbClr val="000000"/>
           </a:solidFill>
@@ -7177,7 +7368,7 @@
           <a:sym typeface="Arial"/>
         </a:defRPr>
       </a:lvl7pPr>
-      <a:lvl8pPr lvl="7" marR="0" rtl="0" algn="l">
+      <a:lvl8pPr marR="0" lvl="7" algn="l" rtl="0">
         <a:lnSpc>
           <a:spcPct val="100000"/>
         </a:lnSpc>
@@ -7191,7 +7382,7 @@
           <a:srgbClr val="000000"/>
         </a:buClr>
         <a:buFont typeface="Arial"/>
-        <a:defRPr b="0" i="0" sz="1400" u="none" cap="none" strike="noStrike">
+        <a:defRPr sz="1400" b="0" i="0" u="none" strike="noStrike" cap="none">
           <a:solidFill>
             <a:srgbClr val="000000"/>
           </a:solidFill>
@@ -7201,7 +7392,7 @@
           <a:sym typeface="Arial"/>
         </a:defRPr>
       </a:lvl8pPr>
-      <a:lvl9pPr lvl="8" marR="0" rtl="0" algn="l">
+      <a:lvl9pPr marR="0" lvl="8" algn="l" rtl="0">
         <a:lnSpc>
           <a:spcPct val="100000"/>
         </a:lnSpc>
@@ -7215,7 +7406,7 @@
           <a:srgbClr val="000000"/>
         </a:buClr>
         <a:buFont typeface="Arial"/>
-        <a:defRPr b="0" i="0" sz="1400" u="none" cap="none" strike="noStrike">
+        <a:defRPr sz="1400" b="0" i="0" u="none" strike="noStrike" cap="none">
           <a:solidFill>
             <a:srgbClr val="000000"/>
           </a:solidFill>
@@ -7231,11 +7422,11 @@
 </file>
 
 <file path=ppt/slides/slide1.xml><?xml version="1.0" encoding="utf-8"?>
-<p:sld xmlns:a="http://schemas.openxmlformats.org/drawingml/2006/main" xmlns:r="http://schemas.openxmlformats.org/officeDocument/2006/relationships" xmlns:mc="http://schemas.openxmlformats.org/markup-compatibility/2006" xmlns:mv="urn:schemas-microsoft-com:mac:vml" xmlns:p="http://schemas.openxmlformats.org/presentationml/2006/main" xmlns:c="http://schemas.openxmlformats.org/drawingml/2006/chart" xmlns:dgm="http://schemas.openxmlformats.org/drawingml/2006/diagram" xmlns:o="urn:schemas-microsoft-com:office:office" xmlns:v="urn:schemas-microsoft-com:vml" xmlns:pvml="urn:schemas-microsoft-com:office:powerpoint" xmlns:com="http://schemas.openxmlformats.org/drawingml/2006/compatibility" xmlns:p14="http://schemas.microsoft.com/office/powerpoint/2010/main" xmlns:p15="http://schemas.microsoft.com/office/powerpoint/2012/main" xmlns:ahyp="http://schemas.microsoft.com/office/drawing/2018/hyperlinkcolor">
+<p:sld xmlns:a="http://schemas.openxmlformats.org/drawingml/2006/main" xmlns:r="http://schemas.openxmlformats.org/officeDocument/2006/relationships" xmlns:p="http://schemas.openxmlformats.org/presentationml/2006/main">
   <p:cSld>
     <p:spTree>
       <p:nvGrpSpPr>
-        <p:cNvPr id="61" name="Shape 61"/>
+        <p:cNvPr id="1" name="Shape 61"/>
         <p:cNvGrpSpPr/>
         <p:nvPr/>
       </p:nvGrpSpPr>
@@ -7250,7 +7441,9 @@
       <p:sp>
         <p:nvSpPr>
           <p:cNvPr id="62" name="Google Shape;62;p13"/>
-          <p:cNvSpPr txBox="1"/>
+          <p:cNvSpPr txBox="1">
+            <a:spLocks noGrp="1"/>
+          </p:cNvSpPr>
           <p:nvPr>
             <p:ph type="ctrTitle"/>
           </p:nvPr>
@@ -7265,12 +7458,12 @@
           </a:prstGeom>
         </p:spPr>
         <p:txBody>
-          <a:bodyPr anchorCtr="0" anchor="b" bIns="91425" lIns="91425" spcFirstLastPara="1" rIns="91425" wrap="square" tIns="91425">
+          <a:bodyPr spcFirstLastPara="1" wrap="square" lIns="91425" tIns="91425" rIns="91425" bIns="91425" anchor="b" anchorCtr="0">
             <a:normAutofit/>
           </a:bodyPr>
           <a:lstStyle/>
           <a:p>
-            <a:pPr indent="0" lvl="0" marL="0" rtl="0" algn="ctr">
+            <a:pPr marL="0" lvl="0" indent="0" algn="ctr" rtl="0">
               <a:spcBef>
                 <a:spcPts val="0"/>
               </a:spcBef>
@@ -7290,9 +7483,11 @@
       <p:sp>
         <p:nvSpPr>
           <p:cNvPr id="63" name="Google Shape;63;p13"/>
-          <p:cNvSpPr txBox="1"/>
+          <p:cNvSpPr txBox="1">
+            <a:spLocks noGrp="1"/>
+          </p:cNvSpPr>
           <p:nvPr>
-            <p:ph idx="1" type="subTitle"/>
+            <p:ph type="subTitle" idx="1"/>
           </p:nvPr>
         </p:nvSpPr>
         <p:spPr>
@@ -7305,12 +7500,12 @@
           </a:prstGeom>
         </p:spPr>
         <p:txBody>
-          <a:bodyPr anchorCtr="0" anchor="t" bIns="91425" lIns="91425" spcFirstLastPara="1" rIns="91425" wrap="square" tIns="91425">
+          <a:bodyPr spcFirstLastPara="1" wrap="square" lIns="91425" tIns="91425" rIns="91425" bIns="91425" anchor="t" anchorCtr="0">
             <a:normAutofit/>
           </a:bodyPr>
           <a:lstStyle/>
           <a:p>
-            <a:pPr indent="0" lvl="0" marL="0" rtl="0" algn="ctr">
+            <a:pPr marL="0" lvl="0" indent="0" algn="ctr" rtl="0">
               <a:spcBef>
                 <a:spcPts val="0"/>
               </a:spcBef>
@@ -7336,11 +7531,11 @@
 </file>
 
 <file path=ppt/slides/slide10.xml><?xml version="1.0" encoding="utf-8"?>
-<p:sld xmlns:a="http://schemas.openxmlformats.org/drawingml/2006/main" xmlns:r="http://schemas.openxmlformats.org/officeDocument/2006/relationships" xmlns:mc="http://schemas.openxmlformats.org/markup-compatibility/2006" xmlns:mv="urn:schemas-microsoft-com:mac:vml" xmlns:p="http://schemas.openxmlformats.org/presentationml/2006/main" xmlns:c="http://schemas.openxmlformats.org/drawingml/2006/chart" xmlns:dgm="http://schemas.openxmlformats.org/drawingml/2006/diagram" xmlns:o="urn:schemas-microsoft-com:office:office" xmlns:v="urn:schemas-microsoft-com:vml" xmlns:pvml="urn:schemas-microsoft-com:office:powerpoint" xmlns:com="http://schemas.openxmlformats.org/drawingml/2006/compatibility" xmlns:p14="http://schemas.microsoft.com/office/powerpoint/2010/main" xmlns:p15="http://schemas.microsoft.com/office/powerpoint/2012/main" xmlns:ahyp="http://schemas.microsoft.com/office/drawing/2018/hyperlinkcolor">
+<p:sld xmlns:a="http://schemas.openxmlformats.org/drawingml/2006/main" xmlns:r="http://schemas.openxmlformats.org/officeDocument/2006/relationships" xmlns:p="http://schemas.openxmlformats.org/presentationml/2006/main">
   <p:cSld>
     <p:spTree>
       <p:nvGrpSpPr>
-        <p:cNvPr id="119" name="Shape 119"/>
+        <p:cNvPr id="1" name="Shape 119"/>
         <p:cNvGrpSpPr/>
         <p:nvPr/>
       </p:nvGrpSpPr>
@@ -7355,7 +7550,9 @@
       <p:sp>
         <p:nvSpPr>
           <p:cNvPr id="120" name="Google Shape;120;p22"/>
-          <p:cNvSpPr txBox="1"/>
+          <p:cNvSpPr txBox="1">
+            <a:spLocks noGrp="1"/>
+          </p:cNvSpPr>
           <p:nvPr>
             <p:ph type="title"/>
           </p:nvPr>
@@ -7370,12 +7567,12 @@
           </a:prstGeom>
         </p:spPr>
         <p:txBody>
-          <a:bodyPr anchorCtr="0" anchor="b" bIns="91425" lIns="91425" spcFirstLastPara="1" rIns="91425" wrap="square" tIns="91425">
+          <a:bodyPr spcFirstLastPara="1" wrap="square" lIns="91425" tIns="91425" rIns="91425" bIns="91425" anchor="b" anchorCtr="0">
             <a:normAutofit/>
           </a:bodyPr>
           <a:lstStyle/>
           <a:p>
-            <a:pPr indent="0" lvl="0" marL="0" rtl="0" algn="l">
+            <a:pPr marL="0" lvl="0" indent="0" algn="l" rtl="0">
               <a:spcBef>
                 <a:spcPts val="0"/>
               </a:spcBef>
@@ -7395,9 +7592,11 @@
       <p:sp>
         <p:nvSpPr>
           <p:cNvPr id="121" name="Google Shape;121;p22"/>
-          <p:cNvSpPr txBox="1"/>
+          <p:cNvSpPr txBox="1">
+            <a:spLocks noGrp="1"/>
+          </p:cNvSpPr>
           <p:nvPr>
-            <p:ph idx="1" type="body"/>
+            <p:ph type="body" idx="1"/>
           </p:nvPr>
         </p:nvSpPr>
         <p:spPr>
@@ -7410,12 +7609,12 @@
           </a:prstGeom>
         </p:spPr>
         <p:txBody>
-          <a:bodyPr anchorCtr="0" anchor="t" bIns="91425" lIns="91425" spcFirstLastPara="1" rIns="91425" wrap="square" tIns="91425">
-            <a:normAutofit lnSpcReduction="20000"/>
+          <a:bodyPr spcFirstLastPara="1" wrap="square" lIns="91425" tIns="91425" rIns="91425" bIns="91425" anchor="t" anchorCtr="0">
+            <a:normAutofit fontScale="92500" lnSpcReduction="20000"/>
           </a:bodyPr>
           <a:lstStyle/>
           <a:p>
-            <a:pPr indent="0" lvl="0" marL="0" rtl="0" algn="l">
+            <a:pPr marL="0" lvl="0" indent="0" algn="l" rtl="0">
               <a:spcBef>
                 <a:spcPts val="0"/>
               </a:spcBef>
@@ -7426,16 +7625,12 @@
             </a:pPr>
             <a:r>
               <a:rPr lang="en"/>
-              <a:t>Based on the</a:t>
-            </a:r>
-            <a:r>
-              <a:rPr lang="en"/>
-              <a:t> key’s the red line represents people who’s family income is low enough to qualify for the EITC while the blue line represents people who’s family income is too high. I would have expected the red line to increase as EITC exposure increases since extra income should have a positive impact on education. I would have expected the blue line to stay fairly stagnant as EITC increases since they did not receive the tax credit. </a:t>
+              <a:t>Based on the key’s the red line represents people who’s family income is low enough to qualify for the EITC while the blue line represents people who’s family income is too high. I would have expected the red line to increase as EITC exposure increases since extra income should have a positive impact on education. I would have expected the blue line to stay fairly stagnant as EITC increases since they did not receive the tax credit. </a:t>
             </a:r>
             <a:endParaRPr/>
           </a:p>
           <a:p>
-            <a:pPr indent="0" lvl="0" marL="0" rtl="0" algn="l">
+            <a:pPr marL="0" lvl="0" indent="0" algn="l" rtl="0">
               <a:spcBef>
                 <a:spcPts val="1200"/>
               </a:spcBef>
@@ -7466,11 +7661,11 @@
 </file>
 
 <file path=ppt/slides/slide11.xml><?xml version="1.0" encoding="utf-8"?>
-<p:sld xmlns:a="http://schemas.openxmlformats.org/drawingml/2006/main" xmlns:r="http://schemas.openxmlformats.org/officeDocument/2006/relationships" xmlns:mc="http://schemas.openxmlformats.org/markup-compatibility/2006" xmlns:mv="urn:schemas-microsoft-com:mac:vml" xmlns:p="http://schemas.openxmlformats.org/presentationml/2006/main" xmlns:c="http://schemas.openxmlformats.org/drawingml/2006/chart" xmlns:dgm="http://schemas.openxmlformats.org/drawingml/2006/diagram" xmlns:o="urn:schemas-microsoft-com:office:office" xmlns:v="urn:schemas-microsoft-com:vml" xmlns:pvml="urn:schemas-microsoft-com:office:powerpoint" xmlns:com="http://schemas.openxmlformats.org/drawingml/2006/compatibility" xmlns:p14="http://schemas.microsoft.com/office/powerpoint/2010/main" xmlns:p15="http://schemas.microsoft.com/office/powerpoint/2012/main" xmlns:ahyp="http://schemas.microsoft.com/office/drawing/2018/hyperlinkcolor">
+<p:sld xmlns:a="http://schemas.openxmlformats.org/drawingml/2006/main" xmlns:r="http://schemas.openxmlformats.org/officeDocument/2006/relationships" xmlns:p="http://schemas.openxmlformats.org/presentationml/2006/main">
   <p:cSld>
     <p:spTree>
       <p:nvGrpSpPr>
-        <p:cNvPr id="125" name="Shape 125"/>
+        <p:cNvPr id="1" name="Shape 125"/>
         <p:cNvGrpSpPr/>
         <p:nvPr/>
       </p:nvGrpSpPr>
@@ -7485,7 +7680,9 @@
       <p:sp>
         <p:nvSpPr>
           <p:cNvPr id="126" name="Google Shape;126;p23"/>
-          <p:cNvSpPr txBox="1"/>
+          <p:cNvSpPr txBox="1">
+            <a:spLocks noGrp="1"/>
+          </p:cNvSpPr>
           <p:nvPr>
             <p:ph type="title"/>
           </p:nvPr>
@@ -7500,12 +7697,12 @@
           </a:prstGeom>
         </p:spPr>
         <p:txBody>
-          <a:bodyPr anchorCtr="0" anchor="b" bIns="91425" lIns="91425" spcFirstLastPara="1" rIns="91425" wrap="square" tIns="91425">
+          <a:bodyPr spcFirstLastPara="1" wrap="square" lIns="91425" tIns="91425" rIns="91425" bIns="91425" anchor="b" anchorCtr="0">
             <a:normAutofit/>
           </a:bodyPr>
           <a:lstStyle/>
           <a:p>
-            <a:pPr indent="0" lvl="0" marL="0" rtl="0" algn="l">
+            <a:pPr marL="0" lvl="0" indent="0" algn="l" rtl="0">
               <a:spcBef>
                 <a:spcPts val="0"/>
               </a:spcBef>
@@ -7525,9 +7722,11 @@
       <p:sp>
         <p:nvSpPr>
           <p:cNvPr id="127" name="Google Shape;127;p23"/>
-          <p:cNvSpPr txBox="1"/>
+          <p:cNvSpPr txBox="1">
+            <a:spLocks noGrp="1"/>
+          </p:cNvSpPr>
           <p:nvPr>
-            <p:ph idx="1" type="body"/>
+            <p:ph type="body" idx="1"/>
           </p:nvPr>
         </p:nvSpPr>
         <p:spPr>
@@ -7540,12 +7739,12 @@
           </a:prstGeom>
         </p:spPr>
         <p:txBody>
-          <a:bodyPr anchorCtr="0" anchor="t" bIns="91425" lIns="91425" spcFirstLastPara="1" rIns="91425" wrap="square" tIns="91425">
+          <a:bodyPr spcFirstLastPara="1" wrap="square" lIns="91425" tIns="91425" rIns="91425" bIns="91425" anchor="t" anchorCtr="0">
             <a:normAutofit/>
           </a:bodyPr>
           <a:lstStyle/>
           <a:p>
-            <a:pPr indent="-457200" lvl="0" marL="457200" rtl="0" algn="l">
+            <a:pPr marL="457200" lvl="0" indent="-457200" algn="l" rtl="0">
               <a:spcBef>
                 <a:spcPts val="1200"/>
               </a:spcBef>
@@ -7586,7 +7785,7 @@
             </a:endParaRPr>
           </a:p>
           <a:p>
-            <a:pPr indent="-457200" lvl="0" marL="457200" rtl="0" algn="l">
+            <a:pPr marL="457200" lvl="0" indent="-457200" algn="l" rtl="0">
               <a:spcBef>
                 <a:spcPts val="1200"/>
               </a:spcBef>
@@ -7627,7 +7826,7 @@
             </a:endParaRPr>
           </a:p>
           <a:p>
-            <a:pPr indent="-457200" lvl="0" marL="457200" rtl="0" algn="l">
+            <a:pPr marL="457200" lvl="0" indent="-457200" algn="l" rtl="0">
               <a:spcBef>
                 <a:spcPts val="1200"/>
               </a:spcBef>
@@ -7673,11 +7872,11 @@
 </file>
 
 <file path=ppt/slides/slide2.xml><?xml version="1.0" encoding="utf-8"?>
-<p:sld xmlns:a="http://schemas.openxmlformats.org/drawingml/2006/main" xmlns:r="http://schemas.openxmlformats.org/officeDocument/2006/relationships" xmlns:mc="http://schemas.openxmlformats.org/markup-compatibility/2006" xmlns:mv="urn:schemas-microsoft-com:mac:vml" xmlns:p="http://schemas.openxmlformats.org/presentationml/2006/main" xmlns:c="http://schemas.openxmlformats.org/drawingml/2006/chart" xmlns:dgm="http://schemas.openxmlformats.org/drawingml/2006/diagram" xmlns:o="urn:schemas-microsoft-com:office:office" xmlns:v="urn:schemas-microsoft-com:vml" xmlns:pvml="urn:schemas-microsoft-com:office:powerpoint" xmlns:com="http://schemas.openxmlformats.org/drawingml/2006/compatibility" xmlns:p14="http://schemas.microsoft.com/office/powerpoint/2010/main" xmlns:p15="http://schemas.microsoft.com/office/powerpoint/2012/main" xmlns:ahyp="http://schemas.microsoft.com/office/drawing/2018/hyperlinkcolor">
+<p:sld xmlns:a="http://schemas.openxmlformats.org/drawingml/2006/main" xmlns:r="http://schemas.openxmlformats.org/officeDocument/2006/relationships" xmlns:p="http://schemas.openxmlformats.org/presentationml/2006/main">
   <p:cSld>
     <p:spTree>
       <p:nvGrpSpPr>
-        <p:cNvPr id="67" name="Shape 67"/>
+        <p:cNvPr id="1" name="Shape 67"/>
         <p:cNvGrpSpPr/>
         <p:nvPr/>
       </p:nvGrpSpPr>
@@ -7692,7 +7891,9 @@
       <p:sp>
         <p:nvSpPr>
           <p:cNvPr id="68" name="Google Shape;68;p14"/>
-          <p:cNvSpPr txBox="1"/>
+          <p:cNvSpPr txBox="1">
+            <a:spLocks noGrp="1"/>
+          </p:cNvSpPr>
           <p:nvPr>
             <p:ph type="title"/>
           </p:nvPr>
@@ -7707,12 +7908,12 @@
           </a:prstGeom>
         </p:spPr>
         <p:txBody>
-          <a:bodyPr anchorCtr="0" anchor="b" bIns="91425" lIns="91425" spcFirstLastPara="1" rIns="91425" wrap="square" tIns="91425">
+          <a:bodyPr spcFirstLastPara="1" wrap="square" lIns="91425" tIns="91425" rIns="91425" bIns="91425" anchor="b" anchorCtr="0">
             <a:normAutofit/>
           </a:bodyPr>
           <a:lstStyle/>
           <a:p>
-            <a:pPr indent="0" lvl="0" marL="0" rtl="0" algn="l">
+            <a:pPr marL="0" lvl="0" indent="0" algn="l" rtl="0">
               <a:spcBef>
                 <a:spcPts val="0"/>
               </a:spcBef>
@@ -7732,9 +7933,11 @@
       <p:sp>
         <p:nvSpPr>
           <p:cNvPr id="69" name="Google Shape;69;p14"/>
-          <p:cNvSpPr txBox="1"/>
+          <p:cNvSpPr txBox="1">
+            <a:spLocks noGrp="1"/>
+          </p:cNvSpPr>
           <p:nvPr>
-            <p:ph idx="1" type="body"/>
+            <p:ph type="body" idx="1"/>
           </p:nvPr>
         </p:nvSpPr>
         <p:spPr>
@@ -7747,12 +7950,12 @@
           </a:prstGeom>
         </p:spPr>
         <p:txBody>
-          <a:bodyPr anchorCtr="0" anchor="t" bIns="91425" lIns="91425" spcFirstLastPara="1" rIns="91425" wrap="square" tIns="91425">
-            <a:normAutofit lnSpcReduction="20000"/>
+          <a:bodyPr spcFirstLastPara="1" wrap="square" lIns="91425" tIns="91425" rIns="91425" bIns="91425" anchor="t" anchorCtr="0">
+            <a:normAutofit fontScale="92500"/>
           </a:bodyPr>
           <a:lstStyle/>
           <a:p>
-            <a:pPr indent="-342900" lvl="0" marL="457200" rtl="0" algn="l">
+            <a:pPr marL="457200" lvl="0" indent="-342900" algn="l" rtl="0">
               <a:spcBef>
                 <a:spcPts val="0"/>
               </a:spcBef>
@@ -7783,7 +7986,7 @@
             </a:endParaRPr>
           </a:p>
           <a:p>
-            <a:pPr indent="0" lvl="0" marL="457200" rtl="0" algn="l">
+            <a:pPr marL="457200" lvl="0" indent="0" algn="l" rtl="0">
               <a:spcBef>
                 <a:spcPts val="1200"/>
               </a:spcBef>
@@ -7797,9 +8000,6 @@
               <a:buFont typeface="Arial"/>
               <a:buNone/>
             </a:pPr>
-            <a:r>
-              <a:t/>
-            </a:r>
             <a:endParaRPr>
               <a:latin typeface="Average"/>
               <a:ea typeface="Average"/>
@@ -7808,7 +8008,7 @@
             </a:endParaRPr>
           </a:p>
           <a:p>
-            <a:pPr indent="-342900" lvl="0" marL="457200" rtl="0" algn="l">
+            <a:pPr marL="457200" lvl="0" indent="-342900" algn="l" rtl="0">
               <a:spcBef>
                 <a:spcPts val="1200"/>
               </a:spcBef>
@@ -7839,7 +8039,7 @@
             </a:endParaRPr>
           </a:p>
           <a:p>
-            <a:pPr indent="0" lvl="0" marL="457200" rtl="0" algn="l">
+            <a:pPr marL="457200" lvl="0" indent="0" algn="l" rtl="0">
               <a:spcBef>
                 <a:spcPts val="1200"/>
               </a:spcBef>
@@ -7853,9 +8053,6 @@
               <a:buFont typeface="Arial"/>
               <a:buNone/>
             </a:pPr>
-            <a:r>
-              <a:t/>
-            </a:r>
             <a:endParaRPr>
               <a:latin typeface="Average"/>
               <a:ea typeface="Average"/>
@@ -7864,7 +8061,7 @@
             </a:endParaRPr>
           </a:p>
           <a:p>
-            <a:pPr indent="-342900" lvl="0" marL="457200" rtl="0" algn="l">
+            <a:pPr marL="457200" lvl="0" indent="-342900" algn="l" rtl="0">
               <a:spcBef>
                 <a:spcPts val="1200"/>
               </a:spcBef>
@@ -7900,11 +8097,11 @@
 </file>
 
 <file path=ppt/slides/slide3.xml><?xml version="1.0" encoding="utf-8"?>
-<p:sld xmlns:a="http://schemas.openxmlformats.org/drawingml/2006/main" xmlns:r="http://schemas.openxmlformats.org/officeDocument/2006/relationships" xmlns:mc="http://schemas.openxmlformats.org/markup-compatibility/2006" xmlns:mv="urn:schemas-microsoft-com:mac:vml" xmlns:p="http://schemas.openxmlformats.org/presentationml/2006/main" xmlns:c="http://schemas.openxmlformats.org/drawingml/2006/chart" xmlns:dgm="http://schemas.openxmlformats.org/drawingml/2006/diagram" xmlns:o="urn:schemas-microsoft-com:office:office" xmlns:v="urn:schemas-microsoft-com:vml" xmlns:pvml="urn:schemas-microsoft-com:office:powerpoint" xmlns:com="http://schemas.openxmlformats.org/drawingml/2006/compatibility" xmlns:p14="http://schemas.microsoft.com/office/powerpoint/2010/main" xmlns:p15="http://schemas.microsoft.com/office/powerpoint/2012/main" xmlns:ahyp="http://schemas.microsoft.com/office/drawing/2018/hyperlinkcolor">
+<p:sld xmlns:a="http://schemas.openxmlformats.org/drawingml/2006/main" xmlns:r="http://schemas.openxmlformats.org/officeDocument/2006/relationships" xmlns:p="http://schemas.openxmlformats.org/presentationml/2006/main">
   <p:cSld>
     <p:spTree>
       <p:nvGrpSpPr>
-        <p:cNvPr id="73" name="Shape 73"/>
+        <p:cNvPr id="1" name="Shape 73"/>
         <p:cNvGrpSpPr/>
         <p:nvPr/>
       </p:nvGrpSpPr>
@@ -7919,7 +8116,9 @@
       <p:sp>
         <p:nvSpPr>
           <p:cNvPr id="74" name="Google Shape;74;p15"/>
-          <p:cNvSpPr txBox="1"/>
+          <p:cNvSpPr txBox="1">
+            <a:spLocks noGrp="1"/>
+          </p:cNvSpPr>
           <p:nvPr>
             <p:ph type="title"/>
           </p:nvPr>
@@ -7934,12 +8133,12 @@
           </a:prstGeom>
         </p:spPr>
         <p:txBody>
-          <a:bodyPr anchorCtr="0" anchor="b" bIns="91425" lIns="91425" spcFirstLastPara="1" rIns="91425" wrap="square" tIns="91425">
+          <a:bodyPr spcFirstLastPara="1" wrap="square" lIns="91425" tIns="91425" rIns="91425" bIns="91425" anchor="b" anchorCtr="0">
             <a:normAutofit/>
           </a:bodyPr>
           <a:lstStyle/>
           <a:p>
-            <a:pPr indent="0" lvl="0" marL="0" rtl="0" algn="l">
+            <a:pPr marL="0" lvl="0" indent="0" algn="l" rtl="0">
               <a:spcBef>
                 <a:spcPts val="0"/>
               </a:spcBef>
@@ -7959,9 +8158,11 @@
       <p:sp>
         <p:nvSpPr>
           <p:cNvPr id="75" name="Google Shape;75;p15"/>
-          <p:cNvSpPr txBox="1"/>
+          <p:cNvSpPr txBox="1">
+            <a:spLocks noGrp="1"/>
+          </p:cNvSpPr>
           <p:nvPr>
-            <p:ph idx="1" type="body"/>
+            <p:ph type="body" idx="1"/>
           </p:nvPr>
         </p:nvSpPr>
         <p:spPr>
@@ -7974,12 +8175,12 @@
           </a:prstGeom>
         </p:spPr>
         <p:txBody>
-          <a:bodyPr anchorCtr="0" anchor="t" bIns="91425" lIns="91425" spcFirstLastPara="1" rIns="91425" wrap="square" tIns="91425">
+          <a:bodyPr spcFirstLastPara="1" wrap="square" lIns="91425" tIns="91425" rIns="91425" bIns="91425" anchor="t" anchorCtr="0">
             <a:noAutofit/>
           </a:bodyPr>
           <a:lstStyle/>
           <a:p>
-            <a:pPr indent="-314960" lvl="0" marL="457200" rtl="0" algn="l">
+            <a:pPr marL="457200" lvl="0" indent="-314960" algn="l" rtl="0">
               <a:lnSpc>
                 <a:spcPct val="105000"/>
               </a:lnSpc>
@@ -8013,7 +8214,7 @@
             </a:endParaRPr>
           </a:p>
           <a:p>
-            <a:pPr indent="0" lvl="0" marL="457200" rtl="0" algn="l">
+            <a:pPr marL="457200" lvl="0" indent="0" algn="l" rtl="0">
               <a:lnSpc>
                 <a:spcPct val="105000"/>
               </a:lnSpc>
@@ -8026,9 +8227,6 @@
               <a:buSzPts val="770"/>
               <a:buNone/>
             </a:pPr>
-            <a:r>
-              <a:t/>
-            </a:r>
             <a:endParaRPr sz="905">
               <a:latin typeface="Average"/>
               <a:ea typeface="Average"/>
@@ -8037,7 +8235,7 @@
             </a:endParaRPr>
           </a:p>
           <a:p>
-            <a:pPr indent="-314960" lvl="0" marL="457200" rtl="0" algn="l">
+            <a:pPr marL="457200" lvl="0" indent="-314960" algn="l" rtl="0">
               <a:lnSpc>
                 <a:spcPct val="105000"/>
               </a:lnSpc>
@@ -8071,7 +8269,7 @@
             </a:endParaRPr>
           </a:p>
           <a:p>
-            <a:pPr indent="0" lvl="0" marL="457200" rtl="0" algn="l">
+            <a:pPr marL="457200" lvl="0" indent="0" algn="l" rtl="0">
               <a:lnSpc>
                 <a:spcPct val="105000"/>
               </a:lnSpc>
@@ -8084,9 +8282,6 @@
               <a:buSzPts val="770"/>
               <a:buNone/>
             </a:pPr>
-            <a:r>
-              <a:t/>
-            </a:r>
             <a:endParaRPr sz="905">
               <a:latin typeface="Average"/>
               <a:ea typeface="Average"/>
@@ -8095,7 +8290,7 @@
             </a:endParaRPr>
           </a:p>
           <a:p>
-            <a:pPr indent="-314960" lvl="0" marL="457200" rtl="0" algn="l">
+            <a:pPr marL="457200" lvl="0" indent="-314960" algn="l" rtl="0">
               <a:lnSpc>
                 <a:spcPct val="105000"/>
               </a:lnSpc>
@@ -8129,7 +8324,7 @@
             </a:endParaRPr>
           </a:p>
           <a:p>
-            <a:pPr indent="0" lvl="0" marL="457200" rtl="0" algn="l">
+            <a:pPr marL="457200" lvl="0" indent="0" algn="l" rtl="0">
               <a:lnSpc>
                 <a:spcPct val="105000"/>
               </a:lnSpc>
@@ -8142,9 +8337,6 @@
               <a:buSzPts val="770"/>
               <a:buNone/>
             </a:pPr>
-            <a:r>
-              <a:t/>
-            </a:r>
             <a:endParaRPr sz="905">
               <a:latin typeface="Average"/>
               <a:ea typeface="Average"/>
@@ -8153,7 +8345,7 @@
             </a:endParaRPr>
           </a:p>
           <a:p>
-            <a:pPr indent="-314960" lvl="0" marL="457200" rtl="0" algn="l">
+            <a:pPr marL="457200" lvl="0" indent="-314960" algn="l" rtl="0">
               <a:lnSpc>
                 <a:spcPct val="105000"/>
               </a:lnSpc>
@@ -8197,11 +8389,11 @@
 </file>
 
 <file path=ppt/slides/slide4.xml><?xml version="1.0" encoding="utf-8"?>
-<p:sld xmlns:a="http://schemas.openxmlformats.org/drawingml/2006/main" xmlns:r="http://schemas.openxmlformats.org/officeDocument/2006/relationships" xmlns:mc="http://schemas.openxmlformats.org/markup-compatibility/2006" xmlns:mv="urn:schemas-microsoft-com:mac:vml" xmlns:p="http://schemas.openxmlformats.org/presentationml/2006/main" xmlns:c="http://schemas.openxmlformats.org/drawingml/2006/chart" xmlns:dgm="http://schemas.openxmlformats.org/drawingml/2006/diagram" xmlns:o="urn:schemas-microsoft-com:office:office" xmlns:v="urn:schemas-microsoft-com:vml" xmlns:pvml="urn:schemas-microsoft-com:office:powerpoint" xmlns:com="http://schemas.openxmlformats.org/drawingml/2006/compatibility" xmlns:p14="http://schemas.microsoft.com/office/powerpoint/2010/main" xmlns:p15="http://schemas.microsoft.com/office/powerpoint/2012/main" xmlns:ahyp="http://schemas.microsoft.com/office/drawing/2018/hyperlinkcolor">
+<p:sld xmlns:a="http://schemas.openxmlformats.org/drawingml/2006/main" xmlns:r="http://schemas.openxmlformats.org/officeDocument/2006/relationships" xmlns:p="http://schemas.openxmlformats.org/presentationml/2006/main">
   <p:cSld>
     <p:spTree>
       <p:nvGrpSpPr>
-        <p:cNvPr id="79" name="Shape 79"/>
+        <p:cNvPr id="1" name="Shape 79"/>
         <p:cNvGrpSpPr/>
         <p:nvPr/>
       </p:nvGrpSpPr>
@@ -8216,7 +8408,9 @@
       <p:sp>
         <p:nvSpPr>
           <p:cNvPr id="80" name="Google Shape;80;p16"/>
-          <p:cNvSpPr txBox="1"/>
+          <p:cNvSpPr txBox="1">
+            <a:spLocks noGrp="1"/>
+          </p:cNvSpPr>
           <p:nvPr>
             <p:ph type="title"/>
           </p:nvPr>
@@ -8231,12 +8425,12 @@
           </a:prstGeom>
         </p:spPr>
         <p:txBody>
-          <a:bodyPr anchorCtr="0" anchor="b" bIns="91425" lIns="91425" spcFirstLastPara="1" rIns="91425" wrap="square" tIns="91425">
+          <a:bodyPr spcFirstLastPara="1" wrap="square" lIns="91425" tIns="91425" rIns="91425" bIns="91425" anchor="b" anchorCtr="0">
             <a:normAutofit/>
           </a:bodyPr>
           <a:lstStyle/>
           <a:p>
-            <a:pPr indent="0" lvl="0" marL="0" rtl="0" algn="l">
+            <a:pPr marL="0" lvl="0" indent="0" algn="l" rtl="0">
               <a:spcBef>
                 <a:spcPts val="0"/>
               </a:spcBef>
@@ -8256,9 +8450,11 @@
       <p:sp>
         <p:nvSpPr>
           <p:cNvPr id="81" name="Google Shape;81;p16"/>
-          <p:cNvSpPr txBox="1"/>
+          <p:cNvSpPr txBox="1">
+            <a:spLocks noGrp="1"/>
+          </p:cNvSpPr>
           <p:nvPr>
-            <p:ph idx="1" type="body"/>
+            <p:ph type="body" idx="1"/>
           </p:nvPr>
         </p:nvSpPr>
         <p:spPr>
@@ -8271,12 +8467,12 @@
           </a:prstGeom>
         </p:spPr>
         <p:txBody>
-          <a:bodyPr anchorCtr="0" anchor="t" bIns="91425" lIns="91425" spcFirstLastPara="1" rIns="91425" wrap="square" tIns="91425">
-            <a:normAutofit fontScale="77500" lnSpcReduction="20000"/>
+          <a:bodyPr spcFirstLastPara="1" wrap="square" lIns="91425" tIns="91425" rIns="91425" bIns="91425" anchor="t" anchorCtr="0">
+            <a:normAutofit fontScale="55000" lnSpcReduction="20000"/>
           </a:bodyPr>
           <a:lstStyle/>
           <a:p>
-            <a:pPr indent="0" lvl="0" marL="0" rtl="0" algn="l">
+            <a:pPr marL="0" lvl="0" indent="0" algn="l" rtl="0">
               <a:spcBef>
                 <a:spcPts val="0"/>
               </a:spcBef>
@@ -8286,13 +8482,13 @@
               <a:buNone/>
             </a:pPr>
             <a:r>
-              <a:rPr b="1" lang="en" sz="1900"/>
+              <a:rPr lang="en" sz="1900" b="1"/>
               <a:t>Independent Variables: 						</a:t>
             </a:r>
-            <a:endParaRPr b="1" sz="1900"/>
-          </a:p>
-          <a:p>
-            <a:pPr indent="0" lvl="0" marL="0" rtl="0" algn="l">
+            <a:endParaRPr sz="1900" b="1"/>
+          </a:p>
+          <a:p>
+            <a:pPr marL="0" lvl="0" indent="0" algn="l" rtl="0">
               <a:spcBef>
                 <a:spcPts val="1200"/>
               </a:spcBef>
@@ -8308,7 +8504,7 @@
             <a:endParaRPr sz="1747"/>
           </a:p>
           <a:p>
-            <a:pPr indent="0" lvl="0" marL="0" rtl="0" algn="l">
+            <a:pPr marL="0" lvl="0" indent="0" algn="l" rtl="0">
               <a:spcBef>
                 <a:spcPts val="1200"/>
               </a:spcBef>
@@ -8324,7 +8520,7 @@
             <a:endParaRPr sz="1747"/>
           </a:p>
           <a:p>
-            <a:pPr indent="0" lvl="0" marL="0" rtl="0" algn="l">
+            <a:pPr marL="0" lvl="0" indent="0" algn="l" rtl="0">
               <a:spcBef>
                 <a:spcPts val="1200"/>
               </a:spcBef>
@@ -8340,7 +8536,7 @@
             <a:endParaRPr sz="1747"/>
           </a:p>
           <a:p>
-            <a:pPr indent="0" lvl="0" marL="0" rtl="0" algn="l">
+            <a:pPr marL="0" lvl="0" indent="0" algn="l" rtl="0">
               <a:spcBef>
                 <a:spcPts val="1200"/>
               </a:spcBef>
@@ -8356,7 +8552,7 @@
             <a:endParaRPr sz="1747"/>
           </a:p>
           <a:p>
-            <a:pPr indent="0" lvl="0" marL="0" rtl="0" algn="l">
+            <a:pPr marL="0" lvl="0" indent="0" algn="l" rtl="0">
               <a:spcBef>
                 <a:spcPts val="1200"/>
               </a:spcBef>
@@ -8372,7 +8568,7 @@
             <a:endParaRPr sz="1747"/>
           </a:p>
           <a:p>
-            <a:pPr indent="0" lvl="0" marL="0" rtl="0" algn="l">
+            <a:pPr marL="0" lvl="0" indent="0" algn="l" rtl="0">
               <a:spcBef>
                 <a:spcPts val="1200"/>
               </a:spcBef>
@@ -8388,7 +8584,7 @@
             <a:endParaRPr sz="1747"/>
           </a:p>
           <a:p>
-            <a:pPr indent="0" lvl="0" marL="0" rtl="0" algn="l">
+            <a:pPr marL="0" lvl="0" indent="0" algn="l" rtl="0">
               <a:spcBef>
                 <a:spcPts val="1200"/>
               </a:spcBef>
@@ -8404,7 +8600,7 @@
             <a:endParaRPr sz="1747"/>
           </a:p>
           <a:p>
-            <a:pPr indent="0" lvl="0" marL="0" rtl="0" algn="l">
+            <a:pPr marL="0" lvl="0" indent="0" algn="l" rtl="0">
               <a:spcBef>
                 <a:spcPts val="1200"/>
               </a:spcBef>
@@ -8420,7 +8616,7 @@
             <a:endParaRPr sz="1747"/>
           </a:p>
           <a:p>
-            <a:pPr indent="0" lvl="0" marL="0" rtl="0" algn="l">
+            <a:pPr marL="0" lvl="0" indent="0" algn="l" rtl="0">
               <a:spcBef>
                 <a:spcPts val="1200"/>
               </a:spcBef>
@@ -8440,7 +8636,7 @@
             <a:endParaRPr sz="1200"/>
           </a:p>
           <a:p>
-            <a:pPr indent="0" lvl="0" marL="0" rtl="0" algn="l">
+            <a:pPr marL="0" lvl="0" indent="0" algn="l" rtl="0">
               <a:spcBef>
                 <a:spcPts val="1200"/>
               </a:spcBef>
@@ -8481,12 +8677,12 @@
           </a:ln>
         </p:spPr>
         <p:txBody>
-          <a:bodyPr anchorCtr="0" anchor="t" bIns="91425" lIns="91425" spcFirstLastPara="1" rIns="91425" wrap="square" tIns="91425">
+          <a:bodyPr spcFirstLastPara="1" wrap="square" lIns="91425" tIns="91425" rIns="91425" bIns="91425" anchor="t" anchorCtr="0">
             <a:noAutofit/>
           </a:bodyPr>
           <a:lstStyle/>
           <a:p>
-            <a:pPr indent="0" lvl="0" marL="0" rtl="0" algn="l">
+            <a:pPr marL="0" lvl="0" indent="0" algn="l" rtl="0">
               <a:lnSpc>
                 <a:spcPct val="115000"/>
               </a:lnSpc>
@@ -8499,7 +8695,7 @@
               <a:buNone/>
             </a:pPr>
             <a:r>
-              <a:rPr b="1" lang="en" sz="1900">
+              <a:rPr lang="en" sz="1900" b="1">
                 <a:solidFill>
                   <a:schemeClr val="dk1"/>
                 </a:solidFill>
@@ -8510,7 +8706,7 @@
               </a:rPr>
               <a:t>Dependent Variable: </a:t>
             </a:r>
-            <a:endParaRPr b="1" sz="1900">
+            <a:endParaRPr sz="1900" b="1">
               <a:solidFill>
                 <a:schemeClr val="dk1"/>
               </a:solidFill>
@@ -8521,7 +8717,7 @@
             </a:endParaRPr>
           </a:p>
           <a:p>
-            <a:pPr indent="0" lvl="0" marL="0" rtl="0" algn="l">
+            <a:pPr marL="0" lvl="0" indent="0" algn="l" rtl="0">
               <a:lnSpc>
                 <a:spcPct val="115000"/>
               </a:lnSpc>
@@ -8566,11 +8762,11 @@
 </file>
 
 <file path=ppt/slides/slide5.xml><?xml version="1.0" encoding="utf-8"?>
-<p:sld xmlns:a="http://schemas.openxmlformats.org/drawingml/2006/main" xmlns:r="http://schemas.openxmlformats.org/officeDocument/2006/relationships" xmlns:mc="http://schemas.openxmlformats.org/markup-compatibility/2006" xmlns:mv="urn:schemas-microsoft-com:mac:vml" xmlns:p="http://schemas.openxmlformats.org/presentationml/2006/main" xmlns:c="http://schemas.openxmlformats.org/drawingml/2006/chart" xmlns:dgm="http://schemas.openxmlformats.org/drawingml/2006/diagram" xmlns:o="urn:schemas-microsoft-com:office:office" xmlns:v="urn:schemas-microsoft-com:vml" xmlns:pvml="urn:schemas-microsoft-com:office:powerpoint" xmlns:com="http://schemas.openxmlformats.org/drawingml/2006/compatibility" xmlns:p14="http://schemas.microsoft.com/office/powerpoint/2010/main" xmlns:p15="http://schemas.microsoft.com/office/powerpoint/2012/main" xmlns:ahyp="http://schemas.microsoft.com/office/drawing/2018/hyperlinkcolor">
+<p:sld xmlns:a="http://schemas.openxmlformats.org/drawingml/2006/main" xmlns:r="http://schemas.openxmlformats.org/officeDocument/2006/relationships" xmlns:p="http://schemas.openxmlformats.org/presentationml/2006/main">
   <p:cSld>
     <p:spTree>
       <p:nvGrpSpPr>
-        <p:cNvPr id="86" name="Shape 86"/>
+        <p:cNvPr id="1" name="Shape 86"/>
         <p:cNvGrpSpPr/>
         <p:nvPr/>
       </p:nvGrpSpPr>
@@ -8585,7 +8781,9 @@
       <p:sp>
         <p:nvSpPr>
           <p:cNvPr id="87" name="Google Shape;87;p17"/>
-          <p:cNvSpPr txBox="1"/>
+          <p:cNvSpPr txBox="1">
+            <a:spLocks noGrp="1"/>
+          </p:cNvSpPr>
           <p:nvPr>
             <p:ph type="title"/>
           </p:nvPr>
@@ -8600,12 +8798,12 @@
           </a:prstGeom>
         </p:spPr>
         <p:txBody>
-          <a:bodyPr anchorCtr="0" anchor="b" bIns="91425" lIns="91425" spcFirstLastPara="1" rIns="91425" wrap="square" tIns="91425">
+          <a:bodyPr spcFirstLastPara="1" wrap="square" lIns="91425" tIns="91425" rIns="91425" bIns="91425" anchor="b" anchorCtr="0">
             <a:normAutofit/>
           </a:bodyPr>
           <a:lstStyle/>
           <a:p>
-            <a:pPr indent="0" lvl="0" marL="0" rtl="0" algn="l">
+            <a:pPr marL="0" lvl="0" indent="0" algn="l" rtl="0">
               <a:spcBef>
                 <a:spcPts val="0"/>
               </a:spcBef>
@@ -8625,9 +8823,11 @@
       <p:sp>
         <p:nvSpPr>
           <p:cNvPr id="88" name="Google Shape;88;p17"/>
-          <p:cNvSpPr txBox="1"/>
+          <p:cNvSpPr txBox="1">
+            <a:spLocks noGrp="1"/>
+          </p:cNvSpPr>
           <p:nvPr>
-            <p:ph idx="1" type="body"/>
+            <p:ph type="body" idx="1"/>
           </p:nvPr>
         </p:nvSpPr>
         <p:spPr>
@@ -8640,12 +8840,12 @@
           </a:prstGeom>
         </p:spPr>
         <p:txBody>
-          <a:bodyPr anchorCtr="0" anchor="t" bIns="91425" lIns="91425" spcFirstLastPara="1" rIns="91425" wrap="square" tIns="91425">
-            <a:normAutofit lnSpcReduction="20000"/>
+          <a:bodyPr spcFirstLastPara="1" wrap="square" lIns="91425" tIns="91425" rIns="91425" bIns="91425" anchor="t" anchorCtr="0">
+            <a:normAutofit fontScale="92500"/>
           </a:bodyPr>
           <a:lstStyle/>
           <a:p>
-            <a:pPr indent="0" lvl="0" marL="0" rtl="0" algn="l">
+            <a:pPr marL="0" lvl="0" indent="0" algn="l" rtl="0">
               <a:spcBef>
                 <a:spcPts val="0"/>
               </a:spcBef>
@@ -8661,7 +8861,7 @@
             <a:endParaRPr/>
           </a:p>
           <a:p>
-            <a:pPr indent="-342900" lvl="0" marL="457200" rtl="0" algn="l">
+            <a:pPr marL="457200" lvl="0" indent="-342900" algn="l" rtl="0">
               <a:spcBef>
                 <a:spcPts val="1200"/>
               </a:spcBef>
@@ -8673,16 +8873,12 @@
             </a:pPr>
             <a:r>
               <a:rPr lang="en"/>
-              <a:t>The PSID uses variable names </a:t>
-            </a:r>
-            <a:r>
-              <a:rPr lang="en"/>
-              <a:t>that without access to the codebook are incomprehensible (Ex. ER3002) and the provided labels are inconsistent. I wanted to be able to match the original variable to a consistent label without having to manually change the variable name within my code. </a:t>
+              <a:t>The PSID uses variable names that without access to the codebook are incomprehensible (Ex. ER3002) and the provided labels are inconsistent. I wanted to be able to match the original variable to a consistent label without having to manually change the variable name within my code. </a:t>
             </a:r>
             <a:endParaRPr/>
           </a:p>
           <a:p>
-            <a:pPr indent="0" lvl="0" marL="0" rtl="0" algn="l">
+            <a:pPr marL="0" lvl="0" indent="0" algn="l" rtl="0">
               <a:spcBef>
                 <a:spcPts val="1200"/>
               </a:spcBef>
@@ -8698,7 +8894,7 @@
             <a:endParaRPr/>
           </a:p>
           <a:p>
-            <a:pPr indent="-342900" lvl="0" marL="457200" rtl="0" algn="l">
+            <a:pPr marL="457200" lvl="0" indent="-342900" algn="l" rtl="0">
               <a:spcBef>
                 <a:spcPts val="1200"/>
               </a:spcBef>
@@ -8725,11 +8921,11 @@
 </file>
 
 <file path=ppt/slides/slide6.xml><?xml version="1.0" encoding="utf-8"?>
-<p:sld xmlns:a="http://schemas.openxmlformats.org/drawingml/2006/main" xmlns:r="http://schemas.openxmlformats.org/officeDocument/2006/relationships" xmlns:mc="http://schemas.openxmlformats.org/markup-compatibility/2006" xmlns:mv="urn:schemas-microsoft-com:mac:vml" xmlns:p="http://schemas.openxmlformats.org/presentationml/2006/main" xmlns:c="http://schemas.openxmlformats.org/drawingml/2006/chart" xmlns:dgm="http://schemas.openxmlformats.org/drawingml/2006/diagram" xmlns:o="urn:schemas-microsoft-com:office:office" xmlns:v="urn:schemas-microsoft-com:vml" xmlns:pvml="urn:schemas-microsoft-com:office:powerpoint" xmlns:com="http://schemas.openxmlformats.org/drawingml/2006/compatibility" xmlns:p14="http://schemas.microsoft.com/office/powerpoint/2010/main" xmlns:p15="http://schemas.microsoft.com/office/powerpoint/2012/main" xmlns:ahyp="http://schemas.microsoft.com/office/drawing/2018/hyperlinkcolor">
+<p:sld xmlns:a="http://schemas.openxmlformats.org/drawingml/2006/main" xmlns:r="http://schemas.openxmlformats.org/officeDocument/2006/relationships" xmlns:p="http://schemas.openxmlformats.org/presentationml/2006/main">
   <p:cSld>
     <p:spTree>
       <p:nvGrpSpPr>
-        <p:cNvPr id="92" name="Shape 92"/>
+        <p:cNvPr id="1" name="Shape 92"/>
         <p:cNvGrpSpPr/>
         <p:nvPr/>
       </p:nvGrpSpPr>
@@ -8744,7 +8940,9 @@
       <p:sp>
         <p:nvSpPr>
           <p:cNvPr id="93" name="Google Shape;93;p18"/>
-          <p:cNvSpPr txBox="1"/>
+          <p:cNvSpPr txBox="1">
+            <a:spLocks noGrp="1"/>
+          </p:cNvSpPr>
           <p:nvPr>
             <p:ph type="title"/>
           </p:nvPr>
@@ -8759,12 +8957,12 @@
           </a:prstGeom>
         </p:spPr>
         <p:txBody>
-          <a:bodyPr anchorCtr="0" anchor="b" bIns="91425" lIns="91425" spcFirstLastPara="1" rIns="91425" wrap="square" tIns="91425">
+          <a:bodyPr spcFirstLastPara="1" wrap="square" lIns="91425" tIns="91425" rIns="91425" bIns="91425" anchor="b" anchorCtr="0">
             <a:normAutofit/>
           </a:bodyPr>
           <a:lstStyle/>
           <a:p>
-            <a:pPr indent="0" lvl="0" marL="0" rtl="0" algn="l">
+            <a:pPr marL="0" lvl="0" indent="0" algn="l" rtl="0">
               <a:spcBef>
                 <a:spcPts val="0"/>
               </a:spcBef>
@@ -8784,9 +8982,11 @@
       <p:sp>
         <p:nvSpPr>
           <p:cNvPr id="94" name="Google Shape;94;p18"/>
-          <p:cNvSpPr txBox="1"/>
+          <p:cNvSpPr txBox="1">
+            <a:spLocks noGrp="1"/>
+          </p:cNvSpPr>
           <p:nvPr>
-            <p:ph idx="1" type="body"/>
+            <p:ph type="body" idx="1"/>
           </p:nvPr>
         </p:nvSpPr>
         <p:spPr>
@@ -8799,12 +8999,12 @@
           </a:prstGeom>
         </p:spPr>
         <p:txBody>
-          <a:bodyPr anchorCtr="0" anchor="t" bIns="91425" lIns="91425" spcFirstLastPara="1" rIns="91425" wrap="square" tIns="91425">
-            <a:normAutofit/>
+          <a:bodyPr spcFirstLastPara="1" wrap="square" lIns="91425" tIns="91425" rIns="91425" bIns="91425" anchor="t" anchorCtr="0">
+            <a:normAutofit lnSpcReduction="10000"/>
           </a:bodyPr>
           <a:lstStyle/>
           <a:p>
-            <a:pPr indent="0" lvl="0" marL="0" rtl="0" algn="l">
+            <a:pPr marL="0" lvl="0" indent="0" algn="l" rtl="0">
               <a:spcBef>
                 <a:spcPts val="0"/>
               </a:spcBef>
@@ -8815,23 +9015,7 @@
             </a:pPr>
             <a:r>
               <a:rPr lang="en"/>
-              <a:t>Each of my regressions were able to explain about 10% of the variation in education rates. For a multifaceted problem like “How do we encourage education success” this is a satisfactory result yet still </a:t>
-            </a:r>
-            <a:r>
-              <a:rPr lang="en"/>
-              <a:t>a serious limitation. Due to this limitation my regressions found that the Earned Income Tax Credit had a negative impact on education success at all levels (High School completion, college attendance and Bachelors completion). It is important to mention that based on my correlation matrix, which found that the EITC was positively correlated with education success, I can conclude this result is most likely due to missing variable bias. This means that if</a:t>
-            </a:r>
-            <a:r>
-              <a:rPr lang="en"/>
-              <a:t> </a:t>
-            </a:r>
-            <a:r>
-              <a:rPr lang="en"/>
-              <a:t>the important missing variables are found and controlled for then this</a:t>
-            </a:r>
-            <a:r>
-              <a:rPr lang="en"/>
-              <a:t> limitation could be overcome.</a:t>
+              <a:t>Each of my regressions were able to explain about 10% of the variation in education rates. For a multifaceted problem like “How do we encourage education success” this is a satisfactory result yet still a serious limitation. Due to this limitation my regressions found that the Earned Income Tax Credit had a negative impact on education success at all levels (High School completion, college attendance and Bachelors completion). It is important to mention that based on my correlation matrix, which found that the EITC was positively correlated with education success, I can conclude this result is most likely due to missing variable bias. This means that if the important missing variables are found and controlled for then this limitation could be overcome.</a:t>
             </a:r>
             <a:endParaRPr/>
           </a:p>
@@ -8846,11 +9030,11 @@
 </file>
 
 <file path=ppt/slides/slide7.xml><?xml version="1.0" encoding="utf-8"?>
-<p:sld xmlns:a="http://schemas.openxmlformats.org/drawingml/2006/main" xmlns:r="http://schemas.openxmlformats.org/officeDocument/2006/relationships" xmlns:mc="http://schemas.openxmlformats.org/markup-compatibility/2006" xmlns:mv="urn:schemas-microsoft-com:mac:vml" xmlns:p="http://schemas.openxmlformats.org/presentationml/2006/main" xmlns:c="http://schemas.openxmlformats.org/drawingml/2006/chart" xmlns:dgm="http://schemas.openxmlformats.org/drawingml/2006/diagram" xmlns:o="urn:schemas-microsoft-com:office:office" xmlns:v="urn:schemas-microsoft-com:vml" xmlns:pvml="urn:schemas-microsoft-com:office:powerpoint" xmlns:com="http://schemas.openxmlformats.org/drawingml/2006/compatibility" xmlns:p14="http://schemas.microsoft.com/office/powerpoint/2010/main" xmlns:p15="http://schemas.microsoft.com/office/powerpoint/2012/main" xmlns:ahyp="http://schemas.microsoft.com/office/drawing/2018/hyperlinkcolor">
+<p:sld xmlns:a="http://schemas.openxmlformats.org/drawingml/2006/main" xmlns:r="http://schemas.openxmlformats.org/officeDocument/2006/relationships" xmlns:p="http://schemas.openxmlformats.org/presentationml/2006/main">
   <p:cSld>
     <p:spTree>
       <p:nvGrpSpPr>
-        <p:cNvPr id="98" name="Shape 98"/>
+        <p:cNvPr id="1" name="Shape 98"/>
         <p:cNvGrpSpPr/>
         <p:nvPr/>
       </p:nvGrpSpPr>
@@ -8865,7 +9049,9 @@
       <p:sp>
         <p:nvSpPr>
           <p:cNvPr id="99" name="Google Shape;99;p19"/>
-          <p:cNvSpPr txBox="1"/>
+          <p:cNvSpPr txBox="1">
+            <a:spLocks noGrp="1"/>
+          </p:cNvSpPr>
           <p:nvPr>
             <p:ph type="title"/>
           </p:nvPr>
@@ -8880,12 +9066,12 @@
           </a:prstGeom>
         </p:spPr>
         <p:txBody>
-          <a:bodyPr anchorCtr="0" anchor="b" bIns="91425" lIns="91425" spcFirstLastPara="1" rIns="91425" wrap="square" tIns="91425">
+          <a:bodyPr spcFirstLastPara="1" wrap="square" lIns="91425" tIns="91425" rIns="91425" bIns="91425" anchor="b" anchorCtr="0">
             <a:normAutofit/>
           </a:bodyPr>
           <a:lstStyle/>
           <a:p>
-            <a:pPr indent="0" lvl="0" marL="0" rtl="0" algn="l">
+            <a:pPr marL="0" lvl="0" indent="0" algn="l" rtl="0">
               <a:spcBef>
                 <a:spcPts val="0"/>
               </a:spcBef>
@@ -8905,9 +9091,11 @@
       <p:sp>
         <p:nvSpPr>
           <p:cNvPr id="100" name="Google Shape;100;p19"/>
-          <p:cNvSpPr txBox="1"/>
+          <p:cNvSpPr txBox="1">
+            <a:spLocks noGrp="1"/>
+          </p:cNvSpPr>
           <p:nvPr>
-            <p:ph idx="1" type="body"/>
+            <p:ph type="body" idx="1"/>
           </p:nvPr>
         </p:nvSpPr>
         <p:spPr>
@@ -8920,12 +9108,12 @@
           </a:prstGeom>
         </p:spPr>
         <p:txBody>
-          <a:bodyPr anchorCtr="0" anchor="t" bIns="91425" lIns="91425" spcFirstLastPara="1" rIns="91425" wrap="square" tIns="91425">
+          <a:bodyPr spcFirstLastPara="1" wrap="square" lIns="91425" tIns="91425" rIns="91425" bIns="91425" anchor="t" anchorCtr="0">
             <a:normAutofit fontScale="25000" lnSpcReduction="20000"/>
           </a:bodyPr>
           <a:lstStyle/>
           <a:p>
-            <a:pPr indent="-336550" lvl="0" marL="457200" rtl="0" algn="l">
+            <a:pPr marL="457200" lvl="0" indent="-336550" algn="l" rtl="0">
               <a:spcBef>
                 <a:spcPts val="0"/>
               </a:spcBef>
@@ -8936,21 +9124,13 @@
               <a:buChar char="●"/>
             </a:pPr>
             <a:r>
-              <a:rPr lang="en" sz="6800"/>
-              <a:t>The group that could not </a:t>
+              <a:rPr lang="en" sz="6800" dirty="0"/>
+              <a:t>The group that could not receive EITC is operating as expected. There’s a general trend where around 85% of people complete high school regardless of EITC. </a:t>
             </a:r>
-            <a:r>
-              <a:rPr lang="en" sz="6800"/>
-              <a:t>receive EITC </a:t>
-            </a:r>
-            <a:r>
-              <a:rPr lang="en" sz="6800"/>
-              <a:t>is operating as expected. There’s a general trend where around 85% of people complete high school regardless of EITC. </a:t>
-            </a:r>
-            <a:endParaRPr sz="6800"/>
-          </a:p>
-          <a:p>
-            <a:pPr indent="-336550" lvl="0" marL="457200" rtl="0" algn="l">
+            <a:endParaRPr sz="6800" dirty="0"/>
+          </a:p>
+          <a:p>
+            <a:pPr marL="457200" lvl="0" indent="-336550" algn="l" rtl="0">
               <a:spcBef>
                 <a:spcPts val="0"/>
               </a:spcBef>
@@ -8961,21 +9141,17 @@
               <a:buChar char="●"/>
             </a:pPr>
             <a:r>
-              <a:rPr lang="en" sz="6800"/>
-              <a:t>The group that could </a:t>
+              <a:rPr lang="en" sz="6800" dirty="0"/>
+              <a:t>The group that could receive EITC is not operating as expected. </a:t>
             </a:r>
             <a:r>
-              <a:rPr lang="en" sz="6800"/>
-              <a:t>receive</a:t>
+              <a:rPr lang="en-US" sz="6800" dirty="0"/>
+              <a:t>It seems to stay rather constant around a 80% High school completion rate except at the $1750 bin.</a:t>
             </a:r>
-            <a:r>
-              <a:rPr lang="en" sz="6800"/>
-              <a:t> EITC is not operating as expected. We expected there to be a positive relationship but after $3,250 of EITC exposure there seems to be a negative relationship</a:t>
-            </a:r>
-            <a:endParaRPr sz="6800"/>
-          </a:p>
-          <a:p>
-            <a:pPr indent="0" lvl="0" marL="0" rtl="0" algn="l">
+            <a:endParaRPr sz="6800" dirty="0"/>
+          </a:p>
+          <a:p>
+            <a:pPr marL="0" lvl="0" indent="0" algn="l" rtl="0">
               <a:spcBef>
                 <a:spcPts val="1200"/>
               </a:spcBef>
@@ -8984,13 +9160,10 @@
               </a:spcAft>
               <a:buNone/>
             </a:pPr>
-            <a:r>
-              <a:t/>
-            </a:r>
-            <a:endParaRPr/>
-          </a:p>
-          <a:p>
-            <a:pPr indent="0" lvl="0" marL="0" rtl="0" algn="l">
+            <a:endParaRPr dirty="0"/>
+          </a:p>
+          <a:p>
+            <a:pPr marL="0" lvl="0" indent="0" algn="l" rtl="0">
               <a:spcBef>
                 <a:spcPts val="1200"/>
               </a:spcBef>
@@ -8999,39 +9172,55 @@
               </a:spcAft>
               <a:buNone/>
             </a:pPr>
-            <a:r>
-              <a:t/>
-            </a:r>
-            <a:endParaRPr/>
+            <a:endParaRPr dirty="0"/>
           </a:p>
         </p:txBody>
       </p:sp>
       <p:pic>
         <p:nvPicPr>
-          <p:cNvPr id="101" name="Google Shape;101;p19" title="HS_Completion_Plot.png"/>
-          <p:cNvPicPr preferRelativeResize="0"/>
+          <p:cNvPr id="1026" name="Picture 2">
+            <a:extLst>
+              <a:ext uri="{FF2B5EF4-FFF2-40B4-BE49-F238E27FC236}">
+                <a16:creationId xmlns:a16="http://schemas.microsoft.com/office/drawing/2014/main" id="{357D1370-AC1C-9EDE-54BC-958ED839E9D1}"/>
+              </a:ext>
+            </a:extLst>
+          </p:cNvPr>
+          <p:cNvPicPr>
+            <a:picLocks noChangeAspect="1" noChangeArrowheads="1"/>
+          </p:cNvPicPr>
           <p:nvPr/>
         </p:nvPicPr>
         <p:blipFill>
           <a:blip r:embed="rId3">
-            <a:alphaModFix/>
+            <a:extLst>
+              <a:ext uri="{28A0092B-C50C-407E-A947-70E740481C1C}">
+                <a14:useLocalDpi xmlns:a14="http://schemas.microsoft.com/office/drawing/2010/main" val="0"/>
+              </a:ext>
+            </a:extLst>
           </a:blip>
+          <a:srcRect/>
           <a:stretch>
             <a:fillRect/>
           </a:stretch>
         </p:blipFill>
-        <p:spPr>
+        <p:spPr bwMode="auto">
           <a:xfrm>
-            <a:off x="4173433" y="1225225"/>
-            <a:ext cx="4843366" cy="3632525"/>
+            <a:off x="4010891" y="1155475"/>
+            <a:ext cx="5029200" cy="3771900"/>
           </a:xfrm>
           <a:prstGeom prst="rect">
             <a:avLst/>
           </a:prstGeom>
           <a:noFill/>
-          <a:ln>
-            <a:noFill/>
-          </a:ln>
+          <a:extLst>
+            <a:ext uri="{909E8E84-426E-40DD-AFC4-6F175D3DCCD1}">
+              <a14:hiddenFill xmlns:a14="http://schemas.microsoft.com/office/drawing/2010/main">
+                <a:solidFill>
+                  <a:srgbClr val="FFFFFF"/>
+                </a:solidFill>
+              </a14:hiddenFill>
+            </a:ext>
+          </a:extLst>
         </p:spPr>
       </p:pic>
     </p:spTree>
@@ -9043,11 +9232,11 @@
 </file>
 
 <file path=ppt/slides/slide8.xml><?xml version="1.0" encoding="utf-8"?>
-<p:sld xmlns:a="http://schemas.openxmlformats.org/drawingml/2006/main" xmlns:r="http://schemas.openxmlformats.org/officeDocument/2006/relationships" xmlns:mc="http://schemas.openxmlformats.org/markup-compatibility/2006" xmlns:mv="urn:schemas-microsoft-com:mac:vml" xmlns:p="http://schemas.openxmlformats.org/presentationml/2006/main" xmlns:c="http://schemas.openxmlformats.org/drawingml/2006/chart" xmlns:dgm="http://schemas.openxmlformats.org/drawingml/2006/diagram" xmlns:o="urn:schemas-microsoft-com:office:office" xmlns:v="urn:schemas-microsoft-com:vml" xmlns:pvml="urn:schemas-microsoft-com:office:powerpoint" xmlns:com="http://schemas.openxmlformats.org/drawingml/2006/compatibility" xmlns:p14="http://schemas.microsoft.com/office/powerpoint/2010/main" xmlns:p15="http://schemas.microsoft.com/office/powerpoint/2012/main" xmlns:ahyp="http://schemas.microsoft.com/office/drawing/2018/hyperlinkcolor">
+<p:sld xmlns:a="http://schemas.openxmlformats.org/drawingml/2006/main" xmlns:r="http://schemas.openxmlformats.org/officeDocument/2006/relationships" xmlns:p="http://schemas.openxmlformats.org/presentationml/2006/main">
   <p:cSld>
     <p:spTree>
       <p:nvGrpSpPr>
-        <p:cNvPr id="105" name="Shape 105"/>
+        <p:cNvPr id="1" name="Shape 105"/>
         <p:cNvGrpSpPr/>
         <p:nvPr/>
       </p:nvGrpSpPr>
@@ -9062,7 +9251,9 @@
       <p:sp>
         <p:nvSpPr>
           <p:cNvPr id="106" name="Google Shape;106;p20"/>
-          <p:cNvSpPr txBox="1"/>
+          <p:cNvSpPr txBox="1">
+            <a:spLocks noGrp="1"/>
+          </p:cNvSpPr>
           <p:nvPr>
             <p:ph type="title"/>
           </p:nvPr>
@@ -9077,12 +9268,12 @@
           </a:prstGeom>
         </p:spPr>
         <p:txBody>
-          <a:bodyPr anchorCtr="0" anchor="b" bIns="91425" lIns="91425" spcFirstLastPara="1" rIns="91425" wrap="square" tIns="91425">
+          <a:bodyPr spcFirstLastPara="1" wrap="square" lIns="91425" tIns="91425" rIns="91425" bIns="91425" anchor="b" anchorCtr="0">
             <a:normAutofit/>
           </a:bodyPr>
           <a:lstStyle/>
           <a:p>
-            <a:pPr indent="0" lvl="0" marL="0" rtl="0" algn="l">
+            <a:pPr marL="0" lvl="0" indent="0" algn="l" rtl="0">
               <a:spcBef>
                 <a:spcPts val="0"/>
               </a:spcBef>
@@ -9107,9 +9298,11 @@
       <p:sp>
         <p:nvSpPr>
           <p:cNvPr id="107" name="Google Shape;107;p20"/>
-          <p:cNvSpPr txBox="1"/>
+          <p:cNvSpPr txBox="1">
+            <a:spLocks noGrp="1"/>
+          </p:cNvSpPr>
           <p:nvPr>
-            <p:ph idx="1" type="body"/>
+            <p:ph type="body" idx="1"/>
           </p:nvPr>
         </p:nvSpPr>
         <p:spPr>
@@ -9122,12 +9315,12 @@
           </a:prstGeom>
         </p:spPr>
         <p:txBody>
-          <a:bodyPr anchorCtr="0" anchor="t" bIns="91425" lIns="91425" spcFirstLastPara="1" rIns="91425" wrap="square" tIns="91425">
-            <a:normAutofit fontScale="25000" lnSpcReduction="10000"/>
+          <a:bodyPr spcFirstLastPara="1" wrap="square" lIns="91425" tIns="91425" rIns="91425" bIns="91425" anchor="t" anchorCtr="0">
+            <a:normAutofit fontScale="25000" lnSpcReduction="20000"/>
           </a:bodyPr>
           <a:lstStyle/>
           <a:p>
-            <a:pPr indent="-336550" lvl="0" marL="457200" rtl="0" algn="l">
+            <a:pPr marL="457200" lvl="0" indent="-336550" algn="l" rtl="0">
               <a:spcBef>
                 <a:spcPts val="0"/>
               </a:spcBef>
@@ -9138,13 +9331,13 @@
               <a:buChar char="●"/>
             </a:pPr>
             <a:r>
-              <a:rPr lang="en" sz="6800"/>
+              <a:rPr lang="en" sz="6800" dirty="0"/>
               <a:t>The group that could not receive EITC seems to have a slight positive slope indicating that EITC has a positive impact on college attendance. This is unexpected since they could not receive it.</a:t>
             </a:r>
-            <a:endParaRPr sz="6800"/>
-          </a:p>
-          <a:p>
-            <a:pPr indent="-336550" lvl="0" marL="457200" rtl="0" algn="l">
+            <a:endParaRPr sz="6800" dirty="0"/>
+          </a:p>
+          <a:p>
+            <a:pPr marL="457200" lvl="0" indent="-336550" algn="l" rtl="0">
               <a:spcBef>
                 <a:spcPts val="0"/>
               </a:spcBef>
@@ -9155,39 +9348,66 @@
               <a:buChar char="●"/>
             </a:pPr>
             <a:r>
-              <a:rPr lang="en" sz="6800"/>
-              <a:t>The group that could receive EITC followed the expected trend until $3,250 of EITC Exposure where once again the trend reversed.</a:t>
+              <a:rPr lang="en" sz="6800" dirty="0"/>
+              <a:t>The group that could receive EITC had a either flat or somew</a:t>
             </a:r>
-            <a:endParaRPr/>
+            <a:r>
+              <a:rPr lang="en-US" sz="6800" dirty="0"/>
+              <a:t>ha</a:t>
+            </a:r>
+            <a:r>
+              <a:rPr lang="en" sz="6800" dirty="0"/>
+              <a:t>t downward trending slope</a:t>
+            </a:r>
+            <a:endParaRPr dirty="0"/>
           </a:p>
         </p:txBody>
       </p:sp>
       <p:pic>
         <p:nvPicPr>
-          <p:cNvPr id="108" name="Google Shape;108;p20" title="College_Attendance_Plot.png"/>
-          <p:cNvPicPr preferRelativeResize="0"/>
+          <p:cNvPr id="3074" name="Picture 2">
+            <a:extLst>
+              <a:ext uri="{FF2B5EF4-FFF2-40B4-BE49-F238E27FC236}">
+                <a16:creationId xmlns:a16="http://schemas.microsoft.com/office/drawing/2014/main" id="{B736802A-0359-9F61-72EF-3BEB4E63454B}"/>
+              </a:ext>
+            </a:extLst>
+          </p:cNvPr>
+          <p:cNvPicPr>
+            <a:picLocks noChangeAspect="1" noChangeArrowheads="1"/>
+          </p:cNvPicPr>
           <p:nvPr/>
         </p:nvPicPr>
         <p:blipFill>
           <a:blip r:embed="rId3">
-            <a:alphaModFix/>
+            <a:extLst>
+              <a:ext uri="{28A0092B-C50C-407E-A947-70E740481C1C}">
+                <a14:useLocalDpi xmlns:a14="http://schemas.microsoft.com/office/drawing/2010/main" val="0"/>
+              </a:ext>
+            </a:extLst>
           </a:blip>
+          <a:srcRect/>
           <a:stretch>
             <a:fillRect/>
           </a:stretch>
         </p:blipFill>
-        <p:spPr>
+        <p:spPr bwMode="auto">
           <a:xfrm>
-            <a:off x="4118400" y="1147225"/>
-            <a:ext cx="4912800" cy="3684600"/>
+            <a:off x="4114800" y="1094125"/>
+            <a:ext cx="5029200" cy="3771900"/>
           </a:xfrm>
           <a:prstGeom prst="rect">
             <a:avLst/>
           </a:prstGeom>
           <a:noFill/>
-          <a:ln>
-            <a:noFill/>
-          </a:ln>
+          <a:extLst>
+            <a:ext uri="{909E8E84-426E-40DD-AFC4-6F175D3DCCD1}">
+              <a14:hiddenFill xmlns:a14="http://schemas.microsoft.com/office/drawing/2010/main">
+                <a:solidFill>
+                  <a:srgbClr val="FFFFFF"/>
+                </a:solidFill>
+              </a14:hiddenFill>
+            </a:ext>
+          </a:extLst>
         </p:spPr>
       </p:pic>
     </p:spTree>
@@ -9199,11 +9419,11 @@
 </file>
 
 <file path=ppt/slides/slide9.xml><?xml version="1.0" encoding="utf-8"?>
-<p:sld xmlns:a="http://schemas.openxmlformats.org/drawingml/2006/main" xmlns:r="http://schemas.openxmlformats.org/officeDocument/2006/relationships" xmlns:mc="http://schemas.openxmlformats.org/markup-compatibility/2006" xmlns:mv="urn:schemas-microsoft-com:mac:vml" xmlns:p="http://schemas.openxmlformats.org/presentationml/2006/main" xmlns:c="http://schemas.openxmlformats.org/drawingml/2006/chart" xmlns:dgm="http://schemas.openxmlformats.org/drawingml/2006/diagram" xmlns:o="urn:schemas-microsoft-com:office:office" xmlns:v="urn:schemas-microsoft-com:vml" xmlns:pvml="urn:schemas-microsoft-com:office:powerpoint" xmlns:com="http://schemas.openxmlformats.org/drawingml/2006/compatibility" xmlns:p14="http://schemas.microsoft.com/office/powerpoint/2010/main" xmlns:p15="http://schemas.microsoft.com/office/powerpoint/2012/main" xmlns:ahyp="http://schemas.microsoft.com/office/drawing/2018/hyperlinkcolor">
+<p:sld xmlns:a="http://schemas.openxmlformats.org/drawingml/2006/main" xmlns:r="http://schemas.openxmlformats.org/officeDocument/2006/relationships" xmlns:p="http://schemas.openxmlformats.org/presentationml/2006/main">
   <p:cSld>
     <p:spTree>
       <p:nvGrpSpPr>
-        <p:cNvPr id="112" name="Shape 112"/>
+        <p:cNvPr id="1" name="Shape 112"/>
         <p:cNvGrpSpPr/>
         <p:nvPr/>
       </p:nvGrpSpPr>
@@ -9218,7 +9438,9 @@
       <p:sp>
         <p:nvSpPr>
           <p:cNvPr id="113" name="Google Shape;113;p21"/>
-          <p:cNvSpPr txBox="1"/>
+          <p:cNvSpPr txBox="1">
+            <a:spLocks noGrp="1"/>
+          </p:cNvSpPr>
           <p:nvPr>
             <p:ph type="title"/>
           </p:nvPr>
@@ -9233,12 +9455,12 @@
           </a:prstGeom>
         </p:spPr>
         <p:txBody>
-          <a:bodyPr anchorCtr="0" anchor="b" bIns="91425" lIns="91425" spcFirstLastPara="1" rIns="91425" wrap="square" tIns="91425">
+          <a:bodyPr spcFirstLastPara="1" wrap="square" lIns="91425" tIns="91425" rIns="91425" bIns="91425" anchor="b" anchorCtr="0">
             <a:normAutofit/>
           </a:bodyPr>
           <a:lstStyle/>
           <a:p>
-            <a:pPr indent="0" lvl="0" marL="0" rtl="0" algn="l">
+            <a:pPr marL="0" lvl="0" indent="0" algn="l" rtl="0">
               <a:spcBef>
                 <a:spcPts val="0"/>
               </a:spcBef>
@@ -9263,9 +9485,11 @@
       <p:sp>
         <p:nvSpPr>
           <p:cNvPr id="114" name="Google Shape;114;p21"/>
-          <p:cNvSpPr txBox="1"/>
+          <p:cNvSpPr txBox="1">
+            <a:spLocks noGrp="1"/>
+          </p:cNvSpPr>
           <p:nvPr>
-            <p:ph idx="1" type="body"/>
+            <p:ph type="body" idx="1"/>
           </p:nvPr>
         </p:nvSpPr>
         <p:spPr>
@@ -9278,12 +9502,12 @@
           </a:prstGeom>
         </p:spPr>
         <p:txBody>
-          <a:bodyPr anchorCtr="0" anchor="t" bIns="91425" lIns="91425" spcFirstLastPara="1" rIns="91425" wrap="square" tIns="91425">
-            <a:normAutofit fontScale="25000" lnSpcReduction="10000"/>
+          <a:bodyPr spcFirstLastPara="1" wrap="square" lIns="91425" tIns="91425" rIns="91425" bIns="91425" anchor="t" anchorCtr="0">
+            <a:normAutofit fontScale="25000" lnSpcReduction="20000"/>
           </a:bodyPr>
           <a:lstStyle/>
           <a:p>
-            <a:pPr indent="-336550" lvl="0" marL="457200" rtl="0" algn="l">
+            <a:pPr marL="457200" lvl="0" indent="-336550" algn="l" rtl="0">
               <a:spcBef>
                 <a:spcPts val="0"/>
               </a:spcBef>
@@ -9294,13 +9518,13 @@
               <a:buChar char="●"/>
             </a:pPr>
             <a:r>
-              <a:rPr lang="en" sz="6800"/>
+              <a:rPr lang="en" sz="6800" dirty="0"/>
               <a:t>The group that could not receive EITC seems to have a slight positive slope indicating that EITC has a positive impact on bachelors completion. This is once again unexpected since they could not receive it.</a:t>
             </a:r>
-            <a:endParaRPr sz="6800"/>
-          </a:p>
-          <a:p>
-            <a:pPr indent="-336550" lvl="0" marL="457200" rtl="0" algn="l">
+            <a:endParaRPr sz="6800" dirty="0"/>
+          </a:p>
+          <a:p>
+            <a:pPr marL="457200" lvl="0" indent="-336550" algn="l" rtl="0">
               <a:spcBef>
                 <a:spcPts val="0"/>
               </a:spcBef>
@@ -9311,39 +9535,58 @@
               <a:buChar char="●"/>
             </a:pPr>
             <a:r>
-              <a:rPr lang="en" sz="6800"/>
-              <a:t>The group that could receive EITC seems to have a rather flat or slightly negative slope which runs counter to what we would expect.</a:t>
+              <a:rPr lang="en" sz="6800" dirty="0"/>
+              <a:t>The group that could receive EITC seems to have a rather flat slope contrary to expectations</a:t>
             </a:r>
-            <a:endParaRPr/>
+            <a:endParaRPr dirty="0"/>
           </a:p>
         </p:txBody>
       </p:sp>
       <p:pic>
         <p:nvPicPr>
-          <p:cNvPr id="115" name="Google Shape;115;p21" title="Bachelors_Completion_Plot.png"/>
-          <p:cNvPicPr preferRelativeResize="0"/>
+          <p:cNvPr id="2050" name="Picture 2">
+            <a:extLst>
+              <a:ext uri="{FF2B5EF4-FFF2-40B4-BE49-F238E27FC236}">
+                <a16:creationId xmlns:a16="http://schemas.microsoft.com/office/drawing/2014/main" id="{3004A1C8-1314-B74C-1DE0-EC904862DE2E}"/>
+              </a:ext>
+            </a:extLst>
+          </p:cNvPr>
+          <p:cNvPicPr>
+            <a:picLocks noChangeAspect="1" noChangeArrowheads="1"/>
+          </p:cNvPicPr>
           <p:nvPr/>
         </p:nvPicPr>
         <p:blipFill>
           <a:blip r:embed="rId3">
-            <a:alphaModFix/>
+            <a:extLst>
+              <a:ext uri="{28A0092B-C50C-407E-A947-70E740481C1C}">
+                <a14:useLocalDpi xmlns:a14="http://schemas.microsoft.com/office/drawing/2010/main" val="0"/>
+              </a:ext>
+            </a:extLst>
           </a:blip>
+          <a:srcRect/>
           <a:stretch>
             <a:fillRect/>
           </a:stretch>
         </p:blipFill>
-        <p:spPr>
+        <p:spPr bwMode="auto">
           <a:xfrm>
-            <a:off x="4148400" y="1147225"/>
-            <a:ext cx="4921966" cy="3691475"/>
+            <a:off x="4114800" y="1147225"/>
+            <a:ext cx="5029200" cy="3771900"/>
           </a:xfrm>
           <a:prstGeom prst="rect">
             <a:avLst/>
           </a:prstGeom>
           <a:noFill/>
-          <a:ln>
-            <a:noFill/>
-          </a:ln>
+          <a:extLst>
+            <a:ext uri="{909E8E84-426E-40DD-AFC4-6F175D3DCCD1}">
+              <a14:hiddenFill xmlns:a14="http://schemas.microsoft.com/office/drawing/2010/main">
+                <a:solidFill>
+                  <a:srgbClr val="FFFFFF"/>
+                </a:solidFill>
+              </a14:hiddenFill>
+            </a:ext>
+          </a:extLst>
         </p:spPr>
       </p:pic>
     </p:spTree>
@@ -9355,7 +9598,288 @@
 </file>
 
 <file path=ppt/theme/theme1.xml><?xml version="1.0" encoding="utf-8"?>
-<a:theme xmlns:a="http://schemas.openxmlformats.org/drawingml/2006/main" xmlns:r="http://schemas.openxmlformats.org/officeDocument/2006/relationships">
+<a:theme xmlns:a="http://schemas.openxmlformats.org/drawingml/2006/main" name="Luxe">
+  <a:themeElements>
+    <a:clrScheme name="Luxe">
+      <a:dk1>
+        <a:srgbClr val="000000"/>
+      </a:dk1>
+      <a:lt1>
+        <a:srgbClr val="FFFFFF"/>
+      </a:lt1>
+      <a:dk2>
+        <a:srgbClr val="B7B7B7"/>
+      </a:dk2>
+      <a:lt2>
+        <a:srgbClr val="CCA677"/>
+      </a:lt2>
+      <a:accent1>
+        <a:srgbClr val="5D4037"/>
+      </a:accent1>
+      <a:accent2>
+        <a:srgbClr val="455A64"/>
+      </a:accent2>
+      <a:accent3>
+        <a:srgbClr val="57BB8A"/>
+      </a:accent3>
+      <a:accent4>
+        <a:srgbClr val="78909C"/>
+      </a:accent4>
+      <a:accent5>
+        <a:srgbClr val="607D8B"/>
+      </a:accent5>
+      <a:accent6>
+        <a:srgbClr val="DCE755"/>
+      </a:accent6>
+      <a:hlink>
+        <a:srgbClr val="607D8B"/>
+      </a:hlink>
+      <a:folHlink>
+        <a:srgbClr val="607D8B"/>
+      </a:folHlink>
+    </a:clrScheme>
+    <a:fontScheme name="Office">
+      <a:majorFont>
+        <a:latin typeface="Arial"/>
+        <a:ea typeface=""/>
+        <a:cs typeface=""/>
+        <a:font script="Jpan" typeface="ＭＳ Ｐゴシック"/>
+        <a:font script="Hang" typeface="맑은 고딕"/>
+        <a:font script="Hans" typeface="宋体"/>
+        <a:font script="Hant" typeface="新細明體"/>
+        <a:font script="Arab" typeface="Times New Roman"/>
+        <a:font script="Hebr" typeface="Times New Roman"/>
+        <a:font script="Thai" typeface="Angsana New"/>
+        <a:font script="Ethi" typeface="Nyala"/>
+        <a:font script="Beng" typeface="Vrinda"/>
+        <a:font script="Gujr" typeface="Shruti"/>
+        <a:font script="Khmr" typeface="MoolBoran"/>
+        <a:font script="Knda" typeface="Tunga"/>
+        <a:font script="Guru" typeface="Raavi"/>
+        <a:font script="Cans" typeface="Euphemia"/>
+        <a:font script="Cher" typeface="Plantagenet Cherokee"/>
+        <a:font script="Yiii" typeface="Microsoft Yi Baiti"/>
+        <a:font script="Tibt" typeface="Microsoft Himalaya"/>
+        <a:font script="Thaa" typeface="MV Boli"/>
+        <a:font script="Deva" typeface="Mangal"/>
+        <a:font script="Telu" typeface="Gautami"/>
+        <a:font script="Taml" typeface="Latha"/>
+        <a:font script="Syrc" typeface="Estrangelo Edessa"/>
+        <a:font script="Orya" typeface="Kalinga"/>
+        <a:font script="Mlym" typeface="Kartika"/>
+        <a:font script="Laoo" typeface="DokChampa"/>
+        <a:font script="Sinh" typeface="Iskoola Pota"/>
+        <a:font script="Mong" typeface="Mongolian Baiti"/>
+        <a:font script="Viet" typeface="Times New Roman"/>
+        <a:font script="Uigh" typeface="Microsoft Uighur"/>
+        <a:font script="Geor" typeface="Sylfaen"/>
+      </a:majorFont>
+      <a:minorFont>
+        <a:latin typeface="Arial"/>
+        <a:ea typeface=""/>
+        <a:cs typeface=""/>
+        <a:font script="Jpan" typeface="ＭＳ Ｐゴシック"/>
+        <a:font script="Hang" typeface="맑은 고딕"/>
+        <a:font script="Hans" typeface="宋体"/>
+        <a:font script="Hant" typeface="新細明體"/>
+        <a:font script="Arab" typeface="Arial"/>
+        <a:font script="Hebr" typeface="Arial"/>
+        <a:font script="Thai" typeface="Cordia New"/>
+        <a:font script="Ethi" typeface="Nyala"/>
+        <a:font script="Beng" typeface="Vrinda"/>
+        <a:font script="Gujr" typeface="Shruti"/>
+        <a:font script="Khmr" typeface="DaunPenh"/>
+        <a:font script="Knda" typeface="Tunga"/>
+        <a:font script="Guru" typeface="Raavi"/>
+        <a:font script="Cans" typeface="Euphemia"/>
+        <a:font script="Cher" typeface="Plantagenet Cherokee"/>
+        <a:font script="Yiii" typeface="Microsoft Yi Baiti"/>
+        <a:font script="Tibt" typeface="Microsoft Himalaya"/>
+        <a:font script="Thaa" typeface="MV Boli"/>
+        <a:font script="Deva" typeface="Mangal"/>
+        <a:font script="Telu" typeface="Gautami"/>
+        <a:font script="Taml" typeface="Latha"/>
+        <a:font script="Syrc" typeface="Estrangelo Edessa"/>
+        <a:font script="Orya" typeface="Kalinga"/>
+        <a:font script="Mlym" typeface="Kartika"/>
+        <a:font script="Laoo" typeface="DokChampa"/>
+        <a:font script="Sinh" typeface="Iskoola Pota"/>
+        <a:font script="Mong" typeface="Mongolian Baiti"/>
+        <a:font script="Viet" typeface="Arial"/>
+        <a:font script="Uigh" typeface="Microsoft Uighur"/>
+        <a:font script="Geor" typeface="Sylfaen"/>
+      </a:minorFont>
+    </a:fontScheme>
+    <a:fmtScheme name="Office">
+      <a:fillStyleLst>
+        <a:solidFill>
+          <a:schemeClr val="phClr"/>
+        </a:solidFill>
+        <a:gradFill rotWithShape="1">
+          <a:gsLst>
+            <a:gs pos="0">
+              <a:schemeClr val="phClr">
+                <a:tint val="50000"/>
+                <a:satMod val="300000"/>
+              </a:schemeClr>
+            </a:gs>
+            <a:gs pos="35000">
+              <a:schemeClr val="phClr">
+                <a:tint val="37000"/>
+                <a:satMod val="300000"/>
+              </a:schemeClr>
+            </a:gs>
+            <a:gs pos="100000">
+              <a:schemeClr val="phClr">
+                <a:tint val="15000"/>
+                <a:satMod val="350000"/>
+              </a:schemeClr>
+            </a:gs>
+          </a:gsLst>
+          <a:lin ang="16200000" scaled="1"/>
+        </a:gradFill>
+        <a:gradFill rotWithShape="1">
+          <a:gsLst>
+            <a:gs pos="0">
+              <a:schemeClr val="phClr">
+                <a:tint val="100000"/>
+                <a:shade val="100000"/>
+                <a:satMod val="130000"/>
+              </a:schemeClr>
+            </a:gs>
+            <a:gs pos="100000">
+              <a:schemeClr val="phClr">
+                <a:tint val="50000"/>
+                <a:shade val="100000"/>
+                <a:satMod val="350000"/>
+              </a:schemeClr>
+            </a:gs>
+          </a:gsLst>
+          <a:lin ang="16200000" scaled="0"/>
+        </a:gradFill>
+      </a:fillStyleLst>
+      <a:lnStyleLst>
+        <a:ln w="9525" cap="flat" cmpd="sng" algn="ctr">
+          <a:solidFill>
+            <a:schemeClr val="phClr">
+              <a:shade val="95000"/>
+              <a:satMod val="105000"/>
+            </a:schemeClr>
+          </a:solidFill>
+          <a:prstDash val="solid"/>
+        </a:ln>
+        <a:ln w="25400" cap="flat" cmpd="sng" algn="ctr">
+          <a:solidFill>
+            <a:schemeClr val="phClr"/>
+          </a:solidFill>
+          <a:prstDash val="solid"/>
+        </a:ln>
+        <a:ln w="38100" cap="flat" cmpd="sng" algn="ctr">
+          <a:solidFill>
+            <a:schemeClr val="phClr"/>
+          </a:solidFill>
+          <a:prstDash val="solid"/>
+        </a:ln>
+      </a:lnStyleLst>
+      <a:effectStyleLst>
+        <a:effectStyle>
+          <a:effectLst>
+            <a:outerShdw blurRad="40000" dist="20000" dir="5400000" rotWithShape="0">
+              <a:srgbClr val="000000">
+                <a:alpha val="38000"/>
+              </a:srgbClr>
+            </a:outerShdw>
+          </a:effectLst>
+        </a:effectStyle>
+        <a:effectStyle>
+          <a:effectLst>
+            <a:outerShdw blurRad="40000" dist="23000" dir="5400000" rotWithShape="0">
+              <a:srgbClr val="000000">
+                <a:alpha val="35000"/>
+              </a:srgbClr>
+            </a:outerShdw>
+          </a:effectLst>
+        </a:effectStyle>
+        <a:effectStyle>
+          <a:effectLst>
+            <a:outerShdw blurRad="40000" dist="23000" dir="5400000" rotWithShape="0">
+              <a:srgbClr val="000000">
+                <a:alpha val="35000"/>
+              </a:srgbClr>
+            </a:outerShdw>
+          </a:effectLst>
+          <a:scene3d>
+            <a:camera prst="orthographicFront">
+              <a:rot lat="0" lon="0" rev="0"/>
+            </a:camera>
+            <a:lightRig rig="threePt" dir="t">
+              <a:rot lat="0" lon="0" rev="1200000"/>
+            </a:lightRig>
+          </a:scene3d>
+          <a:sp3d>
+            <a:bevelT w="63500" h="25400"/>
+          </a:sp3d>
+        </a:effectStyle>
+      </a:effectStyleLst>
+      <a:bgFillStyleLst>
+        <a:solidFill>
+          <a:schemeClr val="phClr"/>
+        </a:solidFill>
+        <a:gradFill rotWithShape="1">
+          <a:gsLst>
+            <a:gs pos="0">
+              <a:schemeClr val="phClr">
+                <a:tint val="40000"/>
+                <a:satMod val="350000"/>
+              </a:schemeClr>
+            </a:gs>
+            <a:gs pos="40000">
+              <a:schemeClr val="phClr">
+                <a:tint val="45000"/>
+                <a:shade val="99000"/>
+                <a:satMod val="350000"/>
+              </a:schemeClr>
+            </a:gs>
+            <a:gs pos="100000">
+              <a:schemeClr val="phClr">
+                <a:shade val="20000"/>
+                <a:satMod val="255000"/>
+              </a:schemeClr>
+            </a:gs>
+          </a:gsLst>
+          <a:path path="circle">
+            <a:fillToRect l="50000" t="-80000" r="50000" b="180000"/>
+          </a:path>
+        </a:gradFill>
+        <a:gradFill rotWithShape="1">
+          <a:gsLst>
+            <a:gs pos="0">
+              <a:schemeClr val="phClr">
+                <a:tint val="80000"/>
+                <a:satMod val="300000"/>
+              </a:schemeClr>
+            </a:gs>
+            <a:gs pos="100000">
+              <a:schemeClr val="phClr">
+                <a:shade val="30000"/>
+                <a:satMod val="200000"/>
+              </a:schemeClr>
+            </a:gs>
+          </a:gsLst>
+          <a:path path="circle">
+            <a:fillToRect l="50000" t="50000" r="50000" b="50000"/>
+          </a:path>
+        </a:gradFill>
+      </a:bgFillStyleLst>
+    </a:fmtScheme>
+  </a:themeElements>
+  <a:objectDefaults/>
+  <a:extraClrSchemeLst/>
+</a:theme>
+</file>
+
+<file path=ppt/theme/theme2.xml><?xml version="1.0" encoding="utf-8"?>
+<a:theme xmlns:a="http://schemas.openxmlformats.org/drawingml/2006/main">
   <a:themeElements>
     <a:clrScheme name="Default">
       <a:dk1>
@@ -9630,284 +10154,7 @@
       </a:bgFillStyleLst>
     </a:fmtScheme>
   </a:themeElements>
-</a:theme>
-</file>
-
-<file path=ppt/theme/theme2.xml><?xml version="1.0" encoding="utf-8"?>
-<a:theme xmlns:a="http://schemas.openxmlformats.org/drawingml/2006/main" xmlns:r="http://schemas.openxmlformats.org/officeDocument/2006/relationships" name="Luxe">
-  <a:themeElements>
-    <a:clrScheme name="Luxe">
-      <a:dk1>
-        <a:srgbClr val="000000"/>
-      </a:dk1>
-      <a:lt1>
-        <a:srgbClr val="FFFFFF"/>
-      </a:lt1>
-      <a:dk2>
-        <a:srgbClr val="B7B7B7"/>
-      </a:dk2>
-      <a:lt2>
-        <a:srgbClr val="CCA677"/>
-      </a:lt2>
-      <a:accent1>
-        <a:srgbClr val="5D4037"/>
-      </a:accent1>
-      <a:accent2>
-        <a:srgbClr val="455A64"/>
-      </a:accent2>
-      <a:accent3>
-        <a:srgbClr val="57BB8A"/>
-      </a:accent3>
-      <a:accent4>
-        <a:srgbClr val="78909C"/>
-      </a:accent4>
-      <a:accent5>
-        <a:srgbClr val="607D8B"/>
-      </a:accent5>
-      <a:accent6>
-        <a:srgbClr val="DCE755"/>
-      </a:accent6>
-      <a:hlink>
-        <a:srgbClr val="607D8B"/>
-      </a:hlink>
-      <a:folHlink>
-        <a:srgbClr val="607D8B"/>
-      </a:folHlink>
-    </a:clrScheme>
-    <a:fontScheme name="Office">
-      <a:majorFont>
-        <a:latin typeface="Arial"/>
-        <a:ea typeface=""/>
-        <a:cs typeface=""/>
-        <a:font script="Jpan" typeface="ＭＳ Ｐゴシック"/>
-        <a:font script="Hang" typeface="맑은 고딕"/>
-        <a:font script="Hans" typeface="宋体"/>
-        <a:font script="Hant" typeface="新細明體"/>
-        <a:font script="Arab" typeface="Times New Roman"/>
-        <a:font script="Hebr" typeface="Times New Roman"/>
-        <a:font script="Thai" typeface="Angsana New"/>
-        <a:font script="Ethi" typeface="Nyala"/>
-        <a:font script="Beng" typeface="Vrinda"/>
-        <a:font script="Gujr" typeface="Shruti"/>
-        <a:font script="Khmr" typeface="MoolBoran"/>
-        <a:font script="Knda" typeface="Tunga"/>
-        <a:font script="Guru" typeface="Raavi"/>
-        <a:font script="Cans" typeface="Euphemia"/>
-        <a:font script="Cher" typeface="Plantagenet Cherokee"/>
-        <a:font script="Yiii" typeface="Microsoft Yi Baiti"/>
-        <a:font script="Tibt" typeface="Microsoft Himalaya"/>
-        <a:font script="Thaa" typeface="MV Boli"/>
-        <a:font script="Deva" typeface="Mangal"/>
-        <a:font script="Telu" typeface="Gautami"/>
-        <a:font script="Taml" typeface="Latha"/>
-        <a:font script="Syrc" typeface="Estrangelo Edessa"/>
-        <a:font script="Orya" typeface="Kalinga"/>
-        <a:font script="Mlym" typeface="Kartika"/>
-        <a:font script="Laoo" typeface="DokChampa"/>
-        <a:font script="Sinh" typeface="Iskoola Pota"/>
-        <a:font script="Mong" typeface="Mongolian Baiti"/>
-        <a:font script="Viet" typeface="Times New Roman"/>
-        <a:font script="Uigh" typeface="Microsoft Uighur"/>
-        <a:font script="Geor" typeface="Sylfaen"/>
-      </a:majorFont>
-      <a:minorFont>
-        <a:latin typeface="Arial"/>
-        <a:ea typeface=""/>
-        <a:cs typeface=""/>
-        <a:font script="Jpan" typeface="ＭＳ Ｐゴシック"/>
-        <a:font script="Hang" typeface="맑은 고딕"/>
-        <a:font script="Hans" typeface="宋体"/>
-        <a:font script="Hant" typeface="新細明體"/>
-        <a:font script="Arab" typeface="Arial"/>
-        <a:font script="Hebr" typeface="Arial"/>
-        <a:font script="Thai" typeface="Cordia New"/>
-        <a:font script="Ethi" typeface="Nyala"/>
-        <a:font script="Beng" typeface="Vrinda"/>
-        <a:font script="Gujr" typeface="Shruti"/>
-        <a:font script="Khmr" typeface="DaunPenh"/>
-        <a:font script="Knda" typeface="Tunga"/>
-        <a:font script="Guru" typeface="Raavi"/>
-        <a:font script="Cans" typeface="Euphemia"/>
-        <a:font script="Cher" typeface="Plantagenet Cherokee"/>
-        <a:font script="Yiii" typeface="Microsoft Yi Baiti"/>
-        <a:font script="Tibt" typeface="Microsoft Himalaya"/>
-        <a:font script="Thaa" typeface="MV Boli"/>
-        <a:font script="Deva" typeface="Mangal"/>
-        <a:font script="Telu" typeface="Gautami"/>
-        <a:font script="Taml" typeface="Latha"/>
-        <a:font script="Syrc" typeface="Estrangelo Edessa"/>
-        <a:font script="Orya" typeface="Kalinga"/>
-        <a:font script="Mlym" typeface="Kartika"/>
-        <a:font script="Laoo" typeface="DokChampa"/>
-        <a:font script="Sinh" typeface="Iskoola Pota"/>
-        <a:font script="Mong" typeface="Mongolian Baiti"/>
-        <a:font script="Viet" typeface="Arial"/>
-        <a:font script="Uigh" typeface="Microsoft Uighur"/>
-        <a:font script="Geor" typeface="Sylfaen"/>
-      </a:minorFont>
-    </a:fontScheme>
-    <a:fmtScheme name="Office">
-      <a:fillStyleLst>
-        <a:solidFill>
-          <a:schemeClr val="phClr"/>
-        </a:solidFill>
-        <a:gradFill rotWithShape="1">
-          <a:gsLst>
-            <a:gs pos="0">
-              <a:schemeClr val="phClr">
-                <a:tint val="50000"/>
-                <a:satMod val="300000"/>
-              </a:schemeClr>
-            </a:gs>
-            <a:gs pos="35000">
-              <a:schemeClr val="phClr">
-                <a:tint val="37000"/>
-                <a:satMod val="300000"/>
-              </a:schemeClr>
-            </a:gs>
-            <a:gs pos="100000">
-              <a:schemeClr val="phClr">
-                <a:tint val="15000"/>
-                <a:satMod val="350000"/>
-              </a:schemeClr>
-            </a:gs>
-          </a:gsLst>
-          <a:lin ang="16200000" scaled="1"/>
-        </a:gradFill>
-        <a:gradFill rotWithShape="1">
-          <a:gsLst>
-            <a:gs pos="0">
-              <a:schemeClr val="phClr">
-                <a:tint val="100000"/>
-                <a:shade val="100000"/>
-                <a:satMod val="130000"/>
-              </a:schemeClr>
-            </a:gs>
-            <a:gs pos="100000">
-              <a:schemeClr val="phClr">
-                <a:tint val="50000"/>
-                <a:shade val="100000"/>
-                <a:satMod val="350000"/>
-              </a:schemeClr>
-            </a:gs>
-          </a:gsLst>
-          <a:lin ang="16200000" scaled="0"/>
-        </a:gradFill>
-      </a:fillStyleLst>
-      <a:lnStyleLst>
-        <a:ln w="9525" cap="flat" cmpd="sng" algn="ctr">
-          <a:solidFill>
-            <a:schemeClr val="phClr">
-              <a:shade val="95000"/>
-              <a:satMod val="105000"/>
-            </a:schemeClr>
-          </a:solidFill>
-          <a:prstDash val="solid"/>
-        </a:ln>
-        <a:ln w="25400" cap="flat" cmpd="sng" algn="ctr">
-          <a:solidFill>
-            <a:schemeClr val="phClr"/>
-          </a:solidFill>
-          <a:prstDash val="solid"/>
-        </a:ln>
-        <a:ln w="38100" cap="flat" cmpd="sng" algn="ctr">
-          <a:solidFill>
-            <a:schemeClr val="phClr"/>
-          </a:solidFill>
-          <a:prstDash val="solid"/>
-        </a:ln>
-      </a:lnStyleLst>
-      <a:effectStyleLst>
-        <a:effectStyle>
-          <a:effectLst>
-            <a:outerShdw blurRad="40000" dist="20000" dir="5400000" rotWithShape="0">
-              <a:srgbClr val="000000">
-                <a:alpha val="38000"/>
-              </a:srgbClr>
-            </a:outerShdw>
-          </a:effectLst>
-        </a:effectStyle>
-        <a:effectStyle>
-          <a:effectLst>
-            <a:outerShdw blurRad="40000" dist="23000" dir="5400000" rotWithShape="0">
-              <a:srgbClr val="000000">
-                <a:alpha val="35000"/>
-              </a:srgbClr>
-            </a:outerShdw>
-          </a:effectLst>
-        </a:effectStyle>
-        <a:effectStyle>
-          <a:effectLst>
-            <a:outerShdw blurRad="40000" dist="23000" dir="5400000" rotWithShape="0">
-              <a:srgbClr val="000000">
-                <a:alpha val="35000"/>
-              </a:srgbClr>
-            </a:outerShdw>
-          </a:effectLst>
-          <a:scene3d>
-            <a:camera prst="orthographicFront">
-              <a:rot lat="0" lon="0" rev="0"/>
-            </a:camera>
-            <a:lightRig rig="threePt" dir="t">
-              <a:rot lat="0" lon="0" rev="1200000"/>
-            </a:lightRig>
-          </a:scene3d>
-          <a:sp3d>
-            <a:bevelT w="63500" h="25400"/>
-          </a:sp3d>
-        </a:effectStyle>
-      </a:effectStyleLst>
-      <a:bgFillStyleLst>
-        <a:solidFill>
-          <a:schemeClr val="phClr"/>
-        </a:solidFill>
-        <a:gradFill rotWithShape="1">
-          <a:gsLst>
-            <a:gs pos="0">
-              <a:schemeClr val="phClr">
-                <a:tint val="40000"/>
-                <a:satMod val="350000"/>
-              </a:schemeClr>
-            </a:gs>
-            <a:gs pos="40000">
-              <a:schemeClr val="phClr">
-                <a:tint val="45000"/>
-                <a:shade val="99000"/>
-                <a:satMod val="350000"/>
-              </a:schemeClr>
-            </a:gs>
-            <a:gs pos="100000">
-              <a:schemeClr val="phClr">
-                <a:shade val="20000"/>
-                <a:satMod val="255000"/>
-              </a:schemeClr>
-            </a:gs>
-          </a:gsLst>
-          <a:path path="circle">
-            <a:fillToRect l="50000" t="-80000" r="50000" b="180000"/>
-          </a:path>
-        </a:gradFill>
-        <a:gradFill rotWithShape="1">
-          <a:gsLst>
-            <a:gs pos="0">
-              <a:schemeClr val="phClr">
-                <a:tint val="80000"/>
-                <a:satMod val="300000"/>
-              </a:schemeClr>
-            </a:gs>
-            <a:gs pos="100000">
-              <a:schemeClr val="phClr">
-                <a:shade val="30000"/>
-                <a:satMod val="200000"/>
-              </a:schemeClr>
-            </a:gs>
-          </a:gsLst>
-          <a:path path="circle">
-            <a:fillToRect l="50000" t="50000" r="50000" b="50000"/>
-          </a:path>
-        </a:gradFill>
-      </a:bgFillStyleLst>
-    </a:fmtScheme>
-  </a:themeElements>
+  <a:objectDefaults/>
+  <a:extraClrSchemeLst/>
 </a:theme>
 </file>